--- a/Current Presentation/Charlie- summer 2026 presentation.pptx
+++ b/Current Presentation/Charlie- summer 2026 presentation.pptx
@@ -110,6 +110,14 @@
     </p:ext>
   </p:extLst>
 </p:presentation>
+</file>
+
+<file path=ppt/revisionInfo.xml><?xml version="1.0" encoding="utf-8"?>
+<p1510:revInfo xmlns:a="http://schemas.openxmlformats.org/drawingml/2006/main" xmlns:r="http://schemas.openxmlformats.org/officeDocument/2006/relationships" xmlns:p1510="http://schemas.microsoft.com/office/powerpoint/2015/10/main">
+  <p1510:revLst>
+    <p1510:client id="{43CB8E75-68D2-113B-DE57-B3F75E6001AA}" v="27" dt="2026-09-16T16:25:32.272"/>
+  </p1510:revLst>
+</p1510:revInfo>
 </file>
 
 <file path=ppt/slideLayouts/slideLayout1.xml><?xml version="1.0" encoding="utf-8"?>
@@ -2984,7 +2992,17 @@
           <a:bodyPr/>
           <a:lstStyle/>
           <a:p>
-            <a:endParaRPr lang="en-US"/>
+            <a:r>
+              <a:rPr lang="en-US" dirty="0"/>
+              <a:t>Charlie Hatch</a:t>
+            </a:r>
+            <a:br>
+              <a:rPr lang="en-US" dirty="0"/>
+            </a:br>
+            <a:r>
+              <a:rPr lang="en-US" dirty="0"/>
+              <a:t>Summer term</a:t>
+            </a:r>
           </a:p>
         </p:txBody>
       </p:sp>

--- a/Current Presentation/Charlie- summer 2026 presentation.pptx
+++ b/Current Presentation/Charlie- summer 2026 presentation.pptx
@@ -110,14 +110,6 @@
     </p:ext>
   </p:extLst>
 </p:presentation>
-</file>
-
-<file path=ppt/revisionInfo.xml><?xml version="1.0" encoding="utf-8"?>
-<p1510:revInfo xmlns:a="http://schemas.openxmlformats.org/drawingml/2006/main" xmlns:r="http://schemas.openxmlformats.org/officeDocument/2006/relationships" xmlns:p1510="http://schemas.microsoft.com/office/powerpoint/2015/10/main">
-  <p1510:revLst>
-    <p1510:client id="{43CB8E75-68D2-113B-DE57-B3F75E6001AA}" v="27" dt="2026-09-16T16:25:32.272"/>
-  </p1510:revLst>
-</p1510:revInfo>
 </file>
 
 <file path=ppt/slideLayouts/slideLayout1.xml><?xml version="1.0" encoding="utf-8"?>
@@ -2992,17 +2984,7 @@
           <a:bodyPr/>
           <a:lstStyle/>
           <a:p>
-            <a:r>
-              <a:rPr lang="en-US" dirty="0"/>
-              <a:t>Charlie Hatch</a:t>
-            </a:r>
-            <a:br>
-              <a:rPr lang="en-US" dirty="0"/>
-            </a:br>
-            <a:r>
-              <a:rPr lang="en-US" dirty="0"/>
-              <a:t>Summer term</a:t>
-            </a:r>
+            <a:endParaRPr lang="en-US"/>
           </a:p>
         </p:txBody>
       </p:sp>

--- a/Current Presentation/Charlie- summer 2026 presentation.pptx
+++ b/Current Presentation/Charlie- summer 2026 presentation.pptx
@@ -6,6 +6,9 @@
   </p:sldMasterIdLst>
   <p:sldIdLst>
     <p:sldId id="256" r:id="rId2"/>
+    <p:sldId id="257" r:id="rId3"/>
+    <p:sldId id="258" r:id="rId4"/>
+    <p:sldId id="259" r:id="rId5"/>
   </p:sldIdLst>
   <p:sldSz cx="12192000" cy="6858000"/>
   <p:notesSz cx="6858000" cy="9144000"/>
@@ -110,6 +113,14 @@
     </p:ext>
   </p:extLst>
 </p:presentation>
+</file>
+
+<file path=ppt/revisionInfo.xml><?xml version="1.0" encoding="utf-8"?>
+<p1510:revInfo xmlns:a="http://schemas.openxmlformats.org/drawingml/2006/main" xmlns:r="http://schemas.openxmlformats.org/officeDocument/2006/relationships" xmlns:p1510="http://schemas.microsoft.com/office/powerpoint/2015/10/main">
+  <p1510:revLst>
+    <p1510:client id="{CC656977-A51D-85A4-2C0F-8858A80BAC84}" v="18" dt="2026-09-16T16:28:57.108"/>
+  </p1510:revLst>
+</p1510:revInfo>
 </file>
 
 <file path=ppt/slideLayouts/slideLayout1.xml><?xml version="1.0" encoding="utf-8"?>
@@ -3011,6 +3022,255 @@
     <p:extLst>
       <p:ext uri="{BB962C8B-B14F-4D97-AF65-F5344CB8AC3E}">
         <p14:creationId xmlns:p14="http://schemas.microsoft.com/office/powerpoint/2010/main" val="109857222"/>
+      </p:ext>
+    </p:extLst>
+  </p:cSld>
+  <p:clrMapOvr>
+    <a:masterClrMapping/>
+  </p:clrMapOvr>
+</p:sld>
+</file>
+
+<file path=ppt/slides/slide2.xml><?xml version="1.0" encoding="utf-8"?>
+<p:sld xmlns:a="http://schemas.openxmlformats.org/drawingml/2006/main" xmlns:r="http://schemas.openxmlformats.org/officeDocument/2006/relationships" xmlns:p="http://schemas.openxmlformats.org/presentationml/2006/main">
+  <p:cSld>
+    <p:spTree>
+      <p:nvGrpSpPr>
+        <p:cNvPr id="1" name=""/>
+        <p:cNvGrpSpPr/>
+        <p:nvPr/>
+      </p:nvGrpSpPr>
+      <p:grpSpPr>
+        <a:xfrm>
+          <a:off x="0" y="0"/>
+          <a:ext cx="0" cy="0"/>
+          <a:chOff x="0" y="0"/>
+          <a:chExt cx="0" cy="0"/>
+        </a:xfrm>
+      </p:grpSpPr>
+      <p:sp>
+        <p:nvSpPr>
+          <p:cNvPr id="2" name="Title 1">
+            <a:extLst>
+              <a:ext uri="{FF2B5EF4-FFF2-40B4-BE49-F238E27FC236}">
+                <a16:creationId xmlns:a16="http://schemas.microsoft.com/office/drawing/2014/main" id="{7A5F2180-E15E-B009-5765-EBED79EED384}"/>
+              </a:ext>
+            </a:extLst>
+          </p:cNvPr>
+          <p:cNvSpPr>
+            <a:spLocks noGrp="1"/>
+          </p:cNvSpPr>
+          <p:nvPr>
+            <p:ph type="title"/>
+          </p:nvPr>
+        </p:nvSpPr>
+        <p:spPr/>
+        <p:txBody>
+          <a:bodyPr/>
+          <a:lstStyle/>
+          <a:p>
+            <a:r>
+              <a:rPr lang="en-US" dirty="0"/>
+              <a:t>Tech</a:t>
+            </a:r>
+          </a:p>
+        </p:txBody>
+      </p:sp>
+      <p:sp>
+        <p:nvSpPr>
+          <p:cNvPr id="3" name="Content Placeholder 2">
+            <a:extLst>
+              <a:ext uri="{FF2B5EF4-FFF2-40B4-BE49-F238E27FC236}">
+                <a16:creationId xmlns:a16="http://schemas.microsoft.com/office/drawing/2014/main" id="{8B1FB247-1388-9DAE-16BD-CB1166A1567A}"/>
+              </a:ext>
+            </a:extLst>
+          </p:cNvPr>
+          <p:cNvSpPr>
+            <a:spLocks noGrp="1"/>
+          </p:cNvSpPr>
+          <p:nvPr>
+            <p:ph idx="1"/>
+          </p:nvPr>
+        </p:nvSpPr>
+        <p:spPr/>
+        <p:txBody>
+          <a:bodyPr/>
+          <a:lstStyle/>
+          <a:p>
+            <a:endParaRPr lang="en-US"/>
+          </a:p>
+        </p:txBody>
+      </p:sp>
+    </p:spTree>
+    <p:extLst>
+      <p:ext uri="{BB962C8B-B14F-4D97-AF65-F5344CB8AC3E}">
+        <p14:creationId xmlns:p14="http://schemas.microsoft.com/office/powerpoint/2010/main" val="3198262520"/>
+      </p:ext>
+    </p:extLst>
+  </p:cSld>
+  <p:clrMapOvr>
+    <a:masterClrMapping/>
+  </p:clrMapOvr>
+</p:sld>
+</file>
+
+<file path=ppt/slides/slide3.xml><?xml version="1.0" encoding="utf-8"?>
+<p:sld xmlns:a="http://schemas.openxmlformats.org/drawingml/2006/main" xmlns:r="http://schemas.openxmlformats.org/officeDocument/2006/relationships" xmlns:p="http://schemas.openxmlformats.org/presentationml/2006/main">
+  <p:cSld>
+    <p:spTree>
+      <p:nvGrpSpPr>
+        <p:cNvPr id="1" name=""/>
+        <p:cNvGrpSpPr/>
+        <p:nvPr/>
+      </p:nvGrpSpPr>
+      <p:grpSpPr>
+        <a:xfrm>
+          <a:off x="0" y="0"/>
+          <a:ext cx="0" cy="0"/>
+          <a:chOff x="0" y="0"/>
+          <a:chExt cx="0" cy="0"/>
+        </a:xfrm>
+      </p:grpSpPr>
+      <p:sp>
+        <p:nvSpPr>
+          <p:cNvPr id="2" name="Title 1">
+            <a:extLst>
+              <a:ext uri="{FF2B5EF4-FFF2-40B4-BE49-F238E27FC236}">
+                <a16:creationId xmlns:a16="http://schemas.microsoft.com/office/drawing/2014/main" id="{665EBA86-44A5-3C4C-75BA-9477135DF42B}"/>
+              </a:ext>
+            </a:extLst>
+          </p:cNvPr>
+          <p:cNvSpPr>
+            <a:spLocks noGrp="1"/>
+          </p:cNvSpPr>
+          <p:nvPr>
+            <p:ph type="title"/>
+          </p:nvPr>
+        </p:nvSpPr>
+        <p:spPr/>
+        <p:txBody>
+          <a:bodyPr/>
+          <a:lstStyle/>
+          <a:p>
+            <a:r>
+              <a:rPr lang="en-US"/>
+              <a:t>Core</a:t>
+            </a:r>
+          </a:p>
+        </p:txBody>
+      </p:sp>
+      <p:sp>
+        <p:nvSpPr>
+          <p:cNvPr id="3" name="Content Placeholder 2">
+            <a:extLst>
+              <a:ext uri="{FF2B5EF4-FFF2-40B4-BE49-F238E27FC236}">
+                <a16:creationId xmlns:a16="http://schemas.microsoft.com/office/drawing/2014/main" id="{F6EBC09B-D6C1-D87F-5C2C-4D70394D29EB}"/>
+              </a:ext>
+            </a:extLst>
+          </p:cNvPr>
+          <p:cNvSpPr>
+            <a:spLocks noGrp="1"/>
+          </p:cNvSpPr>
+          <p:nvPr>
+            <p:ph idx="1"/>
+          </p:nvPr>
+        </p:nvSpPr>
+        <p:spPr/>
+        <p:txBody>
+          <a:bodyPr/>
+          <a:lstStyle/>
+          <a:p>
+            <a:endParaRPr lang="en-US"/>
+          </a:p>
+        </p:txBody>
+      </p:sp>
+    </p:spTree>
+    <p:extLst>
+      <p:ext uri="{BB962C8B-B14F-4D97-AF65-F5344CB8AC3E}">
+        <p14:creationId xmlns:p14="http://schemas.microsoft.com/office/powerpoint/2010/main" val="2396209809"/>
+      </p:ext>
+    </p:extLst>
+  </p:cSld>
+  <p:clrMapOvr>
+    <a:masterClrMapping/>
+  </p:clrMapOvr>
+</p:sld>
+</file>
+
+<file path=ppt/slides/slide4.xml><?xml version="1.0" encoding="utf-8"?>
+<p:sld xmlns:a="http://schemas.openxmlformats.org/drawingml/2006/main" xmlns:r="http://schemas.openxmlformats.org/officeDocument/2006/relationships" xmlns:p="http://schemas.openxmlformats.org/presentationml/2006/main">
+  <p:cSld>
+    <p:spTree>
+      <p:nvGrpSpPr>
+        <p:cNvPr id="1" name=""/>
+        <p:cNvGrpSpPr/>
+        <p:nvPr/>
+      </p:nvGrpSpPr>
+      <p:grpSpPr>
+        <a:xfrm>
+          <a:off x="0" y="0"/>
+          <a:ext cx="0" cy="0"/>
+          <a:chOff x="0" y="0"/>
+          <a:chExt cx="0" cy="0"/>
+        </a:xfrm>
+      </p:grpSpPr>
+      <p:sp>
+        <p:nvSpPr>
+          <p:cNvPr id="2" name="Title 1">
+            <a:extLst>
+              <a:ext uri="{FF2B5EF4-FFF2-40B4-BE49-F238E27FC236}">
+                <a16:creationId xmlns:a16="http://schemas.microsoft.com/office/drawing/2014/main" id="{38B0D4B6-C649-005D-675C-6B8005325CC6}"/>
+              </a:ext>
+            </a:extLst>
+          </p:cNvPr>
+          <p:cNvSpPr>
+            <a:spLocks noGrp="1"/>
+          </p:cNvSpPr>
+          <p:nvPr>
+            <p:ph type="title"/>
+          </p:nvPr>
+        </p:nvSpPr>
+        <p:spPr/>
+        <p:txBody>
+          <a:bodyPr/>
+          <a:lstStyle/>
+          <a:p>
+            <a:r>
+              <a:rPr lang="en-US"/>
+              <a:t>Self Managment</a:t>
+            </a:r>
+          </a:p>
+        </p:txBody>
+      </p:sp>
+      <p:sp>
+        <p:nvSpPr>
+          <p:cNvPr id="3" name="Content Placeholder 2">
+            <a:extLst>
+              <a:ext uri="{FF2B5EF4-FFF2-40B4-BE49-F238E27FC236}">
+                <a16:creationId xmlns:a16="http://schemas.microsoft.com/office/drawing/2014/main" id="{612C1F0C-B4CF-1BBE-C947-A00D9E0A9CCD}"/>
+              </a:ext>
+            </a:extLst>
+          </p:cNvPr>
+          <p:cNvSpPr>
+            <a:spLocks noGrp="1"/>
+          </p:cNvSpPr>
+          <p:nvPr>
+            <p:ph idx="1"/>
+          </p:nvPr>
+        </p:nvSpPr>
+        <p:spPr/>
+        <p:txBody>
+          <a:bodyPr/>
+          <a:lstStyle/>
+          <a:p>
+            <a:endParaRPr lang="en-US"/>
+          </a:p>
+        </p:txBody>
+      </p:sp>
+    </p:spTree>
+    <p:extLst>
+      <p:ext uri="{BB962C8B-B14F-4D97-AF65-F5344CB8AC3E}">
+        <p14:creationId xmlns:p14="http://schemas.microsoft.com/office/powerpoint/2010/main" val="1023952166"/>
       </p:ext>
     </p:extLst>
   </p:cSld>

--- a/Current Presentation/Charlie- summer 2026 presentation.pptx
+++ b/Current Presentation/Charlie- summer 2026 presentation.pptx
@@ -9,6 +9,8 @@
     <p:sldId id="257" r:id="rId3"/>
     <p:sldId id="258" r:id="rId4"/>
     <p:sldId id="259" r:id="rId5"/>
+    <p:sldId id="260" r:id="rId6"/>
+    <p:sldId id="261" r:id="rId7"/>
   </p:sldIdLst>
   <p:sldSz cx="12192000" cy="6858000"/>
   <p:notesSz cx="6858000" cy="9144000"/>
@@ -107,18 +109,13 @@
       </a:defRPr>
     </a:lvl9pPr>
   </p:defaultTextStyle>
-  <p:extLst>
-    <p:ext uri="{EFAFB233-063F-42B5-8137-9DF3F51BA10A}">
-      <p15:sldGuideLst xmlns:p15="http://schemas.microsoft.com/office/powerpoint/2012/main"/>
-    </p:ext>
-  </p:extLst>
 </p:presentation>
 </file>
 
 <file path=ppt/revisionInfo.xml><?xml version="1.0" encoding="utf-8"?>
 <p1510:revInfo xmlns:a="http://schemas.openxmlformats.org/drawingml/2006/main" xmlns:r="http://schemas.openxmlformats.org/officeDocument/2006/relationships" xmlns:p1510="http://schemas.microsoft.com/office/powerpoint/2015/10/main">
   <p1510:revLst>
-    <p1510:client id="{CC656977-A51D-85A4-2C0F-8858A80BAC84}" v="18" dt="2026-09-16T16:28:57.108"/>
+    <p1510:client id="{CC656977-A51D-85A4-2C0F-8858A80BAC84}" v="169" dt="2026-09-16T17:03:38.262"/>
   </p1510:revLst>
 </p1510:revInfo>
 </file>
@@ -168,7 +165,6 @@
               <a:rPr lang="en-US"/>
               <a:t>Click to edit Master title style</a:t>
             </a:r>
-            <a:endParaRPr lang="en-US" dirty="0"/>
           </a:p>
         </p:txBody>
       </p:sp>
@@ -233,7 +229,6 @@
               <a:rPr lang="en-US"/>
               <a:t>Click to edit Master subtitle style</a:t>
             </a:r>
-            <a:endParaRPr lang="en-US" dirty="0"/>
           </a:p>
         </p:txBody>
       </p:sp>
@@ -351,7 +346,6 @@
               <a:rPr lang="en-US"/>
               <a:t>Click to edit Master title style</a:t>
             </a:r>
-            <a:endParaRPr lang="en-US" dirty="0"/>
           </a:p>
         </p:txBody>
       </p:sp>
@@ -403,7 +397,6 @@
               <a:rPr lang="en-US"/>
               <a:t>Fifth level</a:t>
             </a:r>
-            <a:endParaRPr lang="en-US" dirty="0"/>
           </a:p>
         </p:txBody>
       </p:sp>
@@ -526,7 +519,6 @@
               <a:rPr lang="en-US"/>
               <a:t>Click to edit Master title style</a:t>
             </a:r>
-            <a:endParaRPr lang="en-US" dirty="0"/>
           </a:p>
         </p:txBody>
       </p:sp>
@@ -583,7 +575,6 @@
               <a:rPr lang="en-US"/>
               <a:t>Fifth level</a:t>
             </a:r>
-            <a:endParaRPr lang="en-US" dirty="0"/>
           </a:p>
         </p:txBody>
       </p:sp>
@@ -701,7 +692,6 @@
               <a:rPr lang="en-US"/>
               <a:t>Click to edit Master title style</a:t>
             </a:r>
-            <a:endParaRPr lang="en-US" dirty="0"/>
           </a:p>
         </p:txBody>
       </p:sp>
@@ -753,7 +743,6 @@
               <a:rPr lang="en-US"/>
               <a:t>Fifth level</a:t>
             </a:r>
-            <a:endParaRPr lang="en-US" dirty="0"/>
           </a:p>
         </p:txBody>
       </p:sp>
@@ -880,7 +869,6 @@
               <a:rPr lang="en-US"/>
               <a:t>Click to edit Master title style</a:t>
             </a:r>
-            <a:endParaRPr lang="en-US" dirty="0"/>
           </a:p>
         </p:txBody>
       </p:sp>
@@ -1117,7 +1105,6 @@
               <a:rPr lang="en-US"/>
               <a:t>Click to edit Master title style</a:t>
             </a:r>
-            <a:endParaRPr lang="en-US" dirty="0"/>
           </a:p>
         </p:txBody>
       </p:sp>
@@ -1174,7 +1161,6 @@
               <a:rPr lang="en-US"/>
               <a:t>Fifth level</a:t>
             </a:r>
-            <a:endParaRPr lang="en-US" dirty="0"/>
           </a:p>
         </p:txBody>
       </p:sp>
@@ -1231,7 +1217,6 @@
               <a:rPr lang="en-US"/>
               <a:t>Fifth level</a:t>
             </a:r>
-            <a:endParaRPr lang="en-US" dirty="0"/>
           </a:p>
         </p:txBody>
       </p:sp>
@@ -1354,7 +1339,6 @@
               <a:rPr lang="en-US"/>
               <a:t>Click to edit Master title style</a:t>
             </a:r>
-            <a:endParaRPr lang="en-US" dirty="0"/>
           </a:p>
         </p:txBody>
       </p:sp>
@@ -1476,7 +1460,6 @@
               <a:rPr lang="en-US"/>
               <a:t>Fifth level</a:t>
             </a:r>
-            <a:endParaRPr lang="en-US" dirty="0"/>
           </a:p>
         </p:txBody>
       </p:sp>
@@ -1598,7 +1581,6 @@
               <a:rPr lang="en-US"/>
               <a:t>Fifth level</a:t>
             </a:r>
-            <a:endParaRPr lang="en-US" dirty="0"/>
           </a:p>
         </p:txBody>
       </p:sp>
@@ -1716,7 +1698,6 @@
               <a:rPr lang="en-US"/>
               <a:t>Click to edit Master title style</a:t>
             </a:r>
-            <a:endParaRPr lang="en-US" dirty="0"/>
           </a:p>
         </p:txBody>
       </p:sp>
@@ -1938,7 +1919,6 @@
               <a:rPr lang="en-US"/>
               <a:t>Click to edit Master title style</a:t>
             </a:r>
-            <a:endParaRPr lang="en-US" dirty="0"/>
           </a:p>
         </p:txBody>
       </p:sp>
@@ -2023,7 +2003,6 @@
               <a:rPr lang="en-US"/>
               <a:t>Fifth level</a:t>
             </a:r>
-            <a:endParaRPr lang="en-US" dirty="0"/>
           </a:p>
         </p:txBody>
       </p:sp>
@@ -2215,7 +2194,6 @@
               <a:rPr lang="en-US"/>
               <a:t>Click to edit Master title style</a:t>
             </a:r>
-            <a:endParaRPr lang="en-US" dirty="0"/>
           </a:p>
         </p:txBody>
       </p:sp>
@@ -2276,7 +2254,7 @@
             </a:lvl9pPr>
           </a:lstStyle>
           <a:p>
-            <a:endParaRPr lang="en-US" dirty="0"/>
+            <a:endParaRPr lang="en-US"/>
           </a:p>
         </p:txBody>
       </p:sp>
@@ -2474,7 +2452,6 @@
               <a:rPr lang="en-US"/>
               <a:t>Click to edit Master title style</a:t>
             </a:r>
-            <a:endParaRPr lang="en-US" dirty="0"/>
           </a:p>
         </p:txBody>
       </p:sp>
@@ -2536,7 +2513,6 @@
               <a:rPr lang="en-US"/>
               <a:t>Fifth level</a:t>
             </a:r>
-            <a:endParaRPr lang="en-US" dirty="0"/>
           </a:p>
         </p:txBody>
       </p:sp>
@@ -3070,7 +3046,7 @@
           <a:lstStyle/>
           <a:p>
             <a:r>
-              <a:rPr lang="en-US" dirty="0"/>
+              <a:rPr lang="en-US"/>
               <a:t>Tech</a:t>
             </a:r>
           </a:p>
@@ -3117,6 +3093,14 @@
 <file path=ppt/slides/slide3.xml><?xml version="1.0" encoding="utf-8"?>
 <p:sld xmlns:a="http://schemas.openxmlformats.org/drawingml/2006/main" xmlns:r="http://schemas.openxmlformats.org/officeDocument/2006/relationships" xmlns:p="http://schemas.openxmlformats.org/presentationml/2006/main">
   <p:cSld>
+    <p:bg>
+      <p:bgPr>
+        <a:solidFill>
+          <a:srgbClr val="FAFAFA"/>
+        </a:solidFill>
+        <a:effectLst/>
+      </p:bgPr>
+    </p:bg>
     <p:spTree>
       <p:nvGrpSpPr>
         <p:cNvPr id="1" name=""/>
@@ -3131,6 +3115,40 @@
           <a:chExt cx="0" cy="0"/>
         </a:xfrm>
       </p:grpSpPr>
+      <p:pic>
+        <p:nvPicPr>
+          <p:cNvPr id="4" name="Picture 3">
+            <a:extLst>
+              <a:ext uri="{FF2B5EF4-FFF2-40B4-BE49-F238E27FC236}">
+                <a16:creationId xmlns:a16="http://schemas.microsoft.com/office/drawing/2014/main" id="{ADD134C2-73B9-A76A-7E39-3169D4EDA66C}"/>
+              </a:ext>
+            </a:extLst>
+          </p:cNvPr>
+          <p:cNvPicPr>
+            <a:picLocks noChangeAspect="1"/>
+          </p:cNvPicPr>
+          <p:nvPr/>
+        </p:nvPicPr>
+        <p:blipFill>
+          <a:blip r:embed="rId2"/>
+          <a:srcRect l="675" t="130" r="139"/>
+          <a:stretch>
+            <a:fillRect/>
+          </a:stretch>
+        </p:blipFill>
+        <p:spPr>
+          <a:xfrm>
+            <a:off x="830005" y="367165"/>
+            <a:ext cx="10213494" cy="5958876"/>
+          </a:xfrm>
+          <a:prstGeom prst="rect">
+            <a:avLst/>
+          </a:prstGeom>
+          <a:ln>
+            <a:noFill/>
+          </a:ln>
+        </p:spPr>
+      </p:pic>
       <p:sp>
         <p:nvSpPr>
           <p:cNvPr id="2" name="Title 1">
@@ -3154,7 +3172,7 @@
           <a:p>
             <a:r>
               <a:rPr lang="en-US"/>
-              <a:t>Core</a:t>
+              <a:t>Core: Self Managment</a:t>
             </a:r>
           </a:p>
         </p:txBody>
@@ -3177,10 +3195,15 @@
         </p:nvSpPr>
         <p:spPr/>
         <p:txBody>
-          <a:bodyPr/>
-          <a:lstStyle/>
-          <a:p>
-            <a:endParaRPr lang="en-US"/>
+          <a:bodyPr vert="horz" lIns="91440" tIns="45720" rIns="91440" bIns="45720" rtlCol="0" anchor="t">
+            <a:normAutofit/>
+          </a:bodyPr>
+          <a:lstStyle/>
+          <a:p>
+            <a:r>
+              <a:rPr lang="en-US"/>
+              <a:t>So, I learned a good amount in self-management</a:t>
+            </a:r>
           </a:p>
         </p:txBody>
       </p:sp>
@@ -3194,6 +3217,230 @@
   <p:clrMapOvr>
     <a:masterClrMapping/>
   </p:clrMapOvr>
+  <p:timing>
+    <p:tnLst>
+      <p:par>
+        <p:cTn id="1" dur="indefinite" restart="never" nodeType="tmRoot">
+          <p:childTnLst>
+            <p:seq concurrent="1" nextAc="seek">
+              <p:cTn id="2" dur="indefinite" nodeType="mainSeq">
+                <p:childTnLst>
+                  <p:par>
+                    <p:cTn id="3" fill="hold">
+                      <p:stCondLst>
+                        <p:cond delay="indefinite"/>
+                      </p:stCondLst>
+                      <p:childTnLst>
+                        <p:par>
+                          <p:cTn id="4" fill="hold">
+                            <p:stCondLst>
+                              <p:cond delay="0"/>
+                            </p:stCondLst>
+                            <p:childTnLst>
+                              <p:par>
+                                <p:cTn id="5" presetID="1" presetClass="entr" presetSubtype="0" fill="hold" grpId="0" nodeType="clickEffect">
+                                  <p:stCondLst>
+                                    <p:cond delay="0"/>
+                                  </p:stCondLst>
+                                  <p:childTnLst>
+                                    <p:set>
+                                      <p:cBhvr>
+                                        <p:cTn id="6" dur="1" fill="hold">
+                                          <p:stCondLst>
+                                            <p:cond delay="0"/>
+                                          </p:stCondLst>
+                                        </p:cTn>
+                                        <p:tgtEl>
+                                          <p:spTgt spid="2"/>
+                                        </p:tgtEl>
+                                        <p:attrNameLst>
+                                          <p:attrName>style.visibility</p:attrName>
+                                        </p:attrNameLst>
+                                      </p:cBhvr>
+                                      <p:to>
+                                        <p:strVal val="visible"/>
+                                      </p:to>
+                                    </p:set>
+                                  </p:childTnLst>
+                                </p:cTn>
+                              </p:par>
+                            </p:childTnLst>
+                          </p:cTn>
+                        </p:par>
+                      </p:childTnLst>
+                    </p:cTn>
+                  </p:par>
+                  <p:par>
+                    <p:cTn id="7" fill="hold">
+                      <p:stCondLst>
+                        <p:cond delay="indefinite"/>
+                      </p:stCondLst>
+                      <p:childTnLst>
+                        <p:par>
+                          <p:cTn id="8" fill="hold">
+                            <p:stCondLst>
+                              <p:cond delay="0"/>
+                            </p:stCondLst>
+                            <p:childTnLst>
+                              <p:par>
+                                <p:cTn id="9" presetID="1" presetClass="entr" presetSubtype="0" fill="hold" nodeType="clickEffect">
+                                  <p:stCondLst>
+                                    <p:cond delay="0"/>
+                                  </p:stCondLst>
+                                  <p:childTnLst>
+                                    <p:set>
+                                      <p:cBhvr>
+                                        <p:cTn id="10" dur="1" fill="hold">
+                                          <p:stCondLst>
+                                            <p:cond delay="0"/>
+                                          </p:stCondLst>
+                                        </p:cTn>
+                                        <p:tgtEl>
+                                          <p:spTgt spid="4"/>
+                                        </p:tgtEl>
+                                        <p:attrNameLst>
+                                          <p:attrName>style.visibility</p:attrName>
+                                        </p:attrNameLst>
+                                      </p:cBhvr>
+                                      <p:to>
+                                        <p:strVal val="visible"/>
+                                      </p:to>
+                                    </p:set>
+                                  </p:childTnLst>
+                                </p:cTn>
+                              </p:par>
+                              <p:par>
+                                <p:cTn id="11" presetID="1" presetClass="exit" presetSubtype="0" fill="hold" grpId="1" nodeType="withEffect">
+                                  <p:stCondLst>
+                                    <p:cond delay="0"/>
+                                  </p:stCondLst>
+                                  <p:childTnLst>
+                                    <p:set>
+                                      <p:cBhvr>
+                                        <p:cTn id="12" dur="1" fill="hold">
+                                          <p:stCondLst>
+                                            <p:cond delay="0"/>
+                                          </p:stCondLst>
+                                        </p:cTn>
+                                        <p:tgtEl>
+                                          <p:spTgt spid="2"/>
+                                        </p:tgtEl>
+                                        <p:attrNameLst>
+                                          <p:attrName>style.visibility</p:attrName>
+                                        </p:attrNameLst>
+                                      </p:cBhvr>
+                                      <p:to>
+                                        <p:strVal val="hidden"/>
+                                      </p:to>
+                                    </p:set>
+                                  </p:childTnLst>
+                                </p:cTn>
+                              </p:par>
+                            </p:childTnLst>
+                          </p:cTn>
+                        </p:par>
+                      </p:childTnLst>
+                    </p:cTn>
+                  </p:par>
+                  <p:par>
+                    <p:cTn id="13" fill="hold">
+                      <p:stCondLst>
+                        <p:cond delay="indefinite"/>
+                      </p:stCondLst>
+                      <p:childTnLst>
+                        <p:par>
+                          <p:cTn id="14" fill="hold">
+                            <p:stCondLst>
+                              <p:cond delay="0"/>
+                            </p:stCondLst>
+                            <p:childTnLst>
+                              <p:par>
+                                <p:cTn id="15" presetID="1" presetClass="entr" presetSubtype="0" fill="hold" grpId="2" nodeType="clickEffect">
+                                  <p:stCondLst>
+                                    <p:cond delay="0"/>
+                                  </p:stCondLst>
+                                  <p:childTnLst>
+                                    <p:set>
+                                      <p:cBhvr>
+                                        <p:cTn id="16" dur="1" fill="hold">
+                                          <p:stCondLst>
+                                            <p:cond delay="0"/>
+                                          </p:stCondLst>
+                                        </p:cTn>
+                                        <p:tgtEl>
+                                          <p:spTgt spid="2"/>
+                                        </p:tgtEl>
+                                        <p:attrNameLst>
+                                          <p:attrName>style.visibility</p:attrName>
+                                        </p:attrNameLst>
+                                      </p:cBhvr>
+                                      <p:to>
+                                        <p:strVal val="visible"/>
+                                      </p:to>
+                                    </p:set>
+                                  </p:childTnLst>
+                                </p:cTn>
+                              </p:par>
+                              <p:par>
+                                <p:cTn id="17" presetID="1" presetClass="exit" presetSubtype="0" fill="hold" nodeType="withEffect">
+                                  <p:stCondLst>
+                                    <p:cond delay="0"/>
+                                  </p:stCondLst>
+                                  <p:childTnLst>
+                                    <p:set>
+                                      <p:cBhvr>
+                                        <p:cTn id="18" dur="1" fill="hold">
+                                          <p:stCondLst>
+                                            <p:cond delay="0"/>
+                                          </p:stCondLst>
+                                        </p:cTn>
+                                        <p:tgtEl>
+                                          <p:spTgt spid="4"/>
+                                        </p:tgtEl>
+                                        <p:attrNameLst>
+                                          <p:attrName>style.visibility</p:attrName>
+                                        </p:attrNameLst>
+                                      </p:cBhvr>
+                                      <p:to>
+                                        <p:strVal val="hidden"/>
+                                      </p:to>
+                                    </p:set>
+                                  </p:childTnLst>
+                                </p:cTn>
+                              </p:par>
+                            </p:childTnLst>
+                          </p:cTn>
+                        </p:par>
+                      </p:childTnLst>
+                    </p:cTn>
+                  </p:par>
+                </p:childTnLst>
+              </p:cTn>
+              <p:prevCondLst>
+                <p:cond evt="onPrev" delay="0">
+                  <p:tgtEl>
+                    <p:sldTgt/>
+                  </p:tgtEl>
+                </p:cond>
+              </p:prevCondLst>
+              <p:nextCondLst>
+                <p:cond evt="onNext" delay="0">
+                  <p:tgtEl>
+                    <p:sldTgt/>
+                  </p:tgtEl>
+                </p:cond>
+              </p:nextCondLst>
+            </p:seq>
+          </p:childTnLst>
+        </p:cTn>
+      </p:par>
+    </p:tnLst>
+    <p:bldLst>
+      <p:bldP spid="2" grpId="0"/>
+      <p:bldP spid="2" grpId="1"/>
+      <p:bldP spid="2" grpId="2"/>
+    </p:bldLst>
+  </p:timing>
 </p:sld>
 </file>
 
@@ -3219,7 +3466,7 @@
           <p:cNvPr id="2" name="Title 1">
             <a:extLst>
               <a:ext uri="{FF2B5EF4-FFF2-40B4-BE49-F238E27FC236}">
-                <a16:creationId xmlns:a16="http://schemas.microsoft.com/office/drawing/2014/main" id="{38B0D4B6-C649-005D-675C-6B8005325CC6}"/>
+                <a16:creationId xmlns:a16="http://schemas.microsoft.com/office/drawing/2014/main" id="{DEE7004E-EF71-9197-6B85-D0142E571033}"/>
               </a:ext>
             </a:extLst>
           </p:cNvPr>
@@ -3237,7 +3484,7 @@
           <a:p>
             <a:r>
               <a:rPr lang="en-US"/>
-              <a:t>Self Managment</a:t>
+              <a:t>Favorite Memory</a:t>
             </a:r>
           </a:p>
         </p:txBody>
@@ -3247,7 +3494,7 @@
           <p:cNvPr id="3" name="Content Placeholder 2">
             <a:extLst>
               <a:ext uri="{FF2B5EF4-FFF2-40B4-BE49-F238E27FC236}">
-                <a16:creationId xmlns:a16="http://schemas.microsoft.com/office/drawing/2014/main" id="{612C1F0C-B4CF-1BBE-C947-A00D9E0A9CCD}"/>
+                <a16:creationId xmlns:a16="http://schemas.microsoft.com/office/drawing/2014/main" id="{39AB66EF-0CE6-6948-73F2-46E646BCEE15}"/>
               </a:ext>
             </a:extLst>
           </p:cNvPr>
@@ -3270,7 +3517,175 @@
     </p:spTree>
     <p:extLst>
       <p:ext uri="{BB962C8B-B14F-4D97-AF65-F5344CB8AC3E}">
-        <p14:creationId xmlns:p14="http://schemas.microsoft.com/office/powerpoint/2010/main" val="1023952166"/>
+        <p14:creationId xmlns:p14="http://schemas.microsoft.com/office/powerpoint/2010/main" val="3249708286"/>
+      </p:ext>
+    </p:extLst>
+  </p:cSld>
+  <p:clrMapOvr>
+    <a:masterClrMapping/>
+  </p:clrMapOvr>
+</p:sld>
+</file>
+
+<file path=ppt/slides/slide5.xml><?xml version="1.0" encoding="utf-8"?>
+<p:sld xmlns:a="http://schemas.openxmlformats.org/drawingml/2006/main" xmlns:r="http://schemas.openxmlformats.org/officeDocument/2006/relationships" xmlns:p="http://schemas.openxmlformats.org/presentationml/2006/main">
+  <p:cSld>
+    <p:spTree>
+      <p:nvGrpSpPr>
+        <p:cNvPr id="1" name=""/>
+        <p:cNvGrpSpPr/>
+        <p:nvPr/>
+      </p:nvGrpSpPr>
+      <p:grpSpPr>
+        <a:xfrm>
+          <a:off x="0" y="0"/>
+          <a:ext cx="0" cy="0"/>
+          <a:chOff x="0" y="0"/>
+          <a:chExt cx="0" cy="0"/>
+        </a:xfrm>
+      </p:grpSpPr>
+      <p:sp>
+        <p:nvSpPr>
+          <p:cNvPr id="2" name="Title 1">
+            <a:extLst>
+              <a:ext uri="{FF2B5EF4-FFF2-40B4-BE49-F238E27FC236}">
+                <a16:creationId xmlns:a16="http://schemas.microsoft.com/office/drawing/2014/main" id="{5A37F828-651A-BB3F-72A1-CB1C42CEA444}"/>
+              </a:ext>
+            </a:extLst>
+          </p:cNvPr>
+          <p:cNvSpPr>
+            <a:spLocks noGrp="1"/>
+          </p:cNvSpPr>
+          <p:nvPr>
+            <p:ph type="title"/>
+          </p:nvPr>
+        </p:nvSpPr>
+        <p:spPr/>
+        <p:txBody>
+          <a:bodyPr/>
+          <a:lstStyle/>
+          <a:p>
+            <a:r>
+              <a:rPr lang="en-US"/>
+              <a:t>Club: Star Trek Club</a:t>
+            </a:r>
+          </a:p>
+        </p:txBody>
+      </p:sp>
+      <p:sp>
+        <p:nvSpPr>
+          <p:cNvPr id="3" name="Content Placeholder 2">
+            <a:extLst>
+              <a:ext uri="{FF2B5EF4-FFF2-40B4-BE49-F238E27FC236}">
+                <a16:creationId xmlns:a16="http://schemas.microsoft.com/office/drawing/2014/main" id="{2BC341DC-59B2-2461-01F2-51AAC0A6D9C3}"/>
+              </a:ext>
+            </a:extLst>
+          </p:cNvPr>
+          <p:cNvSpPr>
+            <a:spLocks noGrp="1"/>
+          </p:cNvSpPr>
+          <p:nvPr>
+            <p:ph idx="1"/>
+          </p:nvPr>
+        </p:nvSpPr>
+        <p:spPr/>
+        <p:txBody>
+          <a:bodyPr/>
+          <a:lstStyle/>
+          <a:p>
+            <a:endParaRPr lang="en-US"/>
+          </a:p>
+        </p:txBody>
+      </p:sp>
+    </p:spTree>
+    <p:extLst>
+      <p:ext uri="{BB962C8B-B14F-4D97-AF65-F5344CB8AC3E}">
+        <p14:creationId xmlns:p14="http://schemas.microsoft.com/office/powerpoint/2010/main" val="2947185183"/>
+      </p:ext>
+    </p:extLst>
+  </p:cSld>
+  <p:clrMapOvr>
+    <a:masterClrMapping/>
+  </p:clrMapOvr>
+</p:sld>
+</file>
+
+<file path=ppt/slides/slide6.xml><?xml version="1.0" encoding="utf-8"?>
+<p:sld xmlns:a="http://schemas.openxmlformats.org/drawingml/2006/main" xmlns:r="http://schemas.openxmlformats.org/officeDocument/2006/relationships" xmlns:p="http://schemas.openxmlformats.org/presentationml/2006/main">
+  <p:cSld>
+    <p:spTree>
+      <p:nvGrpSpPr>
+        <p:cNvPr id="1" name=""/>
+        <p:cNvGrpSpPr/>
+        <p:nvPr/>
+      </p:nvGrpSpPr>
+      <p:grpSpPr>
+        <a:xfrm>
+          <a:off x="0" y="0"/>
+          <a:ext cx="0" cy="0"/>
+          <a:chOff x="0" y="0"/>
+          <a:chExt cx="0" cy="0"/>
+        </a:xfrm>
+      </p:grpSpPr>
+      <p:sp>
+        <p:nvSpPr>
+          <p:cNvPr id="2" name="Title 1">
+            <a:extLst>
+              <a:ext uri="{FF2B5EF4-FFF2-40B4-BE49-F238E27FC236}">
+                <a16:creationId xmlns:a16="http://schemas.microsoft.com/office/drawing/2014/main" id="{9D52B2E5-EA9A-C399-84E2-37383CCBC826}"/>
+              </a:ext>
+            </a:extLst>
+          </p:cNvPr>
+          <p:cNvSpPr>
+            <a:spLocks noGrp="1"/>
+          </p:cNvSpPr>
+          <p:nvPr>
+            <p:ph type="title"/>
+          </p:nvPr>
+        </p:nvSpPr>
+        <p:spPr/>
+        <p:txBody>
+          <a:bodyPr/>
+          <a:lstStyle/>
+          <a:p>
+            <a:endParaRPr lang="en-US"/>
+          </a:p>
+        </p:txBody>
+      </p:sp>
+      <p:sp>
+        <p:nvSpPr>
+          <p:cNvPr id="3" name="Content Placeholder 2">
+            <a:extLst>
+              <a:ext uri="{FF2B5EF4-FFF2-40B4-BE49-F238E27FC236}">
+                <a16:creationId xmlns:a16="http://schemas.microsoft.com/office/drawing/2014/main" id="{493A38E5-D4F0-CDB4-0C38-1B6EAFBD8E9B}"/>
+              </a:ext>
+            </a:extLst>
+          </p:cNvPr>
+          <p:cNvSpPr>
+            <a:spLocks noGrp="1"/>
+          </p:cNvSpPr>
+          <p:nvPr>
+            <p:ph idx="1"/>
+          </p:nvPr>
+        </p:nvSpPr>
+        <p:spPr/>
+        <p:txBody>
+          <a:bodyPr vert="horz" lIns="91440" tIns="45720" rIns="91440" bIns="45720" rtlCol="0" anchor="t">
+            <a:normAutofit/>
+          </a:bodyPr>
+          <a:lstStyle/>
+          <a:p>
+            <a:r>
+              <a:rPr lang="en-US"/>
+              <a:t>Of course,   </a:t>
+            </a:r>
+          </a:p>
+        </p:txBody>
+      </p:sp>
+    </p:spTree>
+    <p:extLst>
+      <p:ext uri="{BB962C8B-B14F-4D97-AF65-F5344CB8AC3E}">
+        <p14:creationId xmlns:p14="http://schemas.microsoft.com/office/powerpoint/2010/main" val="1518777982"/>
       </p:ext>
     </p:extLst>
   </p:cSld>

--- a/Current Presentation/Charlie- summer 2026 presentation.pptx
+++ b/Current Presentation/Charlie- summer 2026 presentation.pptx
@@ -115,7 +115,7 @@
 <file path=ppt/revisionInfo.xml><?xml version="1.0" encoding="utf-8"?>
 <p1510:revInfo xmlns:a="http://schemas.openxmlformats.org/drawingml/2006/main" xmlns:r="http://schemas.openxmlformats.org/officeDocument/2006/relationships" xmlns:p1510="http://schemas.microsoft.com/office/powerpoint/2015/10/main">
   <p1510:revLst>
-    <p1510:client id="{CC656977-A51D-85A4-2C0F-8858A80BAC84}" v="169" dt="2026-09-16T17:03:38.262"/>
+    <p1510:client id="{CC656977-A51D-85A4-2C0F-8858A80BAC84}" v="271" dt="2026-09-16T17:16:40.811"/>
   </p1510:revLst>
 </p1510:revInfo>
 </file>
@@ -3026,6 +3026,60 @@
       </p:grpSpPr>
       <p:sp>
         <p:nvSpPr>
+          <p:cNvPr id="7" name="Title 1">
+            <a:extLst>
+              <a:ext uri="{FF2B5EF4-FFF2-40B4-BE49-F238E27FC236}">
+                <a16:creationId xmlns:a16="http://schemas.microsoft.com/office/drawing/2014/main" id="{0D79D088-CF95-97D6-D867-D0F0CAB97D4A}"/>
+              </a:ext>
+            </a:extLst>
+          </p:cNvPr>
+          <p:cNvSpPr txBox="1">
+            <a:spLocks/>
+          </p:cNvSpPr>
+          <p:nvPr/>
+        </p:nvSpPr>
+        <p:spPr>
+          <a:xfrm>
+            <a:off x="2153139" y="361218"/>
+            <a:ext cx="10515600" cy="1325563"/>
+          </a:xfrm>
+          <a:prstGeom prst="rect">
+            <a:avLst/>
+          </a:prstGeom>
+        </p:spPr>
+        <p:txBody>
+          <a:bodyPr vert="horz" lIns="91440" tIns="45720" rIns="91440" bIns="45720" rtlCol="0" anchor="ctr">
+            <a:normAutofit/>
+          </a:bodyPr>
+          <a:lstStyle>
+            <a:lvl1pPr algn="l" defTabSz="914400" rtl="0" eaLnBrk="1" latinLnBrk="0" hangingPunct="1">
+              <a:lnSpc>
+                <a:spcPct val="90000"/>
+              </a:lnSpc>
+              <a:spcBef>
+                <a:spcPct val="0"/>
+              </a:spcBef>
+              <a:buNone/>
+              <a:defRPr sz="4400" kern="1200">
+                <a:solidFill>
+                  <a:schemeClr val="tx1"/>
+                </a:solidFill>
+                <a:latin typeface="+mj-lt"/>
+                <a:ea typeface="+mj-ea"/>
+                <a:cs typeface="+mj-cs"/>
+              </a:defRPr>
+            </a:lvl1pPr>
+          </a:lstStyle>
+          <a:p>
+            <a:r>
+              <a:rPr lang="en-US"/>
+              <a:t>Advanced App Dev</a:t>
+            </a:r>
+          </a:p>
+        </p:txBody>
+      </p:sp>
+      <p:sp>
+        <p:nvSpPr>
           <p:cNvPr id="2" name="Title 1">
             <a:extLst>
               <a:ext uri="{FF2B5EF4-FFF2-40B4-BE49-F238E27FC236}">
@@ -3047,33 +3101,62 @@
           <a:p>
             <a:r>
               <a:rPr lang="en-US"/>
-              <a:t>Tech</a:t>
-            </a:r>
-          </a:p>
-        </p:txBody>
-      </p:sp>
-      <p:sp>
-        <p:nvSpPr>
-          <p:cNvPr id="3" name="Content Placeholder 2">
+              <a:t>Tech:</a:t>
+            </a:r>
+          </a:p>
+        </p:txBody>
+      </p:sp>
+      <p:sp>
+        <p:nvSpPr>
+          <p:cNvPr id="5" name="Title 1">
             <a:extLst>
               <a:ext uri="{FF2B5EF4-FFF2-40B4-BE49-F238E27FC236}">
-                <a16:creationId xmlns:a16="http://schemas.microsoft.com/office/drawing/2014/main" id="{8B1FB247-1388-9DAE-16BD-CB1166A1567A}"/>
+                <a16:creationId xmlns:a16="http://schemas.microsoft.com/office/drawing/2014/main" id="{CED92145-DBC3-50B3-05C9-5B448E797B80}"/>
               </a:ext>
             </a:extLst>
           </p:cNvPr>
-          <p:cNvSpPr>
-            <a:spLocks noGrp="1"/>
-          </p:cNvSpPr>
-          <p:nvPr>
-            <p:ph idx="1"/>
-          </p:nvPr>
-        </p:nvSpPr>
-        <p:spPr/>
-        <p:txBody>
-          <a:bodyPr/>
-          <a:lstStyle/>
-          <a:p>
-            <a:endParaRPr lang="en-US"/>
+          <p:cNvSpPr txBox="1">
+            <a:spLocks/>
+          </p:cNvSpPr>
+          <p:nvPr/>
+        </p:nvSpPr>
+        <p:spPr>
+          <a:xfrm>
+            <a:off x="2153138" y="361217"/>
+            <a:ext cx="10515600" cy="1325563"/>
+          </a:xfrm>
+          <a:prstGeom prst="rect">
+            <a:avLst/>
+          </a:prstGeom>
+        </p:spPr>
+        <p:txBody>
+          <a:bodyPr vert="horz" lIns="91440" tIns="45720" rIns="91440" bIns="45720" rtlCol="0" anchor="ctr">
+            <a:normAutofit/>
+          </a:bodyPr>
+          <a:lstStyle>
+            <a:lvl1pPr algn="l" defTabSz="914400" rtl="0" eaLnBrk="1" latinLnBrk="0" hangingPunct="1">
+              <a:lnSpc>
+                <a:spcPct val="90000"/>
+              </a:lnSpc>
+              <a:spcBef>
+                <a:spcPct val="0"/>
+              </a:spcBef>
+              <a:buNone/>
+              <a:defRPr sz="4400" kern="1200">
+                <a:solidFill>
+                  <a:schemeClr val="tx1"/>
+                </a:solidFill>
+                <a:latin typeface="+mj-lt"/>
+                <a:ea typeface="+mj-ea"/>
+                <a:cs typeface="+mj-cs"/>
+              </a:defRPr>
+            </a:lvl1pPr>
+          </a:lstStyle>
+          <a:p>
+            <a:r>
+              <a:rPr lang="en-US"/>
+              <a:t>IT</a:t>
+            </a:r>
           </a:p>
         </p:txBody>
       </p:sp>
@@ -3087,6 +3170,278 @@
   <p:clrMapOvr>
     <a:masterClrMapping/>
   </p:clrMapOvr>
+  <p:timing>
+    <p:tnLst>
+      <p:par>
+        <p:cTn id="1" dur="indefinite" restart="never" nodeType="tmRoot">
+          <p:childTnLst>
+            <p:seq concurrent="1" nextAc="seek">
+              <p:cTn id="2" dur="indefinite" nodeType="mainSeq">
+                <p:childTnLst>
+                  <p:par>
+                    <p:cTn id="3" fill="hold">
+                      <p:stCondLst>
+                        <p:cond delay="indefinite"/>
+                      </p:stCondLst>
+                      <p:childTnLst>
+                        <p:par>
+                          <p:cTn id="4" fill="hold">
+                            <p:stCondLst>
+                              <p:cond delay="0"/>
+                            </p:stCondLst>
+                            <p:childTnLst>
+                              <p:par>
+                                <p:cTn id="5" presetID="2" presetClass="entr" presetSubtype="4" fill="hold" grpId="0" nodeType="clickEffect">
+                                  <p:stCondLst>
+                                    <p:cond delay="0"/>
+                                  </p:stCondLst>
+                                  <p:childTnLst>
+                                    <p:set>
+                                      <p:cBhvr>
+                                        <p:cTn id="6" dur="1" fill="hold">
+                                          <p:stCondLst>
+                                            <p:cond delay="0"/>
+                                          </p:stCondLst>
+                                        </p:cTn>
+                                        <p:tgtEl>
+                                          <p:spTgt spid="2"/>
+                                        </p:tgtEl>
+                                        <p:attrNameLst>
+                                          <p:attrName>style.visibility</p:attrName>
+                                        </p:attrNameLst>
+                                      </p:cBhvr>
+                                      <p:to>
+                                        <p:strVal val="visible"/>
+                                      </p:to>
+                                    </p:set>
+                                    <p:anim calcmode="lin" valueType="num">
+                                      <p:cBhvr additive="base">
+                                        <p:cTn id="7" dur="500" fill="hold"/>
+                                        <p:tgtEl>
+                                          <p:spTgt spid="2"/>
+                                        </p:tgtEl>
+                                        <p:attrNameLst>
+                                          <p:attrName>ppt_x</p:attrName>
+                                        </p:attrNameLst>
+                                      </p:cBhvr>
+                                      <p:tavLst>
+                                        <p:tav tm="0">
+                                          <p:val>
+                                            <p:strVal val="#ppt_x"/>
+                                          </p:val>
+                                        </p:tav>
+                                        <p:tav tm="100000">
+                                          <p:val>
+                                            <p:strVal val="#ppt_x"/>
+                                          </p:val>
+                                        </p:tav>
+                                      </p:tavLst>
+                                    </p:anim>
+                                    <p:anim calcmode="lin" valueType="num">
+                                      <p:cBhvr additive="base">
+                                        <p:cTn id="8" dur="500" fill="hold"/>
+                                        <p:tgtEl>
+                                          <p:spTgt spid="2"/>
+                                        </p:tgtEl>
+                                        <p:attrNameLst>
+                                          <p:attrName>ppt_y</p:attrName>
+                                        </p:attrNameLst>
+                                      </p:cBhvr>
+                                      <p:tavLst>
+                                        <p:tav tm="0">
+                                          <p:val>
+                                            <p:strVal val="1+#ppt_h/2"/>
+                                          </p:val>
+                                        </p:tav>
+                                        <p:tav tm="100000">
+                                          <p:val>
+                                            <p:strVal val="#ppt_y"/>
+                                          </p:val>
+                                        </p:tav>
+                                      </p:tavLst>
+                                    </p:anim>
+                                  </p:childTnLst>
+                                </p:cTn>
+                              </p:par>
+                              <p:par>
+                                <p:cTn id="9" presetID="2" presetClass="entr" presetSubtype="4" fill="hold" grpId="0" nodeType="withEffect">
+                                  <p:stCondLst>
+                                    <p:cond delay="0"/>
+                                  </p:stCondLst>
+                                  <p:childTnLst>
+                                    <p:set>
+                                      <p:cBhvr>
+                                        <p:cTn id="10" dur="1" fill="hold">
+                                          <p:stCondLst>
+                                            <p:cond delay="0"/>
+                                          </p:stCondLst>
+                                        </p:cTn>
+                                        <p:tgtEl>
+                                          <p:spTgt spid="7"/>
+                                        </p:tgtEl>
+                                        <p:attrNameLst>
+                                          <p:attrName>style.visibility</p:attrName>
+                                        </p:attrNameLst>
+                                      </p:cBhvr>
+                                      <p:to>
+                                        <p:strVal val="visible"/>
+                                      </p:to>
+                                    </p:set>
+                                    <p:anim calcmode="lin" valueType="num">
+                                      <p:cBhvr additive="base">
+                                        <p:cTn id="11" dur="500" fill="hold"/>
+                                        <p:tgtEl>
+                                          <p:spTgt spid="7"/>
+                                        </p:tgtEl>
+                                        <p:attrNameLst>
+                                          <p:attrName>ppt_x</p:attrName>
+                                        </p:attrNameLst>
+                                      </p:cBhvr>
+                                      <p:tavLst>
+                                        <p:tav tm="0">
+                                          <p:val>
+                                            <p:strVal val="#ppt_x"/>
+                                          </p:val>
+                                        </p:tav>
+                                        <p:tav tm="100000">
+                                          <p:val>
+                                            <p:strVal val="#ppt_x"/>
+                                          </p:val>
+                                        </p:tav>
+                                      </p:tavLst>
+                                    </p:anim>
+                                    <p:anim calcmode="lin" valueType="num">
+                                      <p:cBhvr additive="base">
+                                        <p:cTn id="12" dur="500" fill="hold"/>
+                                        <p:tgtEl>
+                                          <p:spTgt spid="7"/>
+                                        </p:tgtEl>
+                                        <p:attrNameLst>
+                                          <p:attrName>ppt_y</p:attrName>
+                                        </p:attrNameLst>
+                                      </p:cBhvr>
+                                      <p:tavLst>
+                                        <p:tav tm="0">
+                                          <p:val>
+                                            <p:strVal val="1+#ppt_h/2"/>
+                                          </p:val>
+                                        </p:tav>
+                                        <p:tav tm="100000">
+                                          <p:val>
+                                            <p:strVal val="#ppt_y"/>
+                                          </p:val>
+                                        </p:tav>
+                                      </p:tavLst>
+                                    </p:anim>
+                                  </p:childTnLst>
+                                </p:cTn>
+                              </p:par>
+                            </p:childTnLst>
+                          </p:cTn>
+                        </p:par>
+                      </p:childTnLst>
+                    </p:cTn>
+                  </p:par>
+                  <p:par>
+                    <p:cTn id="13" fill="hold">
+                      <p:stCondLst>
+                        <p:cond delay="indefinite"/>
+                      </p:stCondLst>
+                      <p:childTnLst>
+                        <p:par>
+                          <p:cTn id="14" fill="hold">
+                            <p:stCondLst>
+                              <p:cond delay="0"/>
+                            </p:stCondLst>
+                            <p:childTnLst>
+                              <p:par>
+                                <p:cTn id="15" presetID="1" presetClass="exit" presetSubtype="0" fill="hold" grpId="1" nodeType="clickEffect">
+                                  <p:stCondLst>
+                                    <p:cond delay="0"/>
+                                  </p:stCondLst>
+                                  <p:childTnLst>
+                                    <p:set>
+                                      <p:cBhvr>
+                                        <p:cTn id="16" dur="1" fill="hold">
+                                          <p:stCondLst>
+                                            <p:cond delay="0"/>
+                                          </p:stCondLst>
+                                        </p:cTn>
+                                        <p:tgtEl>
+                                          <p:spTgt spid="7"/>
+                                        </p:tgtEl>
+                                        <p:attrNameLst>
+                                          <p:attrName>style.visibility</p:attrName>
+                                        </p:attrNameLst>
+                                      </p:cBhvr>
+                                      <p:to>
+                                        <p:strVal val="hidden"/>
+                                      </p:to>
+                                    </p:set>
+                                  </p:childTnLst>
+                                </p:cTn>
+                              </p:par>
+                              <p:par>
+                                <p:cTn id="17" presetID="1" presetClass="entr" presetSubtype="0" fill="hold" grpId="0" nodeType="withEffect">
+                                  <p:stCondLst>
+                                    <p:cond delay="0"/>
+                                  </p:stCondLst>
+                                  <p:childTnLst>
+                                    <p:set>
+                                      <p:cBhvr>
+                                        <p:cTn id="18" dur="1" fill="hold">
+                                          <p:stCondLst>
+                                            <p:cond delay="0"/>
+                                          </p:stCondLst>
+                                        </p:cTn>
+                                        <p:tgtEl>
+                                          <p:spTgt spid="5"/>
+                                        </p:tgtEl>
+                                        <p:attrNameLst>
+                                          <p:attrName>style.visibility</p:attrName>
+                                        </p:attrNameLst>
+                                      </p:cBhvr>
+                                      <p:to>
+                                        <p:strVal val="visible"/>
+                                      </p:to>
+                                    </p:set>
+                                  </p:childTnLst>
+                                </p:cTn>
+                              </p:par>
+                            </p:childTnLst>
+                          </p:cTn>
+                        </p:par>
+                      </p:childTnLst>
+                    </p:cTn>
+                  </p:par>
+                </p:childTnLst>
+              </p:cTn>
+              <p:prevCondLst>
+                <p:cond evt="onPrev" delay="0">
+                  <p:tgtEl>
+                    <p:sldTgt/>
+                  </p:tgtEl>
+                </p:cond>
+              </p:prevCondLst>
+              <p:nextCondLst>
+                <p:cond evt="onNext" delay="0">
+                  <p:tgtEl>
+                    <p:sldTgt/>
+                  </p:tgtEl>
+                </p:cond>
+              </p:nextCondLst>
+            </p:seq>
+          </p:childTnLst>
+        </p:cTn>
+      </p:par>
+    </p:tnLst>
+    <p:bldLst>
+      <p:bldP spid="7" grpId="0"/>
+      <p:bldP spid="7" grpId="1"/>
+      <p:bldP spid="2" grpId="0"/>
+      <p:bldP spid="5" grpId="0"/>
+    </p:bldLst>
+  </p:timing>
 </p:sld>
 </file>
 
@@ -3546,6 +3901,60 @@
       </p:grpSpPr>
       <p:sp>
         <p:nvSpPr>
+          <p:cNvPr id="7" name="Title 1">
+            <a:extLst>
+              <a:ext uri="{FF2B5EF4-FFF2-40B4-BE49-F238E27FC236}">
+                <a16:creationId xmlns:a16="http://schemas.microsoft.com/office/drawing/2014/main" id="{45B7BE17-E49E-766F-92F2-A8A7AC40165D}"/>
+              </a:ext>
+            </a:extLst>
+          </p:cNvPr>
+          <p:cNvSpPr txBox="1">
+            <a:spLocks/>
+          </p:cNvSpPr>
+          <p:nvPr/>
+        </p:nvSpPr>
+        <p:spPr>
+          <a:xfrm>
+            <a:off x="2133600" y="379942"/>
+            <a:ext cx="10515600" cy="1325563"/>
+          </a:xfrm>
+          <a:prstGeom prst="rect">
+            <a:avLst/>
+          </a:prstGeom>
+        </p:spPr>
+        <p:txBody>
+          <a:bodyPr vert="horz" lIns="91440" tIns="45720" rIns="91440" bIns="45720" rtlCol="0" anchor="ctr">
+            <a:normAutofit/>
+          </a:bodyPr>
+          <a:lstStyle>
+            <a:lvl1pPr algn="l" defTabSz="914400" rtl="0" eaLnBrk="1" latinLnBrk="0" hangingPunct="1">
+              <a:lnSpc>
+                <a:spcPct val="90000"/>
+              </a:lnSpc>
+              <a:spcBef>
+                <a:spcPct val="0"/>
+              </a:spcBef>
+              <a:buNone/>
+              <a:defRPr sz="4400" kern="1200">
+                <a:solidFill>
+                  <a:schemeClr val="tx1"/>
+                </a:solidFill>
+                <a:latin typeface="+mj-lt"/>
+                <a:ea typeface="+mj-ea"/>
+                <a:cs typeface="+mj-cs"/>
+              </a:defRPr>
+            </a:lvl1pPr>
+          </a:lstStyle>
+          <a:p>
+            <a:r>
+              <a:rPr lang="en-US"/>
+              <a:t>Art Through The Ages</a:t>
+            </a:r>
+          </a:p>
+        </p:txBody>
+      </p:sp>
+      <p:sp>
+        <p:nvSpPr>
           <p:cNvPr id="2" name="Title 1">
             <a:extLst>
               <a:ext uri="{FF2B5EF4-FFF2-40B4-BE49-F238E27FC236}">
@@ -3567,7 +3976,7 @@
           <a:p>
             <a:r>
               <a:rPr lang="en-US"/>
-              <a:t>Club: Star Trek Club</a:t>
+              <a:t>Club:</a:t>
             </a:r>
           </a:p>
         </p:txBody>
@@ -3594,6 +4003,60 @@
           <a:lstStyle/>
           <a:p>
             <a:endParaRPr lang="en-US"/>
+          </a:p>
+        </p:txBody>
+      </p:sp>
+      <p:sp>
+        <p:nvSpPr>
+          <p:cNvPr id="5" name="Title 1">
+            <a:extLst>
+              <a:ext uri="{FF2B5EF4-FFF2-40B4-BE49-F238E27FC236}">
+                <a16:creationId xmlns:a16="http://schemas.microsoft.com/office/drawing/2014/main" id="{30939E82-4970-022D-9999-07C6BB1F0FBB}"/>
+              </a:ext>
+            </a:extLst>
+          </p:cNvPr>
+          <p:cNvSpPr txBox="1">
+            <a:spLocks/>
+          </p:cNvSpPr>
+          <p:nvPr/>
+        </p:nvSpPr>
+        <p:spPr>
+          <a:xfrm>
+            <a:off x="2133600" y="379942"/>
+            <a:ext cx="10515600" cy="1325563"/>
+          </a:xfrm>
+          <a:prstGeom prst="rect">
+            <a:avLst/>
+          </a:prstGeom>
+        </p:spPr>
+        <p:txBody>
+          <a:bodyPr vert="horz" lIns="91440" tIns="45720" rIns="91440" bIns="45720" rtlCol="0" anchor="ctr">
+            <a:normAutofit/>
+          </a:bodyPr>
+          <a:lstStyle>
+            <a:lvl1pPr algn="l" defTabSz="914400" rtl="0" eaLnBrk="1" latinLnBrk="0" hangingPunct="1">
+              <a:lnSpc>
+                <a:spcPct val="90000"/>
+              </a:lnSpc>
+              <a:spcBef>
+                <a:spcPct val="0"/>
+              </a:spcBef>
+              <a:buNone/>
+              <a:defRPr sz="4400" kern="1200">
+                <a:solidFill>
+                  <a:schemeClr val="tx1"/>
+                </a:solidFill>
+                <a:latin typeface="+mj-lt"/>
+                <a:ea typeface="+mj-ea"/>
+                <a:cs typeface="+mj-cs"/>
+              </a:defRPr>
+            </a:lvl1pPr>
+          </a:lstStyle>
+          <a:p>
+            <a:r>
+              <a:rPr lang="en-US"/>
+              <a:t>Star Trek Club</a:t>
+            </a:r>
           </a:p>
         </p:txBody>
       </p:sp>
@@ -3607,6 +4070,278 @@
   <p:clrMapOvr>
     <a:masterClrMapping/>
   </p:clrMapOvr>
+  <p:timing>
+    <p:tnLst>
+      <p:par>
+        <p:cTn id="1" dur="indefinite" restart="never" nodeType="tmRoot">
+          <p:childTnLst>
+            <p:seq concurrent="1" nextAc="seek">
+              <p:cTn id="2" dur="indefinite" nodeType="mainSeq">
+                <p:childTnLst>
+                  <p:par>
+                    <p:cTn id="3" fill="hold">
+                      <p:stCondLst>
+                        <p:cond delay="indefinite"/>
+                      </p:stCondLst>
+                      <p:childTnLst>
+                        <p:par>
+                          <p:cTn id="4" fill="hold">
+                            <p:stCondLst>
+                              <p:cond delay="0"/>
+                            </p:stCondLst>
+                            <p:childTnLst>
+                              <p:par>
+                                <p:cTn id="5" presetID="2" presetClass="entr" presetSubtype="4" fill="hold" grpId="0" nodeType="clickEffect">
+                                  <p:stCondLst>
+                                    <p:cond delay="0"/>
+                                  </p:stCondLst>
+                                  <p:childTnLst>
+                                    <p:set>
+                                      <p:cBhvr>
+                                        <p:cTn id="6" dur="1" fill="hold">
+                                          <p:stCondLst>
+                                            <p:cond delay="0"/>
+                                          </p:stCondLst>
+                                        </p:cTn>
+                                        <p:tgtEl>
+                                          <p:spTgt spid="2"/>
+                                        </p:tgtEl>
+                                        <p:attrNameLst>
+                                          <p:attrName>style.visibility</p:attrName>
+                                        </p:attrNameLst>
+                                      </p:cBhvr>
+                                      <p:to>
+                                        <p:strVal val="visible"/>
+                                      </p:to>
+                                    </p:set>
+                                    <p:anim calcmode="lin" valueType="num">
+                                      <p:cBhvr additive="base">
+                                        <p:cTn id="7" dur="500" fill="hold"/>
+                                        <p:tgtEl>
+                                          <p:spTgt spid="2"/>
+                                        </p:tgtEl>
+                                        <p:attrNameLst>
+                                          <p:attrName>ppt_x</p:attrName>
+                                        </p:attrNameLst>
+                                      </p:cBhvr>
+                                      <p:tavLst>
+                                        <p:tav tm="0">
+                                          <p:val>
+                                            <p:strVal val="#ppt_x"/>
+                                          </p:val>
+                                        </p:tav>
+                                        <p:tav tm="100000">
+                                          <p:val>
+                                            <p:strVal val="#ppt_x"/>
+                                          </p:val>
+                                        </p:tav>
+                                      </p:tavLst>
+                                    </p:anim>
+                                    <p:anim calcmode="lin" valueType="num">
+                                      <p:cBhvr additive="base">
+                                        <p:cTn id="8" dur="500" fill="hold"/>
+                                        <p:tgtEl>
+                                          <p:spTgt spid="2"/>
+                                        </p:tgtEl>
+                                        <p:attrNameLst>
+                                          <p:attrName>ppt_y</p:attrName>
+                                        </p:attrNameLst>
+                                      </p:cBhvr>
+                                      <p:tavLst>
+                                        <p:tav tm="0">
+                                          <p:val>
+                                            <p:strVal val="1+#ppt_h/2"/>
+                                          </p:val>
+                                        </p:tav>
+                                        <p:tav tm="100000">
+                                          <p:val>
+                                            <p:strVal val="#ppt_y"/>
+                                          </p:val>
+                                        </p:tav>
+                                      </p:tavLst>
+                                    </p:anim>
+                                  </p:childTnLst>
+                                </p:cTn>
+                              </p:par>
+                              <p:par>
+                                <p:cTn id="9" presetID="2" presetClass="entr" presetSubtype="4" fill="hold" grpId="0" nodeType="withEffect">
+                                  <p:stCondLst>
+                                    <p:cond delay="0"/>
+                                  </p:stCondLst>
+                                  <p:childTnLst>
+                                    <p:set>
+                                      <p:cBhvr>
+                                        <p:cTn id="10" dur="1" fill="hold">
+                                          <p:stCondLst>
+                                            <p:cond delay="0"/>
+                                          </p:stCondLst>
+                                        </p:cTn>
+                                        <p:tgtEl>
+                                          <p:spTgt spid="5"/>
+                                        </p:tgtEl>
+                                        <p:attrNameLst>
+                                          <p:attrName>style.visibility</p:attrName>
+                                        </p:attrNameLst>
+                                      </p:cBhvr>
+                                      <p:to>
+                                        <p:strVal val="visible"/>
+                                      </p:to>
+                                    </p:set>
+                                    <p:anim calcmode="lin" valueType="num">
+                                      <p:cBhvr additive="base">
+                                        <p:cTn id="11" dur="500" fill="hold"/>
+                                        <p:tgtEl>
+                                          <p:spTgt spid="5"/>
+                                        </p:tgtEl>
+                                        <p:attrNameLst>
+                                          <p:attrName>ppt_x</p:attrName>
+                                        </p:attrNameLst>
+                                      </p:cBhvr>
+                                      <p:tavLst>
+                                        <p:tav tm="0">
+                                          <p:val>
+                                            <p:strVal val="#ppt_x"/>
+                                          </p:val>
+                                        </p:tav>
+                                        <p:tav tm="100000">
+                                          <p:val>
+                                            <p:strVal val="#ppt_x"/>
+                                          </p:val>
+                                        </p:tav>
+                                      </p:tavLst>
+                                    </p:anim>
+                                    <p:anim calcmode="lin" valueType="num">
+                                      <p:cBhvr additive="base">
+                                        <p:cTn id="12" dur="500" fill="hold"/>
+                                        <p:tgtEl>
+                                          <p:spTgt spid="5"/>
+                                        </p:tgtEl>
+                                        <p:attrNameLst>
+                                          <p:attrName>ppt_y</p:attrName>
+                                        </p:attrNameLst>
+                                      </p:cBhvr>
+                                      <p:tavLst>
+                                        <p:tav tm="0">
+                                          <p:val>
+                                            <p:strVal val="1+#ppt_h/2"/>
+                                          </p:val>
+                                        </p:tav>
+                                        <p:tav tm="100000">
+                                          <p:val>
+                                            <p:strVal val="#ppt_y"/>
+                                          </p:val>
+                                        </p:tav>
+                                      </p:tavLst>
+                                    </p:anim>
+                                  </p:childTnLst>
+                                </p:cTn>
+                              </p:par>
+                            </p:childTnLst>
+                          </p:cTn>
+                        </p:par>
+                      </p:childTnLst>
+                    </p:cTn>
+                  </p:par>
+                  <p:par>
+                    <p:cTn id="13" fill="hold">
+                      <p:stCondLst>
+                        <p:cond delay="indefinite"/>
+                      </p:stCondLst>
+                      <p:childTnLst>
+                        <p:par>
+                          <p:cTn id="14" fill="hold">
+                            <p:stCondLst>
+                              <p:cond delay="0"/>
+                            </p:stCondLst>
+                            <p:childTnLst>
+                              <p:par>
+                                <p:cTn id="15" presetID="1" presetClass="entr" presetSubtype="0" fill="hold" grpId="0" nodeType="clickEffect">
+                                  <p:stCondLst>
+                                    <p:cond delay="0"/>
+                                  </p:stCondLst>
+                                  <p:childTnLst>
+                                    <p:set>
+                                      <p:cBhvr>
+                                        <p:cTn id="16" dur="1" fill="hold">
+                                          <p:stCondLst>
+                                            <p:cond delay="0"/>
+                                          </p:stCondLst>
+                                        </p:cTn>
+                                        <p:tgtEl>
+                                          <p:spTgt spid="7"/>
+                                        </p:tgtEl>
+                                        <p:attrNameLst>
+                                          <p:attrName>style.visibility</p:attrName>
+                                        </p:attrNameLst>
+                                      </p:cBhvr>
+                                      <p:to>
+                                        <p:strVal val="visible"/>
+                                      </p:to>
+                                    </p:set>
+                                  </p:childTnLst>
+                                </p:cTn>
+                              </p:par>
+                              <p:par>
+                                <p:cTn id="17" presetID="1" presetClass="exit" presetSubtype="0" fill="hold" grpId="1" nodeType="withEffect">
+                                  <p:stCondLst>
+                                    <p:cond delay="0"/>
+                                  </p:stCondLst>
+                                  <p:childTnLst>
+                                    <p:set>
+                                      <p:cBhvr>
+                                        <p:cTn id="18" dur="1" fill="hold">
+                                          <p:stCondLst>
+                                            <p:cond delay="0"/>
+                                          </p:stCondLst>
+                                        </p:cTn>
+                                        <p:tgtEl>
+                                          <p:spTgt spid="5"/>
+                                        </p:tgtEl>
+                                        <p:attrNameLst>
+                                          <p:attrName>style.visibility</p:attrName>
+                                        </p:attrNameLst>
+                                      </p:cBhvr>
+                                      <p:to>
+                                        <p:strVal val="hidden"/>
+                                      </p:to>
+                                    </p:set>
+                                  </p:childTnLst>
+                                </p:cTn>
+                              </p:par>
+                            </p:childTnLst>
+                          </p:cTn>
+                        </p:par>
+                      </p:childTnLst>
+                    </p:cTn>
+                  </p:par>
+                </p:childTnLst>
+              </p:cTn>
+              <p:prevCondLst>
+                <p:cond evt="onPrev" delay="0">
+                  <p:tgtEl>
+                    <p:sldTgt/>
+                  </p:tgtEl>
+                </p:cond>
+              </p:prevCondLst>
+              <p:nextCondLst>
+                <p:cond evt="onNext" delay="0">
+                  <p:tgtEl>
+                    <p:sldTgt/>
+                  </p:tgtEl>
+                </p:cond>
+              </p:nextCondLst>
+            </p:seq>
+          </p:childTnLst>
+        </p:cTn>
+      </p:par>
+    </p:tnLst>
+    <p:bldLst>
+      <p:bldP spid="7" grpId="0"/>
+      <p:bldP spid="2" grpId="0"/>
+      <p:bldP spid="5" grpId="0"/>
+      <p:bldP spid="5" grpId="1"/>
+    </p:bldLst>
+  </p:timing>
 </p:sld>
 </file>
 

--- a/Current Presentation/Charlie- summer 2026 presentation.pptx
+++ b/Current Presentation/Charlie- summer 2026 presentation.pptx
@@ -4,6 +4,9 @@
   <p:sldMasterIdLst>
     <p:sldMasterId id="2147483660" r:id="rId1"/>
   </p:sldMasterIdLst>
+  <p:notesMasterIdLst>
+    <p:notesMasterId r:id="rId8"/>
+  </p:notesMasterIdLst>
   <p:sldIdLst>
     <p:sldId id="256" r:id="rId2"/>
     <p:sldId id="257" r:id="rId3"/>
@@ -115,9 +118,460 @@
 <file path=ppt/revisionInfo.xml><?xml version="1.0" encoding="utf-8"?>
 <p1510:revInfo xmlns:a="http://schemas.openxmlformats.org/drawingml/2006/main" xmlns:r="http://schemas.openxmlformats.org/officeDocument/2006/relationships" xmlns:p1510="http://schemas.microsoft.com/office/powerpoint/2015/10/main">
   <p1510:revLst>
+    <p1510:client id="{70E034A4-BB94-F8D4-67B6-8AD443040898}" v="27" dt="2026-09-16T19:15:57.901"/>
     <p1510:client id="{CC656977-A51D-85A4-2C0F-8858A80BAC84}" v="271" dt="2026-09-16T17:16:40.811"/>
   </p1510:revLst>
 </p1510:revInfo>
+</file>
+
+<file path=ppt/notesMasters/notesMaster1.xml><?xml version="1.0" encoding="utf-8"?>
+<p:notesMaster xmlns:a="http://schemas.openxmlformats.org/drawingml/2006/main" xmlns:r="http://schemas.openxmlformats.org/officeDocument/2006/relationships" xmlns:p="http://schemas.openxmlformats.org/presentationml/2006/main">
+  <p:cSld>
+    <p:bg>
+      <p:bgRef idx="1001">
+        <a:schemeClr val="bg1"/>
+      </p:bgRef>
+    </p:bg>
+    <p:spTree>
+      <p:nvGrpSpPr>
+        <p:cNvPr id="1" name=""/>
+        <p:cNvGrpSpPr/>
+        <p:nvPr/>
+      </p:nvGrpSpPr>
+      <p:grpSpPr>
+        <a:xfrm>
+          <a:off x="0" y="0"/>
+          <a:ext cx="0" cy="0"/>
+          <a:chOff x="0" y="0"/>
+          <a:chExt cx="0" cy="0"/>
+        </a:xfrm>
+      </p:grpSpPr>
+      <p:sp>
+        <p:nvSpPr>
+          <p:cNvPr id="2" name="Header Placeholder 1"/>
+          <p:cNvSpPr>
+            <a:spLocks noGrp="1"/>
+          </p:cNvSpPr>
+          <p:nvPr>
+            <p:ph type="hdr" sz="quarter"/>
+          </p:nvPr>
+        </p:nvSpPr>
+        <p:spPr>
+          <a:xfrm>
+            <a:off x="0" y="0"/>
+            <a:ext cx="2971800" cy="458788"/>
+          </a:xfrm>
+          <a:prstGeom prst="rect">
+            <a:avLst/>
+          </a:prstGeom>
+        </p:spPr>
+        <p:txBody>
+          <a:bodyPr vert="horz" lIns="91440" tIns="45720" rIns="91440" bIns="45720" rtlCol="0"/>
+          <a:lstStyle>
+            <a:lvl1pPr algn="l">
+              <a:defRPr sz="1200"/>
+            </a:lvl1pPr>
+          </a:lstStyle>
+          <a:p>
+            <a:endParaRPr lang="en-US"/>
+          </a:p>
+        </p:txBody>
+      </p:sp>
+      <p:sp>
+        <p:nvSpPr>
+          <p:cNvPr id="3" name="Date Placeholder 2"/>
+          <p:cNvSpPr>
+            <a:spLocks noGrp="1"/>
+          </p:cNvSpPr>
+          <p:nvPr>
+            <p:ph type="dt" idx="1"/>
+          </p:nvPr>
+        </p:nvSpPr>
+        <p:spPr>
+          <a:xfrm>
+            <a:off x="3884613" y="0"/>
+            <a:ext cx="2971800" cy="458788"/>
+          </a:xfrm>
+          <a:prstGeom prst="rect">
+            <a:avLst/>
+          </a:prstGeom>
+        </p:spPr>
+        <p:txBody>
+          <a:bodyPr vert="horz" lIns="91440" tIns="45720" rIns="91440" bIns="45720" rtlCol="0"/>
+          <a:lstStyle>
+            <a:lvl1pPr algn="r">
+              <a:defRPr sz="1200"/>
+            </a:lvl1pPr>
+          </a:lstStyle>
+          <a:p>
+            <a:fld id="{934B69B3-698B-4882-A570-9DB574FA6439}" type="datetimeFigureOut">
+              <a:t>9/16/2026</a:t>
+            </a:fld>
+            <a:endParaRPr lang="en-US"/>
+          </a:p>
+        </p:txBody>
+      </p:sp>
+      <p:sp>
+        <p:nvSpPr>
+          <p:cNvPr id="4" name="Slide Image Placeholder 3"/>
+          <p:cNvSpPr>
+            <a:spLocks noGrp="1" noRot="1" noChangeAspect="1"/>
+          </p:cNvSpPr>
+          <p:nvPr>
+            <p:ph type="sldImg" idx="2"/>
+          </p:nvPr>
+        </p:nvSpPr>
+        <p:spPr>
+          <a:xfrm>
+            <a:off x="685800" y="1143000"/>
+            <a:ext cx="5486400" cy="3086100"/>
+          </a:xfrm>
+          <a:prstGeom prst="rect">
+            <a:avLst/>
+          </a:prstGeom>
+          <a:noFill/>
+          <a:ln w="12700">
+            <a:solidFill>
+              <a:prstClr val="black"/>
+            </a:solidFill>
+          </a:ln>
+        </p:spPr>
+        <p:txBody>
+          <a:bodyPr vert="horz" lIns="91440" tIns="45720" rIns="91440" bIns="45720" rtlCol="0" anchor="ctr"/>
+          <a:lstStyle/>
+          <a:p>
+            <a:endParaRPr lang="en-US"/>
+          </a:p>
+        </p:txBody>
+      </p:sp>
+      <p:sp>
+        <p:nvSpPr>
+          <p:cNvPr id="5" name="Notes Placeholder 4"/>
+          <p:cNvSpPr>
+            <a:spLocks noGrp="1"/>
+          </p:cNvSpPr>
+          <p:nvPr>
+            <p:ph type="body" sz="quarter" idx="3"/>
+          </p:nvPr>
+        </p:nvSpPr>
+        <p:spPr>
+          <a:xfrm>
+            <a:off x="685800" y="4400550"/>
+            <a:ext cx="5486400" cy="3600450"/>
+          </a:xfrm>
+          <a:prstGeom prst="rect">
+            <a:avLst/>
+          </a:prstGeom>
+        </p:spPr>
+        <p:txBody>
+          <a:bodyPr vert="horz" lIns="91440" tIns="45720" rIns="91440" bIns="45720" rtlCol="0"/>
+          <a:lstStyle/>
+          <a:p>
+            <a:pPr lvl="0"/>
+            <a:r>
+              <a:rPr lang="en-US"/>
+              <a:t>Click to edit Master text styles</a:t>
+            </a:r>
+          </a:p>
+          <a:p>
+            <a:pPr lvl="1"/>
+            <a:r>
+              <a:rPr lang="en-US"/>
+              <a:t>Second level</a:t>
+            </a:r>
+          </a:p>
+          <a:p>
+            <a:pPr lvl="2"/>
+            <a:r>
+              <a:rPr lang="en-US"/>
+              <a:t>Third level</a:t>
+            </a:r>
+          </a:p>
+          <a:p>
+            <a:pPr lvl="3"/>
+            <a:r>
+              <a:rPr lang="en-US"/>
+              <a:t>Fourth level</a:t>
+            </a:r>
+          </a:p>
+          <a:p>
+            <a:pPr lvl="4"/>
+            <a:r>
+              <a:rPr lang="en-US"/>
+              <a:t>Fifth level</a:t>
+            </a:r>
+          </a:p>
+        </p:txBody>
+      </p:sp>
+      <p:sp>
+        <p:nvSpPr>
+          <p:cNvPr id="6" name="Footer Placeholder 5"/>
+          <p:cNvSpPr>
+            <a:spLocks noGrp="1"/>
+          </p:cNvSpPr>
+          <p:nvPr>
+            <p:ph type="ftr" sz="quarter" idx="4"/>
+          </p:nvPr>
+        </p:nvSpPr>
+        <p:spPr>
+          <a:xfrm>
+            <a:off x="0" y="8685213"/>
+            <a:ext cx="2971800" cy="458787"/>
+          </a:xfrm>
+          <a:prstGeom prst="rect">
+            <a:avLst/>
+          </a:prstGeom>
+        </p:spPr>
+        <p:txBody>
+          <a:bodyPr vert="horz" lIns="91440" tIns="45720" rIns="91440" bIns="45720" rtlCol="0" anchor="b"/>
+          <a:lstStyle>
+            <a:lvl1pPr algn="l">
+              <a:defRPr sz="1200"/>
+            </a:lvl1pPr>
+          </a:lstStyle>
+          <a:p>
+            <a:endParaRPr lang="en-US"/>
+          </a:p>
+        </p:txBody>
+      </p:sp>
+      <p:sp>
+        <p:nvSpPr>
+          <p:cNvPr id="7" name="Slide Number Placeholder 6"/>
+          <p:cNvSpPr>
+            <a:spLocks noGrp="1"/>
+          </p:cNvSpPr>
+          <p:nvPr>
+            <p:ph type="sldNum" sz="quarter" idx="5"/>
+          </p:nvPr>
+        </p:nvSpPr>
+        <p:spPr>
+          <a:xfrm>
+            <a:off x="3884613" y="8685213"/>
+            <a:ext cx="2971800" cy="458787"/>
+          </a:xfrm>
+          <a:prstGeom prst="rect">
+            <a:avLst/>
+          </a:prstGeom>
+        </p:spPr>
+        <p:txBody>
+          <a:bodyPr vert="horz" lIns="91440" tIns="45720" rIns="91440" bIns="45720" rtlCol="0" anchor="b"/>
+          <a:lstStyle>
+            <a:lvl1pPr algn="r">
+              <a:defRPr sz="1200"/>
+            </a:lvl1pPr>
+          </a:lstStyle>
+          <a:p>
+            <a:fld id="{9D746EA8-CCA3-4787-BBCF-88E4FAE9F3D0}" type="slidenum">
+              <a:t>‹#›</a:t>
+            </a:fld>
+            <a:endParaRPr lang="en-US"/>
+          </a:p>
+        </p:txBody>
+      </p:sp>
+    </p:spTree>
+    <p:extLst>
+      <p:ext uri="{BB962C8B-B14F-4D97-AF65-F5344CB8AC3E}">
+        <p14:creationId xmlns:p14="http://schemas.microsoft.com/office/powerpoint/2010/main" val="2759572644"/>
+      </p:ext>
+    </p:extLst>
+  </p:cSld>
+  <p:clrMap bg1="lt1" tx1="dk1" bg2="lt2" tx2="dk2" accent1="accent1" accent2="accent2" accent3="accent3" accent4="accent4" accent5="accent5" accent6="accent6" hlink="hlink" folHlink="folHlink"/>
+  <p:notesStyle>
+    <a:lvl1pPr marL="0" algn="l" defTabSz="914400" rtl="0" eaLnBrk="1" latinLnBrk="0" hangingPunct="1">
+      <a:defRPr sz="1200" kern="1200">
+        <a:solidFill>
+          <a:schemeClr val="tx1"/>
+        </a:solidFill>
+        <a:latin typeface="+mn-lt"/>
+        <a:ea typeface="+mn-ea"/>
+        <a:cs typeface="+mn-cs"/>
+      </a:defRPr>
+    </a:lvl1pPr>
+    <a:lvl2pPr marL="457200" algn="l" defTabSz="914400" rtl="0" eaLnBrk="1" latinLnBrk="0" hangingPunct="1">
+      <a:defRPr sz="1200" kern="1200">
+        <a:solidFill>
+          <a:schemeClr val="tx1"/>
+        </a:solidFill>
+        <a:latin typeface="+mn-lt"/>
+        <a:ea typeface="+mn-ea"/>
+        <a:cs typeface="+mn-cs"/>
+      </a:defRPr>
+    </a:lvl2pPr>
+    <a:lvl3pPr marL="914400" algn="l" defTabSz="914400" rtl="0" eaLnBrk="1" latinLnBrk="0" hangingPunct="1">
+      <a:defRPr sz="1200" kern="1200">
+        <a:solidFill>
+          <a:schemeClr val="tx1"/>
+        </a:solidFill>
+        <a:latin typeface="+mn-lt"/>
+        <a:ea typeface="+mn-ea"/>
+        <a:cs typeface="+mn-cs"/>
+      </a:defRPr>
+    </a:lvl3pPr>
+    <a:lvl4pPr marL="1371600" algn="l" defTabSz="914400" rtl="0" eaLnBrk="1" latinLnBrk="0" hangingPunct="1">
+      <a:defRPr sz="1200" kern="1200">
+        <a:solidFill>
+          <a:schemeClr val="tx1"/>
+        </a:solidFill>
+        <a:latin typeface="+mn-lt"/>
+        <a:ea typeface="+mn-ea"/>
+        <a:cs typeface="+mn-cs"/>
+      </a:defRPr>
+    </a:lvl4pPr>
+    <a:lvl5pPr marL="1828800" algn="l" defTabSz="914400" rtl="0" eaLnBrk="1" latinLnBrk="0" hangingPunct="1">
+      <a:defRPr sz="1200" kern="1200">
+        <a:solidFill>
+          <a:schemeClr val="tx1"/>
+        </a:solidFill>
+        <a:latin typeface="+mn-lt"/>
+        <a:ea typeface="+mn-ea"/>
+        <a:cs typeface="+mn-cs"/>
+      </a:defRPr>
+    </a:lvl5pPr>
+    <a:lvl6pPr marL="2286000" algn="l" defTabSz="914400" rtl="0" eaLnBrk="1" latinLnBrk="0" hangingPunct="1">
+      <a:defRPr sz="1200" kern="1200">
+        <a:solidFill>
+          <a:schemeClr val="tx1"/>
+        </a:solidFill>
+        <a:latin typeface="+mn-lt"/>
+        <a:ea typeface="+mn-ea"/>
+        <a:cs typeface="+mn-cs"/>
+      </a:defRPr>
+    </a:lvl6pPr>
+    <a:lvl7pPr marL="2743200" algn="l" defTabSz="914400" rtl="0" eaLnBrk="1" latinLnBrk="0" hangingPunct="1">
+      <a:defRPr sz="1200" kern="1200">
+        <a:solidFill>
+          <a:schemeClr val="tx1"/>
+        </a:solidFill>
+        <a:latin typeface="+mn-lt"/>
+        <a:ea typeface="+mn-ea"/>
+        <a:cs typeface="+mn-cs"/>
+      </a:defRPr>
+    </a:lvl7pPr>
+    <a:lvl8pPr marL="3200400" algn="l" defTabSz="914400" rtl="0" eaLnBrk="1" latinLnBrk="0" hangingPunct="1">
+      <a:defRPr sz="1200" kern="1200">
+        <a:solidFill>
+          <a:schemeClr val="tx1"/>
+        </a:solidFill>
+        <a:latin typeface="+mn-lt"/>
+        <a:ea typeface="+mn-ea"/>
+        <a:cs typeface="+mn-cs"/>
+      </a:defRPr>
+    </a:lvl8pPr>
+    <a:lvl9pPr marL="3657600" algn="l" defTabSz="914400" rtl="0" eaLnBrk="1" latinLnBrk="0" hangingPunct="1">
+      <a:defRPr sz="1200" kern="1200">
+        <a:solidFill>
+          <a:schemeClr val="tx1"/>
+        </a:solidFill>
+        <a:latin typeface="+mn-lt"/>
+        <a:ea typeface="+mn-ea"/>
+        <a:cs typeface="+mn-cs"/>
+      </a:defRPr>
+    </a:lvl9pPr>
+  </p:notesStyle>
+</p:notesMaster>
+</file>
+
+<file path=ppt/notesSlides/notesSlide1.xml><?xml version="1.0" encoding="utf-8"?>
+<p:notes xmlns:a="http://schemas.openxmlformats.org/drawingml/2006/main" xmlns:r="http://schemas.openxmlformats.org/officeDocument/2006/relationships" xmlns:p="http://schemas.openxmlformats.org/presentationml/2006/main">
+  <p:cSld>
+    <p:spTree>
+      <p:nvGrpSpPr>
+        <p:cNvPr id="1" name=""/>
+        <p:cNvGrpSpPr/>
+        <p:nvPr/>
+      </p:nvGrpSpPr>
+      <p:grpSpPr>
+        <a:xfrm>
+          <a:off x="0" y="0"/>
+          <a:ext cx="0" cy="0"/>
+          <a:chOff x="0" y="0"/>
+          <a:chExt cx="0" cy="0"/>
+        </a:xfrm>
+      </p:grpSpPr>
+      <p:sp>
+        <p:nvSpPr>
+          <p:cNvPr id="2" name="Slide Image Placeholder 1"/>
+          <p:cNvSpPr>
+            <a:spLocks noGrp="1" noRot="1" noChangeAspect="1"/>
+          </p:cNvSpPr>
+          <p:nvPr>
+            <p:ph type="sldImg"/>
+          </p:nvPr>
+        </p:nvSpPr>
+        <p:spPr/>
+      </p:sp>
+      <p:sp>
+        <p:nvSpPr>
+          <p:cNvPr id="3" name="Notes Placeholder 2"/>
+          <p:cNvSpPr>
+            <a:spLocks noGrp="1"/>
+          </p:cNvSpPr>
+          <p:nvPr>
+            <p:ph type="body" idx="1"/>
+          </p:nvPr>
+        </p:nvSpPr>
+        <p:spPr/>
+        <p:txBody>
+          <a:bodyPr/>
+          <a:lstStyle/>
+          <a:p>
+            <a:r>
+              <a:rPr lang="en-US" dirty="0" err="1">
+                <a:ea typeface="Calibri"/>
+                <a:cs typeface="Calibri"/>
+              </a:rPr>
+              <a:t>Bsod</a:t>
+            </a:r>
+            <a:r>
+              <a:rPr lang="en-US" dirty="0">
+                <a:ea typeface="Calibri"/>
+                <a:cs typeface="Calibri"/>
+              </a:rPr>
+              <a:t>: "now, one thing about networking, can't cause crashes... insert </a:t>
+            </a:r>
+            <a:r>
+              <a:rPr lang="en-US" dirty="0" err="1">
+                <a:ea typeface="Calibri"/>
+                <a:cs typeface="Calibri"/>
+              </a:rPr>
+              <a:t>bsod</a:t>
+            </a:r>
+          </a:p>
+        </p:txBody>
+      </p:sp>
+      <p:sp>
+        <p:nvSpPr>
+          <p:cNvPr id="4" name="Slide Number Placeholder 3"/>
+          <p:cNvSpPr>
+            <a:spLocks noGrp="1"/>
+          </p:cNvSpPr>
+          <p:nvPr>
+            <p:ph type="sldNum" sz="quarter" idx="5"/>
+          </p:nvPr>
+        </p:nvSpPr>
+        <p:spPr/>
+        <p:txBody>
+          <a:bodyPr/>
+          <a:lstStyle/>
+          <a:p>
+            <a:fld id="{9D746EA8-CCA3-4787-BBCF-88E4FAE9F3D0}" type="slidenum">
+              <a:t>2</a:t>
+            </a:fld>
+            <a:endParaRPr lang="en-US"/>
+          </a:p>
+        </p:txBody>
+      </p:sp>
+    </p:spTree>
+    <p:extLst>
+      <p:ext uri="{BB962C8B-B14F-4D97-AF65-F5344CB8AC3E}">
+        <p14:creationId xmlns:p14="http://schemas.microsoft.com/office/powerpoint/2010/main" val="3993867997"/>
+      </p:ext>
+    </p:extLst>
+  </p:cSld>
+  <p:clrMapOvr>
+    <a:masterClrMapping/>
+  </p:clrMapOvr>
+</p:notes>
 </file>
 
 <file path=ppt/slideLayouts/slideLayout1.xml><?xml version="1.0" encoding="utf-8"?>
@@ -3160,6 +3614,66 @@
           </a:p>
         </p:txBody>
       </p:sp>
+      <p:pic>
+        <p:nvPicPr>
+          <p:cNvPr id="3" name="Picture 2">
+            <a:extLst>
+              <a:ext uri="{FF2B5EF4-FFF2-40B4-BE49-F238E27FC236}">
+                <a16:creationId xmlns:a16="http://schemas.microsoft.com/office/drawing/2014/main" id="{AD23A61D-3E82-AFDE-6E46-A89110E82FE5}"/>
+              </a:ext>
+            </a:extLst>
+          </p:cNvPr>
+          <p:cNvPicPr>
+            <a:picLocks noChangeAspect="1"/>
+          </p:cNvPicPr>
+          <p:nvPr/>
+        </p:nvPicPr>
+        <p:blipFill>
+          <a:blip r:embed="rId3"/>
+          <a:stretch>
+            <a:fillRect/>
+          </a:stretch>
+        </p:blipFill>
+        <p:spPr>
+          <a:xfrm>
+            <a:off x="5641453" y="3160990"/>
+            <a:ext cx="6169547" cy="3697010"/>
+          </a:xfrm>
+          <a:prstGeom prst="rect">
+            <a:avLst/>
+          </a:prstGeom>
+        </p:spPr>
+      </p:pic>
+      <p:pic>
+        <p:nvPicPr>
+          <p:cNvPr id="10" name="Picture 9">
+            <a:extLst>
+              <a:ext uri="{FF2B5EF4-FFF2-40B4-BE49-F238E27FC236}">
+                <a16:creationId xmlns:a16="http://schemas.microsoft.com/office/drawing/2014/main" id="{CB197421-5025-DF10-C656-7348E409C009}"/>
+              </a:ext>
+            </a:extLst>
+          </p:cNvPr>
+          <p:cNvPicPr>
+            <a:picLocks noChangeAspect="1"/>
+          </p:cNvPicPr>
+          <p:nvPr/>
+        </p:nvPicPr>
+        <p:blipFill>
+          <a:blip r:embed="rId4"/>
+          <a:stretch>
+            <a:fillRect/>
+          </a:stretch>
+        </p:blipFill>
+        <p:spPr>
+          <a:xfrm>
+            <a:off x="3300413" y="1500188"/>
+            <a:ext cx="5591175" cy="3857625"/>
+          </a:xfrm>
+          <a:prstGeom prst="rect">
+            <a:avLst/>
+          </a:prstGeom>
+        </p:spPr>
+      </p:pic>
     </p:spTree>
     <p:extLst>
       <p:ext uri="{BB962C8B-B14F-4D97-AF65-F5344CB8AC3E}">
@@ -4743,4 +5257,299 @@
     </a:ext>
   </a:extLst>
 </a:theme>
+</file>
+
+<file path=ppt/theme/theme2.xml><?xml version="1.0" encoding="utf-8"?>
+<a:theme xmlns:a="http://schemas.openxmlformats.org/drawingml/2006/main" name="Office Theme">
+  <a:themeElements>
+    <a:clrScheme name="Office">
+      <a:dk1>
+        <a:sysClr val="windowText" lastClr="000000"/>
+      </a:dk1>
+      <a:lt1>
+        <a:sysClr val="window" lastClr="FFFFFF"/>
+      </a:lt1>
+      <a:dk2>
+        <a:srgbClr val="44546A"/>
+      </a:dk2>
+      <a:lt2>
+        <a:srgbClr val="E7E6E6"/>
+      </a:lt2>
+      <a:accent1>
+        <a:srgbClr val="4472C4"/>
+      </a:accent1>
+      <a:accent2>
+        <a:srgbClr val="ED7D31"/>
+      </a:accent2>
+      <a:accent3>
+        <a:srgbClr val="A5A5A5"/>
+      </a:accent3>
+      <a:accent4>
+        <a:srgbClr val="FFC000"/>
+      </a:accent4>
+      <a:accent5>
+        <a:srgbClr val="5B9BD5"/>
+      </a:accent5>
+      <a:accent6>
+        <a:srgbClr val="70AD47"/>
+      </a:accent6>
+      <a:hlink>
+        <a:srgbClr val="0563C1"/>
+      </a:hlink>
+      <a:folHlink>
+        <a:srgbClr val="954F72"/>
+      </a:folHlink>
+    </a:clrScheme>
+    <a:fontScheme name="Office">
+      <a:majorFont>
+        <a:latin typeface="Calibri Light" panose="020F0302020204030204"/>
+        <a:ea typeface=""/>
+        <a:cs typeface=""/>
+        <a:font script="Jpan" typeface="游ゴシック Light"/>
+        <a:font script="Hang" typeface="맑은 고딕"/>
+        <a:font script="Hans" typeface="等线 Light"/>
+        <a:font script="Hant" typeface="新細明體"/>
+        <a:font script="Arab" typeface="Times New Roman"/>
+        <a:font script="Hebr" typeface="Times New Roman"/>
+        <a:font script="Thai" typeface="Angsana New"/>
+        <a:font script="Ethi" typeface="Nyala"/>
+        <a:font script="Beng" typeface="Vrinda"/>
+        <a:font script="Gujr" typeface="Shruti"/>
+        <a:font script="Khmr" typeface="MoolBoran"/>
+        <a:font script="Knda" typeface="Tunga"/>
+        <a:font script="Guru" typeface="Raavi"/>
+        <a:font script="Cans" typeface="Euphemia"/>
+        <a:font script="Cher" typeface="Plantagenet Cherokee"/>
+        <a:font script="Yiii" typeface="Microsoft Yi Baiti"/>
+        <a:font script="Tibt" typeface="Microsoft Himalaya"/>
+        <a:font script="Thaa" typeface="MV Boli"/>
+        <a:font script="Deva" typeface="Mangal"/>
+        <a:font script="Telu" typeface="Gautami"/>
+        <a:font script="Taml" typeface="Latha"/>
+        <a:font script="Syrc" typeface="Estrangelo Edessa"/>
+        <a:font script="Orya" typeface="Kalinga"/>
+        <a:font script="Mlym" typeface="Kartika"/>
+        <a:font script="Laoo" typeface="DokChampa"/>
+        <a:font script="Sinh" typeface="Iskoola Pota"/>
+        <a:font script="Mong" typeface="Mongolian Baiti"/>
+        <a:font script="Viet" typeface="Times New Roman"/>
+        <a:font script="Uigh" typeface="Microsoft Uighur"/>
+        <a:font script="Geor" typeface="Sylfaen"/>
+        <a:font script="Armn" typeface="Arial"/>
+        <a:font script="Bugi" typeface="Leelawadee UI"/>
+        <a:font script="Bopo" typeface="Microsoft JhengHei"/>
+        <a:font script="Java" typeface="Javanese Text"/>
+        <a:font script="Lisu" typeface="Segoe UI"/>
+        <a:font script="Mymr" typeface="Myanmar Text"/>
+        <a:font script="Nkoo" typeface="Ebrima"/>
+        <a:font script="Olck" typeface="Nirmala UI"/>
+        <a:font script="Osma" typeface="Ebrima"/>
+        <a:font script="Phag" typeface="Phagspa"/>
+        <a:font script="Syrn" typeface="Estrangelo Edessa"/>
+        <a:font script="Syrj" typeface="Estrangelo Edessa"/>
+        <a:font script="Syre" typeface="Estrangelo Edessa"/>
+        <a:font script="Sora" typeface="Nirmala UI"/>
+        <a:font script="Tale" typeface="Microsoft Tai Le"/>
+        <a:font script="Talu" typeface="Microsoft New Tai Lue"/>
+        <a:font script="Tfng" typeface="Ebrima"/>
+      </a:majorFont>
+      <a:minorFont>
+        <a:latin typeface="Calibri" panose="020F0502020204030204"/>
+        <a:ea typeface=""/>
+        <a:cs typeface=""/>
+        <a:font script="Jpan" typeface="游ゴシック"/>
+        <a:font script="Hang" typeface="맑은 고딕"/>
+        <a:font script="Hans" typeface="等线"/>
+        <a:font script="Hant" typeface="新細明體"/>
+        <a:font script="Arab" typeface="Arial"/>
+        <a:font script="Hebr" typeface="Arial"/>
+        <a:font script="Thai" typeface="Cordia New"/>
+        <a:font script="Ethi" typeface="Nyala"/>
+        <a:font script="Beng" typeface="Vrinda"/>
+        <a:font script="Gujr" typeface="Shruti"/>
+        <a:font script="Khmr" typeface="DaunPenh"/>
+        <a:font script="Knda" typeface="Tunga"/>
+        <a:font script="Guru" typeface="Raavi"/>
+        <a:font script="Cans" typeface="Euphemia"/>
+        <a:font script="Cher" typeface="Plantagenet Cherokee"/>
+        <a:font script="Yiii" typeface="Microsoft Yi Baiti"/>
+        <a:font script="Tibt" typeface="Microsoft Himalaya"/>
+        <a:font script="Thaa" typeface="MV Boli"/>
+        <a:font script="Deva" typeface="Mangal"/>
+        <a:font script="Telu" typeface="Gautami"/>
+        <a:font script="Taml" typeface="Latha"/>
+        <a:font script="Syrc" typeface="Estrangelo Edessa"/>
+        <a:font script="Orya" typeface="Kalinga"/>
+        <a:font script="Mlym" typeface="Kartika"/>
+        <a:font script="Laoo" typeface="DokChampa"/>
+        <a:font script="Sinh" typeface="Iskoola Pota"/>
+        <a:font script="Mong" typeface="Mongolian Baiti"/>
+        <a:font script="Viet" typeface="Arial"/>
+        <a:font script="Uigh" typeface="Microsoft Uighur"/>
+        <a:font script="Geor" typeface="Sylfaen"/>
+        <a:font script="Armn" typeface="Arial"/>
+        <a:font script="Bugi" typeface="Leelawadee UI"/>
+        <a:font script="Bopo" typeface="Microsoft JhengHei"/>
+        <a:font script="Java" typeface="Javanese Text"/>
+        <a:font script="Lisu" typeface="Segoe UI"/>
+        <a:font script="Mymr" typeface="Myanmar Text"/>
+        <a:font script="Nkoo" typeface="Ebrima"/>
+        <a:font script="Olck" typeface="Nirmala UI"/>
+        <a:font script="Osma" typeface="Ebrima"/>
+        <a:font script="Phag" typeface="Phagspa"/>
+        <a:font script="Syrn" typeface="Estrangelo Edessa"/>
+        <a:font script="Syrj" typeface="Estrangelo Edessa"/>
+        <a:font script="Syre" typeface="Estrangelo Edessa"/>
+        <a:font script="Sora" typeface="Nirmala UI"/>
+        <a:font script="Tale" typeface="Microsoft Tai Le"/>
+        <a:font script="Talu" typeface="Microsoft New Tai Lue"/>
+        <a:font script="Tfng" typeface="Ebrima"/>
+      </a:minorFont>
+    </a:fontScheme>
+    <a:fmtScheme name="Office">
+      <a:fillStyleLst>
+        <a:solidFill>
+          <a:schemeClr val="phClr"/>
+        </a:solidFill>
+        <a:gradFill rotWithShape="1">
+          <a:gsLst>
+            <a:gs pos="0">
+              <a:schemeClr val="phClr">
+                <a:lumMod val="110000"/>
+                <a:satMod val="105000"/>
+                <a:tint val="67000"/>
+              </a:schemeClr>
+            </a:gs>
+            <a:gs pos="50000">
+              <a:schemeClr val="phClr">
+                <a:lumMod val="105000"/>
+                <a:satMod val="103000"/>
+                <a:tint val="73000"/>
+              </a:schemeClr>
+            </a:gs>
+            <a:gs pos="100000">
+              <a:schemeClr val="phClr">
+                <a:lumMod val="105000"/>
+                <a:satMod val="109000"/>
+                <a:tint val="81000"/>
+              </a:schemeClr>
+            </a:gs>
+          </a:gsLst>
+          <a:lin ang="5400000" scaled="0"/>
+        </a:gradFill>
+        <a:gradFill rotWithShape="1">
+          <a:gsLst>
+            <a:gs pos="0">
+              <a:schemeClr val="phClr">
+                <a:satMod val="103000"/>
+                <a:lumMod val="102000"/>
+                <a:tint val="94000"/>
+              </a:schemeClr>
+            </a:gs>
+            <a:gs pos="50000">
+              <a:schemeClr val="phClr">
+                <a:satMod val="110000"/>
+                <a:lumMod val="100000"/>
+                <a:shade val="100000"/>
+              </a:schemeClr>
+            </a:gs>
+            <a:gs pos="100000">
+              <a:schemeClr val="phClr">
+                <a:lumMod val="99000"/>
+                <a:satMod val="120000"/>
+                <a:shade val="78000"/>
+              </a:schemeClr>
+            </a:gs>
+          </a:gsLst>
+          <a:lin ang="5400000" scaled="0"/>
+        </a:gradFill>
+      </a:fillStyleLst>
+      <a:lnStyleLst>
+        <a:ln w="6350" cap="flat" cmpd="sng" algn="ctr">
+          <a:solidFill>
+            <a:schemeClr val="phClr"/>
+          </a:solidFill>
+          <a:prstDash val="solid"/>
+          <a:miter lim="800000"/>
+        </a:ln>
+        <a:ln w="12700" cap="flat" cmpd="sng" algn="ctr">
+          <a:solidFill>
+            <a:schemeClr val="phClr"/>
+          </a:solidFill>
+          <a:prstDash val="solid"/>
+          <a:miter lim="800000"/>
+        </a:ln>
+        <a:ln w="19050" cap="flat" cmpd="sng" algn="ctr">
+          <a:solidFill>
+            <a:schemeClr val="phClr"/>
+          </a:solidFill>
+          <a:prstDash val="solid"/>
+          <a:miter lim="800000"/>
+        </a:ln>
+      </a:lnStyleLst>
+      <a:effectStyleLst>
+        <a:effectStyle>
+          <a:effectLst/>
+        </a:effectStyle>
+        <a:effectStyle>
+          <a:effectLst/>
+        </a:effectStyle>
+        <a:effectStyle>
+          <a:effectLst>
+            <a:outerShdw blurRad="57150" dist="19050" dir="5400000" algn="ctr" rotWithShape="0">
+              <a:srgbClr val="000000">
+                <a:alpha val="63000"/>
+              </a:srgbClr>
+            </a:outerShdw>
+          </a:effectLst>
+        </a:effectStyle>
+      </a:effectStyleLst>
+      <a:bgFillStyleLst>
+        <a:solidFill>
+          <a:schemeClr val="phClr"/>
+        </a:solidFill>
+        <a:solidFill>
+          <a:schemeClr val="phClr">
+            <a:tint val="95000"/>
+            <a:satMod val="170000"/>
+          </a:schemeClr>
+        </a:solidFill>
+        <a:gradFill rotWithShape="1">
+          <a:gsLst>
+            <a:gs pos="0">
+              <a:schemeClr val="phClr">
+                <a:tint val="93000"/>
+                <a:satMod val="150000"/>
+                <a:shade val="98000"/>
+                <a:lumMod val="102000"/>
+              </a:schemeClr>
+            </a:gs>
+            <a:gs pos="50000">
+              <a:schemeClr val="phClr">
+                <a:tint val="98000"/>
+                <a:satMod val="130000"/>
+                <a:shade val="90000"/>
+                <a:lumMod val="103000"/>
+              </a:schemeClr>
+            </a:gs>
+            <a:gs pos="100000">
+              <a:schemeClr val="phClr">
+                <a:shade val="63000"/>
+                <a:satMod val="120000"/>
+              </a:schemeClr>
+            </a:gs>
+          </a:gsLst>
+          <a:lin ang="5400000" scaled="0"/>
+        </a:gradFill>
+      </a:bgFillStyleLst>
+    </a:fmtScheme>
+  </a:themeElements>
+  <a:objectDefaults/>
+  <a:extraClrSchemeLst/>
+  <a:extLst>
+    <a:ext uri="{05A4C25C-085E-4340-85A3-A5531E510DB2}">
+      <thm15:themeFamily xmlns:thm15="http://schemas.microsoft.com/office/thememl/2012/main" name="Office Theme" id="{62F939B6-93AF-4DB8-9C6B-D6C7DFDC589F}" vid="{4A3C46E8-61CC-4603-A589-7422A47A8E4A}"/>
+    </a:ext>
+  </a:extLst>
+</a:theme>
 </file>
--- a/Current Presentation/Charlie- summer 2026 presentation.pptx
+++ b/Current Presentation/Charlie- summer 2026 presentation.pptx
@@ -5,7 +5,7 @@
     <p:sldMasterId id="2147483660" r:id="rId1"/>
   </p:sldMasterIdLst>
   <p:notesMasterIdLst>
-    <p:notesMasterId r:id="rId8"/>
+    <p:notesMasterId r:id="rId9"/>
   </p:notesMasterIdLst>
   <p:sldIdLst>
     <p:sldId id="256" r:id="rId2"/>
@@ -14,6 +14,7 @@
     <p:sldId id="259" r:id="rId5"/>
     <p:sldId id="260" r:id="rId6"/>
     <p:sldId id="261" r:id="rId7"/>
+    <p:sldId id="265" r:id="rId8"/>
   </p:sldIdLst>
   <p:sldSz cx="12192000" cy="6858000"/>
   <p:notesSz cx="6858000" cy="9144000"/>
@@ -118,7 +119,8 @@
 <file path=ppt/revisionInfo.xml><?xml version="1.0" encoding="utf-8"?>
 <p1510:revInfo xmlns:a="http://schemas.openxmlformats.org/drawingml/2006/main" xmlns:r="http://schemas.openxmlformats.org/officeDocument/2006/relationships" xmlns:p1510="http://schemas.microsoft.com/office/powerpoint/2015/10/main">
   <p1510:revLst>
-    <p1510:client id="{70E034A4-BB94-F8D4-67B6-8AD443040898}" v="27" dt="2026-09-16T19:15:57.901"/>
+    <p1510:client id="{70E034A4-BB94-F8D4-67B6-8AD443040898}" v="40" dt="2026-09-16T19:24:07.670"/>
+    <p1510:client id="{B56F71EC-F6B7-385C-DEBA-57351A51A5CE}" v="13" dt="2026-09-16T19:35:59.011"/>
     <p1510:client id="{CC656977-A51D-85A4-2C0F-8858A80BAC84}" v="271" dt="2026-09-16T17:16:40.811"/>
   </p1510:revLst>
 </p1510:revInfo>
@@ -371,7 +373,7 @@
     </p:spTree>
     <p:extLst>
       <p:ext uri="{BB962C8B-B14F-4D97-AF65-F5344CB8AC3E}">
-        <p14:creationId xmlns:p14="http://schemas.microsoft.com/office/powerpoint/2010/main" val="2759572644"/>
+        <p14:creationId xmlns:p14="http://schemas.microsoft.com/office/powerpoint/2010/main" val="1253000821"/>
       </p:ext>
     </p:extLst>
   </p:cSld>
@@ -3494,8 +3496,8 @@
         </p:nvSpPr>
         <p:spPr>
           <a:xfrm>
-            <a:off x="2153139" y="361218"/>
-            <a:ext cx="10515600" cy="1325563"/>
+            <a:off x="2153139" y="231822"/>
+            <a:ext cx="11507637" cy="1454959"/>
           </a:xfrm>
           <a:prstGeom prst="rect">
             <a:avLst/>
@@ -3638,36 +3640,6 @@
           <a:xfrm>
             <a:off x="5641453" y="3160990"/>
             <a:ext cx="6169547" cy="3697010"/>
-          </a:xfrm>
-          <a:prstGeom prst="rect">
-            <a:avLst/>
-          </a:prstGeom>
-        </p:spPr>
-      </p:pic>
-      <p:pic>
-        <p:nvPicPr>
-          <p:cNvPr id="10" name="Picture 9">
-            <a:extLst>
-              <a:ext uri="{FF2B5EF4-FFF2-40B4-BE49-F238E27FC236}">
-                <a16:creationId xmlns:a16="http://schemas.microsoft.com/office/drawing/2014/main" id="{CB197421-5025-DF10-C656-7348E409C009}"/>
-              </a:ext>
-            </a:extLst>
-          </p:cNvPr>
-          <p:cNvPicPr>
-            <a:picLocks noChangeAspect="1"/>
-          </p:cNvPicPr>
-          <p:nvPr/>
-        </p:nvPicPr>
-        <p:blipFill>
-          <a:blip r:embed="rId4"/>
-          <a:stretch>
-            <a:fillRect/>
-          </a:stretch>
-        </p:blipFill>
-        <p:spPr>
-          <a:xfrm>
-            <a:off x="3300413" y="1500188"/>
-            <a:ext cx="5591175" cy="3857625"/>
           </a:xfrm>
           <a:prstGeom prst="rect">
             <a:avLst/>
@@ -4941,6 +4913,231 @@
   <p:clrMapOvr>
     <a:masterClrMapping/>
   </p:clrMapOvr>
+</p:sld>
+</file>
+
+<file path=ppt/slides/slide7.xml><?xml version="1.0" encoding="utf-8"?>
+<p:sld xmlns:a="http://schemas.openxmlformats.org/drawingml/2006/main" xmlns:r="http://schemas.openxmlformats.org/officeDocument/2006/relationships" xmlns:p="http://schemas.openxmlformats.org/presentationml/2006/main">
+  <p:cSld>
+    <p:spTree>
+      <p:nvGrpSpPr>
+        <p:cNvPr id="1" name=""/>
+        <p:cNvGrpSpPr/>
+        <p:nvPr/>
+      </p:nvGrpSpPr>
+      <p:grpSpPr>
+        <a:xfrm>
+          <a:off x="0" y="0"/>
+          <a:ext cx="0" cy="0"/>
+          <a:chOff x="0" y="0"/>
+          <a:chExt cx="0" cy="0"/>
+        </a:xfrm>
+      </p:grpSpPr>
+      <p:grpSp>
+        <p:nvGrpSpPr>
+          <p:cNvPr id="8" name="Group 7">
+            <a:extLst>
+              <a:ext uri="{FF2B5EF4-FFF2-40B4-BE49-F238E27FC236}">
+                <a16:creationId xmlns:a16="http://schemas.microsoft.com/office/drawing/2014/main" id="{40E79D08-6933-85CA-D750-3A34B3FBC381}"/>
+              </a:ext>
+            </a:extLst>
+          </p:cNvPr>
+          <p:cNvGrpSpPr/>
+          <p:nvPr/>
+        </p:nvGrpSpPr>
+        <p:grpSpPr>
+          <a:xfrm>
+            <a:off x="0" y="0"/>
+            <a:ext cx="12192000" cy="6858000"/>
+            <a:chOff x="0" y="0"/>
+            <a:chExt cx="12192000" cy="6858000"/>
+          </a:xfrm>
+        </p:grpSpPr>
+        <p:sp>
+          <p:nvSpPr>
+            <p:cNvPr id="9" name="Rectangle 8">
+              <a:extLst>
+                <a:ext uri="{FF2B5EF4-FFF2-40B4-BE49-F238E27FC236}">
+                  <a16:creationId xmlns:a16="http://schemas.microsoft.com/office/drawing/2014/main" id="{EF9A5C66-D130-5D59-F688-0290BD303654}"/>
+                </a:ext>
+              </a:extLst>
+            </p:cNvPr>
+            <p:cNvSpPr/>
+            <p:nvPr/>
+          </p:nvSpPr>
+          <p:spPr>
+            <a:xfrm>
+              <a:off x="0" y="0"/>
+              <a:ext cx="12192000" cy="6858000"/>
+            </a:xfrm>
+            <a:prstGeom prst="rect">
+              <a:avLst/>
+            </a:prstGeom>
+            <a:solidFill>
+              <a:srgbClr val="1070AA"/>
+            </a:solidFill>
+          </p:spPr>
+          <p:style>
+            <a:lnRef idx="2">
+              <a:schemeClr val="accent1">
+                <a:shade val="15000"/>
+              </a:schemeClr>
+            </a:lnRef>
+            <a:fillRef idx="1">
+              <a:schemeClr val="accent1"/>
+            </a:fillRef>
+            <a:effectRef idx="0">
+              <a:schemeClr val="accent1"/>
+            </a:effectRef>
+            <a:fontRef idx="minor">
+              <a:schemeClr val="lt1"/>
+            </a:fontRef>
+          </p:style>
+          <p:txBody>
+            <a:bodyPr rtlCol="0" anchor="ctr"/>
+            <a:lstStyle>
+              <a:defPPr>
+                <a:defRPr lang="en-US"/>
+              </a:defPPr>
+              <a:lvl1pPr marL="0" algn="l" defTabSz="914400" rtl="0" eaLnBrk="1" latinLnBrk="0" hangingPunct="1">
+                <a:defRPr sz="1800" kern="1200">
+                  <a:solidFill>
+                    <a:schemeClr val="lt1"/>
+                  </a:solidFill>
+                  <a:latin typeface="+mn-lt"/>
+                  <a:ea typeface="+mn-ea"/>
+                  <a:cs typeface="+mn-cs"/>
+                </a:defRPr>
+              </a:lvl1pPr>
+              <a:lvl2pPr marL="457200" algn="l" defTabSz="914400" rtl="0" eaLnBrk="1" latinLnBrk="0" hangingPunct="1">
+                <a:defRPr sz="1800" kern="1200">
+                  <a:solidFill>
+                    <a:schemeClr val="lt1"/>
+                  </a:solidFill>
+                  <a:latin typeface="+mn-lt"/>
+                  <a:ea typeface="+mn-ea"/>
+                  <a:cs typeface="+mn-cs"/>
+                </a:defRPr>
+              </a:lvl2pPr>
+              <a:lvl3pPr marL="914400" algn="l" defTabSz="914400" rtl="0" eaLnBrk="1" latinLnBrk="0" hangingPunct="1">
+                <a:defRPr sz="1800" kern="1200">
+                  <a:solidFill>
+                    <a:schemeClr val="lt1"/>
+                  </a:solidFill>
+                  <a:latin typeface="+mn-lt"/>
+                  <a:ea typeface="+mn-ea"/>
+                  <a:cs typeface="+mn-cs"/>
+                </a:defRPr>
+              </a:lvl3pPr>
+              <a:lvl4pPr marL="1371600" algn="l" defTabSz="914400" rtl="0" eaLnBrk="1" latinLnBrk="0" hangingPunct="1">
+                <a:defRPr sz="1800" kern="1200">
+                  <a:solidFill>
+                    <a:schemeClr val="lt1"/>
+                  </a:solidFill>
+                  <a:latin typeface="+mn-lt"/>
+                  <a:ea typeface="+mn-ea"/>
+                  <a:cs typeface="+mn-cs"/>
+                </a:defRPr>
+              </a:lvl4pPr>
+              <a:lvl5pPr marL="1828800" algn="l" defTabSz="914400" rtl="0" eaLnBrk="1" latinLnBrk="0" hangingPunct="1">
+                <a:defRPr sz="1800" kern="1200">
+                  <a:solidFill>
+                    <a:schemeClr val="lt1"/>
+                  </a:solidFill>
+                  <a:latin typeface="+mn-lt"/>
+                  <a:ea typeface="+mn-ea"/>
+                  <a:cs typeface="+mn-cs"/>
+                </a:defRPr>
+              </a:lvl5pPr>
+              <a:lvl6pPr marL="2286000" algn="l" defTabSz="914400" rtl="0" eaLnBrk="1" latinLnBrk="0" hangingPunct="1">
+                <a:defRPr sz="1800" kern="1200">
+                  <a:solidFill>
+                    <a:schemeClr val="lt1"/>
+                  </a:solidFill>
+                  <a:latin typeface="+mn-lt"/>
+                  <a:ea typeface="+mn-ea"/>
+                  <a:cs typeface="+mn-cs"/>
+                </a:defRPr>
+              </a:lvl6pPr>
+              <a:lvl7pPr marL="2743200" algn="l" defTabSz="914400" rtl="0" eaLnBrk="1" latinLnBrk="0" hangingPunct="1">
+                <a:defRPr sz="1800" kern="1200">
+                  <a:solidFill>
+                    <a:schemeClr val="lt1"/>
+                  </a:solidFill>
+                  <a:latin typeface="+mn-lt"/>
+                  <a:ea typeface="+mn-ea"/>
+                  <a:cs typeface="+mn-cs"/>
+                </a:defRPr>
+              </a:lvl7pPr>
+              <a:lvl8pPr marL="3200400" algn="l" defTabSz="914400" rtl="0" eaLnBrk="1" latinLnBrk="0" hangingPunct="1">
+                <a:defRPr sz="1800" kern="1200">
+                  <a:solidFill>
+                    <a:schemeClr val="lt1"/>
+                  </a:solidFill>
+                  <a:latin typeface="+mn-lt"/>
+                  <a:ea typeface="+mn-ea"/>
+                  <a:cs typeface="+mn-cs"/>
+                </a:defRPr>
+              </a:lvl8pPr>
+              <a:lvl9pPr marL="3657600" algn="l" defTabSz="914400" rtl="0" eaLnBrk="1" latinLnBrk="0" hangingPunct="1">
+                <a:defRPr sz="1800" kern="1200">
+                  <a:solidFill>
+                    <a:schemeClr val="lt1"/>
+                  </a:solidFill>
+                  <a:latin typeface="+mn-lt"/>
+                  <a:ea typeface="+mn-ea"/>
+                  <a:cs typeface="+mn-cs"/>
+                </a:defRPr>
+              </a:lvl9pPr>
+            </a:lstStyle>
+            <a:p>
+              <a:pPr algn="ctr"/>
+              <a:endParaRPr lang="en-US"/>
+            </a:p>
+          </p:txBody>
+        </p:sp>
+        <p:pic>
+          <p:nvPicPr>
+            <p:cNvPr id="10" name="Picture 9" descr="A blue screen with a qr code&#10;&#10;AI-generated content may be incorrect.">
+              <a:extLst>
+                <a:ext uri="{FF2B5EF4-FFF2-40B4-BE49-F238E27FC236}">
+                  <a16:creationId xmlns:a16="http://schemas.microsoft.com/office/drawing/2014/main" id="{43204064-87A6-92BE-55E2-FCD9052D16A4}"/>
+                </a:ext>
+              </a:extLst>
+            </p:cNvPr>
+            <p:cNvPicPr>
+              <a:picLocks noChangeAspect="1"/>
+            </p:cNvPicPr>
+            <p:nvPr/>
+          </p:nvPicPr>
+          <p:blipFill>
+            <a:blip r:embed="rId2"/>
+            <a:stretch>
+              <a:fillRect/>
+            </a:stretch>
+          </p:blipFill>
+          <p:spPr>
+            <a:xfrm>
+              <a:off x="1593440" y="1298191"/>
+              <a:ext cx="5324442" cy="3670464"/>
+            </a:xfrm>
+            <a:prstGeom prst="rect">
+              <a:avLst/>
+            </a:prstGeom>
+          </p:spPr>
+        </p:pic>
+      </p:grpSp>
+    </p:spTree>
+    <p:extLst>
+      <p:ext uri="{BB962C8B-B14F-4D97-AF65-F5344CB8AC3E}">
+        <p14:creationId xmlns:p14="http://schemas.microsoft.com/office/powerpoint/2010/main" val="3833004409"/>
+      </p:ext>
+    </p:extLst>
+  </p:cSld>
+  <p:clrMapOvr>
+    <a:masterClrMapping/>
+  </p:clrMapOvr>
+  <p:transition advClick="0"/>
 </p:sld>
 </file>
 

--- a/Current Presentation/Charlie- summer 2026 presentation.pptx
+++ b/Current Presentation/Charlie- summer 2026 presentation.pptx
@@ -120,7 +120,7 @@
 <p1510:revInfo xmlns:a="http://schemas.openxmlformats.org/drawingml/2006/main" xmlns:r="http://schemas.openxmlformats.org/officeDocument/2006/relationships" xmlns:p1510="http://schemas.microsoft.com/office/powerpoint/2015/10/main">
   <p1510:revLst>
     <p1510:client id="{70E034A4-BB94-F8D4-67B6-8AD443040898}" v="40" dt="2026-09-16T19:24:07.670"/>
-    <p1510:client id="{B56F71EC-F6B7-385C-DEBA-57351A51A5CE}" v="13" dt="2026-09-16T19:35:59.011"/>
+    <p1510:client id="{B56F71EC-F6B7-385C-DEBA-57351A51A5CE}" v="9" dt="2026-09-16T19:34:03.414"/>
     <p1510:client id="{CC656977-A51D-85A4-2C0F-8858A80BAC84}" v="271" dt="2026-09-16T17:16:40.811"/>
   </p1510:revLst>
 </p1510:revInfo>
@@ -4935,10 +4935,10 @@
       </p:grpSpPr>
       <p:grpSp>
         <p:nvGrpSpPr>
-          <p:cNvPr id="8" name="Group 7">
+          <p:cNvPr id="5" name="Group 4">
             <a:extLst>
               <a:ext uri="{FF2B5EF4-FFF2-40B4-BE49-F238E27FC236}">
-                <a16:creationId xmlns:a16="http://schemas.microsoft.com/office/drawing/2014/main" id="{40E79D08-6933-85CA-D750-3A34B3FBC381}"/>
+                <a16:creationId xmlns:a16="http://schemas.microsoft.com/office/drawing/2014/main" id="{056AD9B4-FA83-B37A-925D-0FF38465B7AA}"/>
               </a:ext>
             </a:extLst>
           </p:cNvPr>
@@ -4955,10 +4955,10 @@
         </p:grpSpPr>
         <p:sp>
           <p:nvSpPr>
-            <p:cNvPr id="9" name="Rectangle 8">
+            <p:cNvPr id="6" name="Rectangle 5">
               <a:extLst>
                 <a:ext uri="{FF2B5EF4-FFF2-40B4-BE49-F238E27FC236}">
-                  <a16:creationId xmlns:a16="http://schemas.microsoft.com/office/drawing/2014/main" id="{EF9A5C66-D130-5D59-F688-0290BD303654}"/>
+                  <a16:creationId xmlns:a16="http://schemas.microsoft.com/office/drawing/2014/main" id="{3BD51B22-6035-47AA-F096-DF50E1293D3E}"/>
                 </a:ext>
               </a:extLst>
             </p:cNvPr>
@@ -5098,10 +5098,10 @@
         </p:sp>
         <p:pic>
           <p:nvPicPr>
-            <p:cNvPr id="10" name="Picture 9" descr="A blue screen with a qr code&#10;&#10;AI-generated content may be incorrect.">
+            <p:cNvPr id="7" name="Picture 6" descr="A blue screen with a qr code&#10;&#10;AI-generated content may be incorrect.">
               <a:extLst>
                 <a:ext uri="{FF2B5EF4-FFF2-40B4-BE49-F238E27FC236}">
-                  <a16:creationId xmlns:a16="http://schemas.microsoft.com/office/drawing/2014/main" id="{43204064-87A6-92BE-55E2-FCD9052D16A4}"/>
+                  <a16:creationId xmlns:a16="http://schemas.microsoft.com/office/drawing/2014/main" id="{093AC10B-ECC1-A72C-BD4E-BE5469028DD3}"/>
                 </a:ext>
               </a:extLst>
             </p:cNvPr>

--- a/Current Presentation/Charlie- summer 2026 presentation.pptx
+++ b/Current Presentation/Charlie- summer 2026 presentation.pptx
@@ -120,7 +120,7 @@
 <p1510:revInfo xmlns:a="http://schemas.openxmlformats.org/drawingml/2006/main" xmlns:r="http://schemas.openxmlformats.org/officeDocument/2006/relationships" xmlns:p1510="http://schemas.microsoft.com/office/powerpoint/2015/10/main">
   <p1510:revLst>
     <p1510:client id="{70E034A4-BB94-F8D4-67B6-8AD443040898}" v="40" dt="2026-09-16T19:24:07.670"/>
-    <p1510:client id="{B56F71EC-F6B7-385C-DEBA-57351A51A5CE}" v="9" dt="2026-09-16T19:34:03.414"/>
+    <p1510:client id="{B56F71EC-F6B7-385C-DEBA-57351A51A5CE}" v="24" dt="2026-09-16T19:41:13.255"/>
     <p1510:client id="{CC656977-A51D-85A4-2C0F-8858A80BAC84}" v="271" dt="2026-09-16T17:16:40.811"/>
   </p1510:revLst>
 </p1510:revInfo>
@@ -3640,6 +3640,126 @@
           <a:xfrm>
             <a:off x="5641453" y="3160990"/>
             <a:ext cx="6169547" cy="3697010"/>
+          </a:xfrm>
+          <a:prstGeom prst="rect">
+            <a:avLst/>
+          </a:prstGeom>
+        </p:spPr>
+      </p:pic>
+      <p:pic>
+        <p:nvPicPr>
+          <p:cNvPr id="9" name="Picture 8">
+            <a:extLst>
+              <a:ext uri="{FF2B5EF4-FFF2-40B4-BE49-F238E27FC236}">
+                <a16:creationId xmlns:a16="http://schemas.microsoft.com/office/drawing/2014/main" id="{8095E34D-5A22-1B05-EBD5-07CF77C509C9}"/>
+              </a:ext>
+            </a:extLst>
+          </p:cNvPr>
+          <p:cNvPicPr>
+            <a:picLocks noChangeAspect="1"/>
+          </p:cNvPicPr>
+          <p:nvPr/>
+        </p:nvPicPr>
+        <p:blipFill>
+          <a:blip r:embed="rId4"/>
+          <a:stretch>
+            <a:fillRect/>
+          </a:stretch>
+        </p:blipFill>
+        <p:spPr>
+          <a:xfrm>
+            <a:off x="2917030" y="2065116"/>
+            <a:ext cx="4143376" cy="2001484"/>
+          </a:xfrm>
+          <a:prstGeom prst="rect">
+            <a:avLst/>
+          </a:prstGeom>
+        </p:spPr>
+      </p:pic>
+      <p:pic>
+        <p:nvPicPr>
+          <p:cNvPr id="11" name="Picture 10">
+            <a:extLst>
+              <a:ext uri="{FF2B5EF4-FFF2-40B4-BE49-F238E27FC236}">
+                <a16:creationId xmlns:a16="http://schemas.microsoft.com/office/drawing/2014/main" id="{0265A6F5-471E-1847-1BB0-010541C64E5F}"/>
+              </a:ext>
+            </a:extLst>
+          </p:cNvPr>
+          <p:cNvPicPr>
+            <a:picLocks noChangeAspect="1"/>
+          </p:cNvPicPr>
+          <p:nvPr/>
+        </p:nvPicPr>
+        <p:blipFill>
+          <a:blip r:embed="rId5"/>
+          <a:stretch>
+            <a:fillRect/>
+          </a:stretch>
+        </p:blipFill>
+        <p:spPr>
+          <a:xfrm>
+            <a:off x="7679531" y="4381499"/>
+            <a:ext cx="4131469" cy="2476501"/>
+          </a:xfrm>
+          <a:prstGeom prst="rect">
+            <a:avLst/>
+          </a:prstGeom>
+        </p:spPr>
+      </p:pic>
+      <p:pic>
+        <p:nvPicPr>
+          <p:cNvPr id="12" name="Picture 11">
+            <a:extLst>
+              <a:ext uri="{FF2B5EF4-FFF2-40B4-BE49-F238E27FC236}">
+                <a16:creationId xmlns:a16="http://schemas.microsoft.com/office/drawing/2014/main" id="{7BE978A0-5EFC-5E9F-B7DC-134A56DA4E7D}"/>
+              </a:ext>
+            </a:extLst>
+          </p:cNvPr>
+          <p:cNvPicPr>
+            <a:picLocks noChangeAspect="1"/>
+          </p:cNvPicPr>
+          <p:nvPr/>
+        </p:nvPicPr>
+        <p:blipFill>
+          <a:blip r:embed="rId6"/>
+          <a:stretch>
+            <a:fillRect/>
+          </a:stretch>
+        </p:blipFill>
+        <p:spPr>
+          <a:xfrm>
+            <a:off x="6762750" y="235743"/>
+            <a:ext cx="5048250" cy="1647825"/>
+          </a:xfrm>
+          <a:prstGeom prst="rect">
+            <a:avLst/>
+          </a:prstGeom>
+        </p:spPr>
+      </p:pic>
+      <p:pic>
+        <p:nvPicPr>
+          <p:cNvPr id="13" name="Picture 12">
+            <a:extLst>
+              <a:ext uri="{FF2B5EF4-FFF2-40B4-BE49-F238E27FC236}">
+                <a16:creationId xmlns:a16="http://schemas.microsoft.com/office/drawing/2014/main" id="{6EEDFA4F-38F5-85C3-D399-80E85A3168D0}"/>
+              </a:ext>
+            </a:extLst>
+          </p:cNvPr>
+          <p:cNvPicPr>
+            <a:picLocks noChangeAspect="1"/>
+          </p:cNvPicPr>
+          <p:nvPr/>
+        </p:nvPicPr>
+        <p:blipFill>
+          <a:blip r:embed="rId3"/>
+          <a:stretch>
+            <a:fillRect/>
+          </a:stretch>
+        </p:blipFill>
+        <p:spPr>
+          <a:xfrm>
+            <a:off x="6536531" y="3690937"/>
+            <a:ext cx="5274469" cy="3167063"/>
           </a:xfrm>
           <a:prstGeom prst="rect">
             <a:avLst/>
@@ -4935,10 +5055,10 @@
       </p:grpSpPr>
       <p:grpSp>
         <p:nvGrpSpPr>
-          <p:cNvPr id="5" name="Group 4">
+          <p:cNvPr id="8" name="Group 7">
             <a:extLst>
               <a:ext uri="{FF2B5EF4-FFF2-40B4-BE49-F238E27FC236}">
-                <a16:creationId xmlns:a16="http://schemas.microsoft.com/office/drawing/2014/main" id="{056AD9B4-FA83-B37A-925D-0FF38465B7AA}"/>
+                <a16:creationId xmlns:a16="http://schemas.microsoft.com/office/drawing/2014/main" id="{40E79D08-6933-85CA-D750-3A34B3FBC381}"/>
               </a:ext>
             </a:extLst>
           </p:cNvPr>
@@ -4955,10 +5075,10 @@
         </p:grpSpPr>
         <p:sp>
           <p:nvSpPr>
-            <p:cNvPr id="6" name="Rectangle 5">
+            <p:cNvPr id="9" name="Rectangle 8">
               <a:extLst>
                 <a:ext uri="{FF2B5EF4-FFF2-40B4-BE49-F238E27FC236}">
-                  <a16:creationId xmlns:a16="http://schemas.microsoft.com/office/drawing/2014/main" id="{3BD51B22-6035-47AA-F096-DF50E1293D3E}"/>
+                  <a16:creationId xmlns:a16="http://schemas.microsoft.com/office/drawing/2014/main" id="{EF9A5C66-D130-5D59-F688-0290BD303654}"/>
                 </a:ext>
               </a:extLst>
             </p:cNvPr>
@@ -5098,10 +5218,10 @@
         </p:sp>
         <p:pic>
           <p:nvPicPr>
-            <p:cNvPr id="7" name="Picture 6" descr="A blue screen with a qr code&#10;&#10;AI-generated content may be incorrect.">
+            <p:cNvPr id="10" name="Picture 9" descr="A blue screen with a qr code&#10;&#10;AI-generated content may be incorrect.">
               <a:extLst>
                 <a:ext uri="{FF2B5EF4-FFF2-40B4-BE49-F238E27FC236}">
-                  <a16:creationId xmlns:a16="http://schemas.microsoft.com/office/drawing/2014/main" id="{093AC10B-ECC1-A72C-BD4E-BE5469028DD3}"/>
+                  <a16:creationId xmlns:a16="http://schemas.microsoft.com/office/drawing/2014/main" id="{43204064-87A6-92BE-55E2-FCD9052D16A4}"/>
                 </a:ext>
               </a:extLst>
             </p:cNvPr>

--- a/Current Presentation/Charlie- summer 2026 presentation.pptx
+++ b/Current Presentation/Charlie- summer 2026 presentation.pptx
@@ -120,7 +120,7 @@
 <p1510:revInfo xmlns:a="http://schemas.openxmlformats.org/drawingml/2006/main" xmlns:r="http://schemas.openxmlformats.org/officeDocument/2006/relationships" xmlns:p1510="http://schemas.microsoft.com/office/powerpoint/2015/10/main">
   <p1510:revLst>
     <p1510:client id="{70E034A4-BB94-F8D4-67B6-8AD443040898}" v="40" dt="2026-09-16T19:24:07.670"/>
-    <p1510:client id="{B56F71EC-F6B7-385C-DEBA-57351A51A5CE}" v="24" dt="2026-09-16T19:41:13.255"/>
+    <p1510:client id="{B56F71EC-F6B7-385C-DEBA-57351A51A5CE}" v="368" dt="2026-09-16T20:16:52.336"/>
     <p1510:client id="{CC656977-A51D-85A4-2C0F-8858A80BAC84}" v="271" dt="2026-09-16T17:16:40.811"/>
   </p1510:revLst>
 </p1510:revInfo>
@@ -537,6 +537,60 @@
                 <a:cs typeface="Calibri"/>
               </a:rPr>
               <a:t>bsod</a:t>
+            </a:r>
+            <a:endParaRPr lang="en-US">
+              <a:ea typeface="Calibri"/>
+              <a:cs typeface="Calibri"/>
+            </a:endParaRPr>
+          </a:p>
+          <a:p>
+            <a:endParaRPr lang="en-US" dirty="0">
+              <a:ea typeface="Calibri"/>
+              <a:cs typeface="Calibri"/>
+            </a:endParaRPr>
+          </a:p>
+          <a:p>
+            <a:r>
+              <a:rPr lang="en-US" dirty="0">
+                <a:ea typeface="Calibri"/>
+                <a:cs typeface="Calibri"/>
+              </a:rPr>
+              <a:t>SQL string: make the connection to seem more than it really is; explain </a:t>
+            </a:r>
+            <a:r>
+              <a:rPr lang="en-US" dirty="0" err="1">
+                <a:ea typeface="Calibri"/>
+                <a:cs typeface="Calibri"/>
+              </a:rPr>
+              <a:t>useage</a:t>
+            </a:r>
+            <a:endParaRPr lang="en-US">
+              <a:ea typeface="Calibri"/>
+              <a:cs typeface="Calibri"/>
+            </a:endParaRPr>
+          </a:p>
+          <a:p>
+            <a:r>
+              <a:rPr lang="en-US" dirty="0">
+                <a:ea typeface="Calibri"/>
+                <a:cs typeface="Calibri"/>
+              </a:rPr>
+              <a:t>SQL Code: explain the "must be text" and such</a:t>
+            </a:r>
+          </a:p>
+          <a:p>
+            <a:endParaRPr lang="en-US" dirty="0">
+              <a:ea typeface="Calibri"/>
+              <a:cs typeface="Calibri"/>
+            </a:endParaRPr>
+          </a:p>
+          <a:p>
+            <a:r>
+              <a:rPr lang="en-US" dirty="0">
+                <a:ea typeface="Calibri"/>
+                <a:cs typeface="Calibri"/>
+              </a:rPr>
+              <a:t>For BSOD mention after topology "can't cause crashes"</a:t>
             </a:r>
           </a:p>
         </p:txBody>
@@ -3496,7 +3550,7 @@
         </p:nvSpPr>
         <p:spPr>
           <a:xfrm>
-            <a:off x="2153139" y="231822"/>
+            <a:off x="2153139" y="234217"/>
             <a:ext cx="11507637" cy="1454959"/>
           </a:xfrm>
           <a:prstGeom prst="rect">
@@ -3556,7 +3610,7 @@
           <a:lstStyle/>
           <a:p>
             <a:r>
-              <a:rPr lang="en-US"/>
+              <a:rPr lang="en-US" dirty="0"/>
               <a:t>Tech:</a:t>
             </a:r>
           </a:p>
@@ -3618,10 +3672,10 @@
       </p:sp>
       <p:pic>
         <p:nvPicPr>
-          <p:cNvPr id="3" name="Picture 2">
+          <p:cNvPr id="9" name="Picture 8">
             <a:extLst>
               <a:ext uri="{FF2B5EF4-FFF2-40B4-BE49-F238E27FC236}">
-                <a16:creationId xmlns:a16="http://schemas.microsoft.com/office/drawing/2014/main" id="{AD23A61D-3E82-AFDE-6E46-A89110E82FE5}"/>
+                <a16:creationId xmlns:a16="http://schemas.microsoft.com/office/drawing/2014/main" id="{8095E34D-5A22-1B05-EBD5-07CF77C509C9}"/>
               </a:ext>
             </a:extLst>
           </p:cNvPr>
@@ -3638,68 +3692,8 @@
         </p:blipFill>
         <p:spPr>
           <a:xfrm>
-            <a:off x="5641453" y="3160990"/>
-            <a:ext cx="6169547" cy="3697010"/>
-          </a:xfrm>
-          <a:prstGeom prst="rect">
-            <a:avLst/>
-          </a:prstGeom>
-        </p:spPr>
-      </p:pic>
-      <p:pic>
-        <p:nvPicPr>
-          <p:cNvPr id="9" name="Picture 8">
-            <a:extLst>
-              <a:ext uri="{FF2B5EF4-FFF2-40B4-BE49-F238E27FC236}">
-                <a16:creationId xmlns:a16="http://schemas.microsoft.com/office/drawing/2014/main" id="{8095E34D-5A22-1B05-EBD5-07CF77C509C9}"/>
-              </a:ext>
-            </a:extLst>
-          </p:cNvPr>
-          <p:cNvPicPr>
-            <a:picLocks noChangeAspect="1"/>
-          </p:cNvPicPr>
-          <p:nvPr/>
-        </p:nvPicPr>
-        <p:blipFill>
-          <a:blip r:embed="rId4"/>
-          <a:stretch>
-            <a:fillRect/>
-          </a:stretch>
-        </p:blipFill>
-        <p:spPr>
-          <a:xfrm>
-            <a:off x="2917030" y="2065116"/>
+            <a:off x="347582" y="234676"/>
             <a:ext cx="4143376" cy="2001484"/>
-          </a:xfrm>
-          <a:prstGeom prst="rect">
-            <a:avLst/>
-          </a:prstGeom>
-        </p:spPr>
-      </p:pic>
-      <p:pic>
-        <p:nvPicPr>
-          <p:cNvPr id="11" name="Picture 10">
-            <a:extLst>
-              <a:ext uri="{FF2B5EF4-FFF2-40B4-BE49-F238E27FC236}">
-                <a16:creationId xmlns:a16="http://schemas.microsoft.com/office/drawing/2014/main" id="{0265A6F5-471E-1847-1BB0-010541C64E5F}"/>
-              </a:ext>
-            </a:extLst>
-          </p:cNvPr>
-          <p:cNvPicPr>
-            <a:picLocks noChangeAspect="1"/>
-          </p:cNvPicPr>
-          <p:nvPr/>
-        </p:nvPicPr>
-        <p:blipFill>
-          <a:blip r:embed="rId5"/>
-          <a:stretch>
-            <a:fillRect/>
-          </a:stretch>
-        </p:blipFill>
-        <p:spPr>
-          <a:xfrm>
-            <a:off x="7679531" y="4381499"/>
-            <a:ext cx="4131469" cy="2476501"/>
           </a:xfrm>
           <a:prstGeom prst="rect">
             <a:avLst/>
@@ -3721,14 +3715,14 @@
           <p:nvPr/>
         </p:nvPicPr>
         <p:blipFill>
-          <a:blip r:embed="rId6"/>
+          <a:blip r:embed="rId4"/>
           <a:stretch>
             <a:fillRect/>
           </a:stretch>
         </p:blipFill>
         <p:spPr>
           <a:xfrm>
-            <a:off x="6762750" y="235743"/>
+            <a:off x="6932083" y="235743"/>
             <a:ext cx="5048250" cy="1647825"/>
           </a:xfrm>
           <a:prstGeom prst="rect">
@@ -3736,36 +3730,442 @@
           </a:prstGeom>
         </p:spPr>
       </p:pic>
-      <p:pic>
-        <p:nvPicPr>
-          <p:cNvPr id="13" name="Picture 12">
+      <p:grpSp>
+        <p:nvGrpSpPr>
+          <p:cNvPr id="22" name="Group 21">
             <a:extLst>
               <a:ext uri="{FF2B5EF4-FFF2-40B4-BE49-F238E27FC236}">
-                <a16:creationId xmlns:a16="http://schemas.microsoft.com/office/drawing/2014/main" id="{6EEDFA4F-38F5-85C3-D399-80E85A3168D0}"/>
+                <a16:creationId xmlns:a16="http://schemas.microsoft.com/office/drawing/2014/main" id="{CBF29367-4C72-92D8-15D3-89D7E010A515}"/>
               </a:ext>
             </a:extLst>
           </p:cNvPr>
-          <p:cNvPicPr>
-            <a:picLocks noChangeAspect="1"/>
-          </p:cNvPicPr>
+          <p:cNvGrpSpPr/>
           <p:nvPr/>
-        </p:nvPicPr>
-        <p:blipFill>
-          <a:blip r:embed="rId3"/>
-          <a:stretch>
-            <a:fillRect/>
-          </a:stretch>
-        </p:blipFill>
-        <p:spPr>
+        </p:nvGrpSpPr>
+        <p:grpSpPr>
           <a:xfrm>
-            <a:off x="6536531" y="3690937"/>
-            <a:ext cx="5274469" cy="3167063"/>
+            <a:off x="219300" y="2453747"/>
+            <a:ext cx="6135854" cy="4277151"/>
+            <a:chOff x="181825" y="2328432"/>
+            <a:chExt cx="6023428" cy="4164726"/>
           </a:xfrm>
-          <a:prstGeom prst="rect">
-            <a:avLst/>
-          </a:prstGeom>
-        </p:spPr>
-      </p:pic>
+        </p:grpSpPr>
+        <p:sp>
+          <p:nvSpPr>
+            <p:cNvPr id="20" name="Rectangle 19">
+              <a:extLst>
+                <a:ext uri="{FF2B5EF4-FFF2-40B4-BE49-F238E27FC236}">
+                  <a16:creationId xmlns:a16="http://schemas.microsoft.com/office/drawing/2014/main" id="{CA1036F1-5D56-4F13-6E1D-4352A9BFB69B}"/>
+                </a:ext>
+              </a:extLst>
+            </p:cNvPr>
+            <p:cNvSpPr/>
+            <p:nvPr/>
+          </p:nvSpPr>
+          <p:spPr>
+            <a:xfrm>
+              <a:off x="183808" y="5912587"/>
+              <a:ext cx="1451428" cy="580571"/>
+            </a:xfrm>
+            <a:prstGeom prst="rect">
+              <a:avLst/>
+            </a:prstGeom>
+            <a:solidFill>
+              <a:schemeClr val="bg2">
+                <a:lumMod val="90000"/>
+              </a:schemeClr>
+            </a:solidFill>
+            <a:ln>
+              <a:noFill/>
+            </a:ln>
+          </p:spPr>
+          <p:style>
+            <a:lnRef idx="2">
+              <a:schemeClr val="accent1">
+                <a:shade val="15000"/>
+              </a:schemeClr>
+            </a:lnRef>
+            <a:fillRef idx="1">
+              <a:schemeClr val="accent1"/>
+            </a:fillRef>
+            <a:effectRef idx="0">
+              <a:schemeClr val="accent1"/>
+            </a:effectRef>
+            <a:fontRef idx="minor">
+              <a:schemeClr val="lt1"/>
+            </a:fontRef>
+          </p:style>
+          <p:txBody>
+            <a:bodyPr rtlCol="0" anchor="ctr"/>
+            <a:lstStyle/>
+            <a:p>
+              <a:pPr algn="ctr"/>
+              <a:endParaRPr lang="en-US"/>
+            </a:p>
+          </p:txBody>
+        </p:sp>
+        <p:sp>
+          <p:nvSpPr>
+            <p:cNvPr id="19" name="Rectangle 18">
+              <a:extLst>
+                <a:ext uri="{FF2B5EF4-FFF2-40B4-BE49-F238E27FC236}">
+                  <a16:creationId xmlns:a16="http://schemas.microsoft.com/office/drawing/2014/main" id="{E7923043-7B8C-D2BA-423B-367923E652FD}"/>
+                </a:ext>
+              </a:extLst>
+            </p:cNvPr>
+            <p:cNvSpPr/>
+            <p:nvPr/>
+          </p:nvSpPr>
+          <p:spPr>
+            <a:xfrm>
+              <a:off x="181825" y="2328432"/>
+              <a:ext cx="6023428" cy="3592285"/>
+            </a:xfrm>
+            <a:prstGeom prst="rect">
+              <a:avLst/>
+            </a:prstGeom>
+            <a:solidFill>
+              <a:schemeClr val="bg2">
+                <a:lumMod val="90000"/>
+              </a:schemeClr>
+            </a:solidFill>
+            <a:ln>
+              <a:noFill/>
+            </a:ln>
+          </p:spPr>
+          <p:style>
+            <a:lnRef idx="2">
+              <a:schemeClr val="accent1">
+                <a:shade val="15000"/>
+              </a:schemeClr>
+            </a:lnRef>
+            <a:fillRef idx="1">
+              <a:schemeClr val="accent1"/>
+            </a:fillRef>
+            <a:effectRef idx="0">
+              <a:schemeClr val="accent1"/>
+            </a:effectRef>
+            <a:fontRef idx="minor">
+              <a:schemeClr val="lt1"/>
+            </a:fontRef>
+          </p:style>
+          <p:txBody>
+            <a:bodyPr rtlCol="0" anchor="ctr"/>
+            <a:lstStyle/>
+            <a:p>
+              <a:pPr algn="ctr"/>
+              <a:endParaRPr lang="en-US"/>
+            </a:p>
+          </p:txBody>
+        </p:sp>
+      </p:grpSp>
+      <p:grpSp>
+        <p:nvGrpSpPr>
+          <p:cNvPr id="23" name="Group 22">
+            <a:extLst>
+              <a:ext uri="{FF2B5EF4-FFF2-40B4-BE49-F238E27FC236}">
+                <a16:creationId xmlns:a16="http://schemas.microsoft.com/office/drawing/2014/main" id="{E587F2CF-4A57-E01C-BA69-A4399032BEB1}"/>
+              </a:ext>
+            </a:extLst>
+          </p:cNvPr>
+          <p:cNvGrpSpPr/>
+          <p:nvPr/>
+        </p:nvGrpSpPr>
+        <p:grpSpPr>
+          <a:xfrm>
+            <a:off x="345276" y="2539652"/>
+            <a:ext cx="5880481" cy="3943325"/>
+            <a:chOff x="345276" y="2563842"/>
+            <a:chExt cx="5880481" cy="3943325"/>
+          </a:xfrm>
+        </p:grpSpPr>
+        <p:pic>
+          <p:nvPicPr>
+            <p:cNvPr id="13" name="Picture 12">
+              <a:extLst>
+                <a:ext uri="{FF2B5EF4-FFF2-40B4-BE49-F238E27FC236}">
+                  <a16:creationId xmlns:a16="http://schemas.microsoft.com/office/drawing/2014/main" id="{6EEDFA4F-38F5-85C3-D399-80E85A3168D0}"/>
+                </a:ext>
+              </a:extLst>
+            </p:cNvPr>
+            <p:cNvPicPr>
+              <a:picLocks noChangeAspect="1"/>
+            </p:cNvPicPr>
+            <p:nvPr/>
+          </p:nvPicPr>
+          <p:blipFill>
+            <a:blip r:embed="rId5"/>
+            <a:stretch>
+              <a:fillRect/>
+            </a:stretch>
+          </p:blipFill>
+          <p:spPr>
+            <a:xfrm>
+              <a:off x="345276" y="2563842"/>
+              <a:ext cx="5880481" cy="3486244"/>
+            </a:xfrm>
+            <a:prstGeom prst="rect">
+              <a:avLst/>
+            </a:prstGeom>
+          </p:spPr>
+        </p:pic>
+        <p:sp>
+          <p:nvSpPr>
+            <p:cNvPr id="18" name="TextBox 17">
+              <a:extLst>
+                <a:ext uri="{FF2B5EF4-FFF2-40B4-BE49-F238E27FC236}">
+                  <a16:creationId xmlns:a16="http://schemas.microsoft.com/office/drawing/2014/main" id="{8046867F-BCB9-F8B2-0201-CD871ECAE72D}"/>
+                </a:ext>
+              </a:extLst>
+            </p:cNvPr>
+            <p:cNvSpPr txBox="1"/>
+            <p:nvPr/>
+          </p:nvSpPr>
+          <p:spPr>
+            <a:xfrm>
+              <a:off x="350365" y="6141407"/>
+              <a:ext cx="2743200" cy="365760"/>
+            </a:xfrm>
+            <a:prstGeom prst="rect">
+              <a:avLst/>
+            </a:prstGeom>
+            <a:noFill/>
+          </p:spPr>
+          <p:txBody>
+            <a:bodyPr rot="0" spcFirstLastPara="0" vertOverflow="overflow" horzOverflow="overflow" vert="horz" wrap="square" lIns="91440" tIns="45720" rIns="91440" bIns="45720" numCol="1" spcCol="0" rtlCol="0" fromWordArt="0" anchor="t" anchorCtr="0" forceAA="0" compatLnSpc="1">
+              <a:prstTxWarp prst="textNoShape">
+                <a:avLst/>
+              </a:prstTxWarp>
+              <a:spAutoFit/>
+            </a:bodyPr>
+            <a:lstStyle/>
+            <a:p>
+              <a:r>
+                <a:rPr lang="en-US" dirty="0"/>
+                <a:t>SQL Strings</a:t>
+              </a:r>
+            </a:p>
+          </p:txBody>
+        </p:sp>
+      </p:grpSp>
+      <p:grpSp>
+        <p:nvGrpSpPr>
+          <p:cNvPr id="35" name="Group 34">
+            <a:extLst>
+              <a:ext uri="{FF2B5EF4-FFF2-40B4-BE49-F238E27FC236}">
+                <a16:creationId xmlns:a16="http://schemas.microsoft.com/office/drawing/2014/main" id="{5A8C6A3B-7939-C673-7E80-332FDF50D7FE}"/>
+              </a:ext>
+            </a:extLst>
+          </p:cNvPr>
+          <p:cNvGrpSpPr/>
+          <p:nvPr/>
+        </p:nvGrpSpPr>
+        <p:grpSpPr>
+          <a:xfrm>
+            <a:off x="6818462" y="2706862"/>
+            <a:ext cx="5216618" cy="3854637"/>
+            <a:chOff x="6818462" y="2706862"/>
+            <a:chExt cx="5216618" cy="3854637"/>
+          </a:xfrm>
+        </p:grpSpPr>
+        <p:sp>
+          <p:nvSpPr>
+            <p:cNvPr id="33" name="Rectangle 32">
+              <a:extLst>
+                <a:ext uri="{FF2B5EF4-FFF2-40B4-BE49-F238E27FC236}">
+                  <a16:creationId xmlns:a16="http://schemas.microsoft.com/office/drawing/2014/main" id="{E71CF12A-CDC1-951F-5A49-B76C5782DC54}"/>
+                </a:ext>
+              </a:extLst>
+            </p:cNvPr>
+            <p:cNvSpPr/>
+            <p:nvPr/>
+          </p:nvSpPr>
+          <p:spPr>
+            <a:xfrm>
+              <a:off x="6818462" y="3198814"/>
+              <a:ext cx="5216618" cy="3362685"/>
+            </a:xfrm>
+            <a:prstGeom prst="rect">
+              <a:avLst/>
+            </a:prstGeom>
+            <a:solidFill>
+              <a:schemeClr val="bg2">
+                <a:lumMod val="90000"/>
+              </a:schemeClr>
+            </a:solidFill>
+            <a:ln>
+              <a:noFill/>
+            </a:ln>
+          </p:spPr>
+          <p:style>
+            <a:lnRef idx="2">
+              <a:schemeClr val="accent1">
+                <a:shade val="15000"/>
+              </a:schemeClr>
+            </a:lnRef>
+            <a:fillRef idx="1">
+              <a:schemeClr val="accent1"/>
+            </a:fillRef>
+            <a:effectRef idx="0">
+              <a:schemeClr val="accent1"/>
+            </a:effectRef>
+            <a:fontRef idx="minor">
+              <a:schemeClr val="lt1"/>
+            </a:fontRef>
+          </p:style>
+          <p:txBody>
+            <a:bodyPr rtlCol="0" anchor="ctr"/>
+            <a:lstStyle/>
+            <a:p>
+              <a:pPr algn="ctr"/>
+              <a:endParaRPr lang="en-US"/>
+            </a:p>
+          </p:txBody>
+        </p:sp>
+        <p:sp>
+          <p:nvSpPr>
+            <p:cNvPr id="32" name="Rectangle 31">
+              <a:extLst>
+                <a:ext uri="{FF2B5EF4-FFF2-40B4-BE49-F238E27FC236}">
+                  <a16:creationId xmlns:a16="http://schemas.microsoft.com/office/drawing/2014/main" id="{45BF732B-86A5-0D5D-FBEF-62C6DDA9976B}"/>
+                </a:ext>
+              </a:extLst>
+            </p:cNvPr>
+            <p:cNvSpPr/>
+            <p:nvPr/>
+          </p:nvSpPr>
+          <p:spPr>
+            <a:xfrm>
+              <a:off x="6832577" y="2706862"/>
+              <a:ext cx="2143756" cy="535767"/>
+            </a:xfrm>
+            <a:prstGeom prst="rect">
+              <a:avLst/>
+            </a:prstGeom>
+            <a:solidFill>
+              <a:schemeClr val="bg2">
+                <a:lumMod val="90000"/>
+              </a:schemeClr>
+            </a:solidFill>
+            <a:ln>
+              <a:noFill/>
+            </a:ln>
+          </p:spPr>
+          <p:style>
+            <a:lnRef idx="2">
+              <a:schemeClr val="accent1">
+                <a:shade val="15000"/>
+              </a:schemeClr>
+            </a:lnRef>
+            <a:fillRef idx="1">
+              <a:schemeClr val="accent1"/>
+            </a:fillRef>
+            <a:effectRef idx="0">
+              <a:schemeClr val="accent1"/>
+            </a:effectRef>
+            <a:fontRef idx="minor">
+              <a:schemeClr val="lt1"/>
+            </a:fontRef>
+          </p:style>
+          <p:txBody>
+            <a:bodyPr rtlCol="0" anchor="ctr"/>
+            <a:lstStyle/>
+            <a:p>
+              <a:pPr algn="ctr"/>
+              <a:endParaRPr lang="en-US"/>
+            </a:p>
+          </p:txBody>
+        </p:sp>
+      </p:grpSp>
+      <p:grpSp>
+        <p:nvGrpSpPr>
+          <p:cNvPr id="36" name="Group 35">
+            <a:extLst>
+              <a:ext uri="{FF2B5EF4-FFF2-40B4-BE49-F238E27FC236}">
+                <a16:creationId xmlns:a16="http://schemas.microsoft.com/office/drawing/2014/main" id="{152B6484-5E01-2D71-2D73-2CD119B532CA}"/>
+              </a:ext>
+            </a:extLst>
+          </p:cNvPr>
+          <p:cNvGrpSpPr/>
+          <p:nvPr/>
+        </p:nvGrpSpPr>
+        <p:grpSpPr>
+          <a:xfrm>
+            <a:off x="6926307" y="2819975"/>
+            <a:ext cx="4884296" cy="3540535"/>
+            <a:chOff x="6926307" y="2832070"/>
+            <a:chExt cx="4884296" cy="3540535"/>
+          </a:xfrm>
+        </p:grpSpPr>
+        <p:pic>
+          <p:nvPicPr>
+            <p:cNvPr id="16" name="Picture 15">
+              <a:extLst>
+                <a:ext uri="{FF2B5EF4-FFF2-40B4-BE49-F238E27FC236}">
+                  <a16:creationId xmlns:a16="http://schemas.microsoft.com/office/drawing/2014/main" id="{6FBAC885-7D82-F8EA-BEB1-2DFBB860091E}"/>
+                </a:ext>
+              </a:extLst>
+            </p:cNvPr>
+            <p:cNvPicPr>
+              <a:picLocks noChangeAspect="1"/>
+            </p:cNvPicPr>
+            <p:nvPr/>
+          </p:nvPicPr>
+          <p:blipFill>
+            <a:blip r:embed="rId6"/>
+            <a:stretch>
+              <a:fillRect/>
+            </a:stretch>
+          </p:blipFill>
+          <p:spPr>
+            <a:xfrm>
+              <a:off x="6926307" y="3462014"/>
+              <a:ext cx="4884296" cy="2910591"/>
+            </a:xfrm>
+            <a:prstGeom prst="rect">
+              <a:avLst/>
+            </a:prstGeom>
+          </p:spPr>
+        </p:pic>
+        <p:sp>
+          <p:nvSpPr>
+            <p:cNvPr id="17" name="TextBox 16">
+              <a:extLst>
+                <a:ext uri="{FF2B5EF4-FFF2-40B4-BE49-F238E27FC236}">
+                  <a16:creationId xmlns:a16="http://schemas.microsoft.com/office/drawing/2014/main" id="{4BD8F931-0D3F-3937-3FB1-3611DD34D9C7}"/>
+                </a:ext>
+              </a:extLst>
+            </p:cNvPr>
+            <p:cNvSpPr txBox="1"/>
+            <p:nvPr/>
+          </p:nvSpPr>
+          <p:spPr>
+            <a:xfrm>
+              <a:off x="6928984" y="2832070"/>
+              <a:ext cx="2743200" cy="365760"/>
+            </a:xfrm>
+            <a:prstGeom prst="rect">
+              <a:avLst/>
+            </a:prstGeom>
+            <a:noFill/>
+          </p:spPr>
+          <p:txBody>
+            <a:bodyPr rot="0" spcFirstLastPara="0" vertOverflow="overflow" horzOverflow="overflow" vert="horz" wrap="square" lIns="91440" tIns="45720" rIns="91440" bIns="45720" numCol="1" spcCol="0" rtlCol="0" fromWordArt="0" anchor="t" anchorCtr="0" forceAA="0" compatLnSpc="1">
+              <a:prstTxWarp prst="textNoShape">
+                <a:avLst/>
+              </a:prstTxWarp>
+              <a:spAutoFit/>
+            </a:bodyPr>
+            <a:lstStyle/>
+            <a:p>
+              <a:r>
+                <a:rPr lang="en-US" dirty="0"/>
+                <a:t>Example SQL Code</a:t>
+              </a:r>
+            </a:p>
+          </p:txBody>
+        </p:sp>
+      </p:grpSp>
     </p:spTree>
     <p:extLst>
       <p:ext uri="{BB962C8B-B14F-4D97-AF65-F5344CB8AC3E}">
@@ -3961,7 +4361,7 @@
                             </p:stCondLst>
                             <p:childTnLst>
                               <p:par>
-                                <p:cTn id="15" presetID="1" presetClass="exit" presetSubtype="0" fill="hold" grpId="1" nodeType="clickEffect">
+                                <p:cTn id="15" presetID="10" presetClass="entr" presetSubtype="0" fill="hold" nodeType="clickEffect">
                                   <p:stCondLst>
                                     <p:cond delay="0"/>
                                   </p:stCondLst>
@@ -3969,6 +4369,182 @@
                                     <p:set>
                                       <p:cBhvr>
                                         <p:cTn id="16" dur="1" fill="hold">
+                                          <p:stCondLst>
+                                            <p:cond delay="0"/>
+                                          </p:stCondLst>
+                                        </p:cTn>
+                                        <p:tgtEl>
+                                          <p:spTgt spid="22"/>
+                                        </p:tgtEl>
+                                        <p:attrNameLst>
+                                          <p:attrName>style.visibility</p:attrName>
+                                        </p:attrNameLst>
+                                      </p:cBhvr>
+                                      <p:to>
+                                        <p:strVal val="visible"/>
+                                      </p:to>
+                                    </p:set>
+                                    <p:animEffect transition="in" filter="fade">
+                                      <p:cBhvr>
+                                        <p:cTn id="17" dur="500"/>
+                                        <p:tgtEl>
+                                          <p:spTgt spid="22"/>
+                                        </p:tgtEl>
+                                      </p:cBhvr>
+                                    </p:animEffect>
+                                  </p:childTnLst>
+                                </p:cTn>
+                              </p:par>
+                              <p:par>
+                                <p:cTn id="18" presetID="10" presetClass="entr" presetSubtype="0" fill="hold" nodeType="withEffect">
+                                  <p:stCondLst>
+                                    <p:cond delay="0"/>
+                                  </p:stCondLst>
+                                  <p:childTnLst>
+                                    <p:set>
+                                      <p:cBhvr>
+                                        <p:cTn id="19" dur="1" fill="hold">
+                                          <p:stCondLst>
+                                            <p:cond delay="0"/>
+                                          </p:stCondLst>
+                                        </p:cTn>
+                                        <p:tgtEl>
+                                          <p:spTgt spid="23"/>
+                                        </p:tgtEl>
+                                        <p:attrNameLst>
+                                          <p:attrName>style.visibility</p:attrName>
+                                        </p:attrNameLst>
+                                      </p:cBhvr>
+                                      <p:to>
+                                        <p:strVal val="visible"/>
+                                      </p:to>
+                                    </p:set>
+                                    <p:animEffect transition="in" filter="fade">
+                                      <p:cBhvr>
+                                        <p:cTn id="20" dur="500"/>
+                                        <p:tgtEl>
+                                          <p:spTgt spid="23"/>
+                                        </p:tgtEl>
+                                      </p:cBhvr>
+                                    </p:animEffect>
+                                  </p:childTnLst>
+                                </p:cTn>
+                              </p:par>
+                            </p:childTnLst>
+                          </p:cTn>
+                        </p:par>
+                      </p:childTnLst>
+                    </p:cTn>
+                  </p:par>
+                  <p:par>
+                    <p:cTn id="21" fill="hold">
+                      <p:stCondLst>
+                        <p:cond delay="indefinite"/>
+                      </p:stCondLst>
+                      <p:childTnLst>
+                        <p:par>
+                          <p:cTn id="22" fill="hold">
+                            <p:stCondLst>
+                              <p:cond delay="0"/>
+                            </p:stCondLst>
+                            <p:childTnLst>
+                              <p:par>
+                                <p:cTn id="23" presetID="10" presetClass="entr" presetSubtype="0" fill="hold" nodeType="clickEffect">
+                                  <p:stCondLst>
+                                    <p:cond delay="0"/>
+                                  </p:stCondLst>
+                                  <p:childTnLst>
+                                    <p:set>
+                                      <p:cBhvr>
+                                        <p:cTn id="24" dur="1" fill="hold">
+                                          <p:stCondLst>
+                                            <p:cond delay="0"/>
+                                          </p:stCondLst>
+                                        </p:cTn>
+                                        <p:tgtEl>
+                                          <p:spTgt spid="36"/>
+                                        </p:tgtEl>
+                                        <p:attrNameLst>
+                                          <p:attrName>style.visibility</p:attrName>
+                                        </p:attrNameLst>
+                                      </p:cBhvr>
+                                      <p:to>
+                                        <p:strVal val="visible"/>
+                                      </p:to>
+                                    </p:set>
+                                    <p:animEffect transition="in" filter="fade">
+                                      <p:cBhvr>
+                                        <p:cTn id="25" dur="500"/>
+                                        <p:tgtEl>
+                                          <p:spTgt spid="36"/>
+                                        </p:tgtEl>
+                                      </p:cBhvr>
+                                    </p:animEffect>
+                                  </p:childTnLst>
+                                </p:cTn>
+                              </p:par>
+                              <p:par>
+                                <p:cTn id="26" presetID="10" presetClass="entr" presetSubtype="0" fill="hold" nodeType="withEffect">
+                                  <p:stCondLst>
+                                    <p:cond delay="0"/>
+                                  </p:stCondLst>
+                                  <p:childTnLst>
+                                    <p:set>
+                                      <p:cBhvr>
+                                        <p:cTn id="27" dur="1" fill="hold">
+                                          <p:stCondLst>
+                                            <p:cond delay="0"/>
+                                          </p:stCondLst>
+                                        </p:cTn>
+                                        <p:tgtEl>
+                                          <p:spTgt spid="35"/>
+                                        </p:tgtEl>
+                                        <p:attrNameLst>
+                                          <p:attrName>style.visibility</p:attrName>
+                                        </p:attrNameLst>
+                                      </p:cBhvr>
+                                      <p:to>
+                                        <p:strVal val="visible"/>
+                                      </p:to>
+                                    </p:set>
+                                    <p:animEffect transition="in" filter="fade">
+                                      <p:cBhvr>
+                                        <p:cTn id="28" dur="500"/>
+                                        <p:tgtEl>
+                                          <p:spTgt spid="35"/>
+                                        </p:tgtEl>
+                                      </p:cBhvr>
+                                    </p:animEffect>
+                                  </p:childTnLst>
+                                </p:cTn>
+                              </p:par>
+                            </p:childTnLst>
+                          </p:cTn>
+                        </p:par>
+                      </p:childTnLst>
+                    </p:cTn>
+                  </p:par>
+                  <p:par>
+                    <p:cTn id="29" fill="hold">
+                      <p:stCondLst>
+                        <p:cond delay="indefinite"/>
+                      </p:stCondLst>
+                      <p:childTnLst>
+                        <p:par>
+                          <p:cTn id="30" fill="hold">
+                            <p:stCondLst>
+                              <p:cond delay="0"/>
+                            </p:stCondLst>
+                            <p:childTnLst>
+                              <p:par>
+                                <p:cTn id="31" presetID="1" presetClass="exit" presetSubtype="0" fill="hold" grpId="1" nodeType="clickEffect">
+                                  <p:stCondLst>
+                                    <p:cond delay="0"/>
+                                  </p:stCondLst>
+                                  <p:childTnLst>
+                                    <p:set>
+                                      <p:cBhvr>
+                                        <p:cTn id="32" dur="1" fill="hold">
                                           <p:stCondLst>
                                             <p:cond delay="0"/>
                                           </p:stCondLst>
@@ -3988,14 +4564,14 @@
                                 </p:cTn>
                               </p:par>
                               <p:par>
-                                <p:cTn id="17" presetID="1" presetClass="entr" presetSubtype="0" fill="hold" grpId="0" nodeType="withEffect">
+                                <p:cTn id="33" presetID="1" presetClass="entr" presetSubtype="0" fill="hold" grpId="0" nodeType="withEffect">
                                   <p:stCondLst>
                                     <p:cond delay="0"/>
                                   </p:stCondLst>
                                   <p:childTnLst>
                                     <p:set>
                                       <p:cBhvr>
-                                        <p:cTn id="18" dur="1" fill="hold">
+                                        <p:cTn id="34" dur="1" fill="hold">
                                           <p:stCondLst>
                                             <p:cond delay="0"/>
                                           </p:stCondLst>
@@ -4009,6 +4585,114 @@
                                       </p:cBhvr>
                                       <p:to>
                                         <p:strVal val="visible"/>
+                                      </p:to>
+                                    </p:set>
+                                  </p:childTnLst>
+                                </p:cTn>
+                              </p:par>
+                              <p:par>
+                                <p:cTn id="35" presetID="1" presetClass="exit" presetSubtype="0" fill="hold" nodeType="withEffect">
+                                  <p:stCondLst>
+                                    <p:cond delay="0"/>
+                                  </p:stCondLst>
+                                  <p:childTnLst>
+                                    <p:set>
+                                      <p:cBhvr>
+                                        <p:cTn id="36" dur="1" fill="hold">
+                                          <p:stCondLst>
+                                            <p:cond delay="0"/>
+                                          </p:stCondLst>
+                                        </p:cTn>
+                                        <p:tgtEl>
+                                          <p:spTgt spid="22"/>
+                                        </p:tgtEl>
+                                        <p:attrNameLst>
+                                          <p:attrName>style.visibility</p:attrName>
+                                        </p:attrNameLst>
+                                      </p:cBhvr>
+                                      <p:to>
+                                        <p:strVal val="hidden"/>
+                                      </p:to>
+                                    </p:set>
+                                  </p:childTnLst>
+                                </p:cTn>
+                              </p:par>
+                              <p:par>
+                                <p:cTn id="37" presetID="1" presetClass="exit" presetSubtype="0" fill="hold" nodeType="withEffect">
+                                  <p:stCondLst>
+                                    <p:cond delay="0"/>
+                                  </p:stCondLst>
+                                  <p:childTnLst>
+                                    <p:set>
+                                      <p:cBhvr>
+                                        <p:cTn id="38" dur="1" fill="hold">
+                                          <p:stCondLst>
+                                            <p:cond delay="0"/>
+                                          </p:stCondLst>
+                                        </p:cTn>
+                                        <p:tgtEl>
+                                          <p:spTgt spid="23"/>
+                                        </p:tgtEl>
+                                        <p:attrNameLst>
+                                          <p:attrName>style.visibility</p:attrName>
+                                        </p:attrNameLst>
+                                      </p:cBhvr>
+                                      <p:to>
+                                        <p:strVal val="hidden"/>
+                                      </p:to>
+                                    </p:set>
+                                  </p:childTnLst>
+                                </p:cTn>
+                              </p:par>
+                              <p:par>
+                                <p:cTn id="39" presetID="1" presetClass="exit" presetSubtype="0" fill="hold" nodeType="withEffect">
+                                  <p:stCondLst>
+                                    <p:cond delay="0"/>
+                                  </p:stCondLst>
+                                  <p:childTnLst>
+                                    <p:set>
+                                      <p:cBhvr>
+                                        <p:cTn id="40" dur="1" fill="hold">
+                                          <p:stCondLst>
+                                            <p:cond delay="0"/>
+                                          </p:stCondLst>
+                                        </p:cTn>
+                                        <p:tgtEl>
+                                          <p:spTgt spid="36"/>
+                                        </p:tgtEl>
+                                        <p:attrNameLst>
+                                          <p:attrName>style.visibility</p:attrName>
+                                        </p:attrNameLst>
+                                      </p:cBhvr>
+                                      <p:to>
+                                        <p:strVal val="hidden"/>
+                                      </p:to>
+                                    </p:set>
+                                  </p:childTnLst>
+                                </p:cTn>
+                              </p:par>
+                              <p:par>
+                                <p:cTn id="41" presetID="1" presetClass="exit" presetSubtype="0" fill="hold" nodeType="withEffect">
+                                  <p:stCondLst>
+                                    <p:cond delay="0"/>
+                                  </p:stCondLst>
+                                  <p:childTnLst>
+                                    <p:set>
+                                      <p:cBhvr>
+                                        <p:cTn id="42" dur="1" fill="hold">
+                                          <p:stCondLst>
+                                            <p:cond delay="0"/>
+                                          </p:stCondLst>
+                                        </p:cTn>
+                                        <p:tgtEl>
+                                          <p:spTgt spid="35"/>
+                                        </p:tgtEl>
+                                        <p:attrNameLst>
+                                          <p:attrName>style.visibility</p:attrName>
+                                        </p:attrNameLst>
+                                      </p:cBhvr>
+                                      <p:to>
+                                        <p:strVal val="hidden"/>
                                       </p:to>
                                     </p:set>
                                   </p:childTnLst>

--- a/Current Presentation/Charlie- summer 2026 presentation.pptx
+++ b/Current Presentation/Charlie- summer 2026 presentation.pptx
@@ -120,7 +120,7 @@
 <p1510:revInfo xmlns:a="http://schemas.openxmlformats.org/drawingml/2006/main" xmlns:r="http://schemas.openxmlformats.org/officeDocument/2006/relationships" xmlns:p1510="http://schemas.microsoft.com/office/powerpoint/2015/10/main">
   <p1510:revLst>
     <p1510:client id="{70E034A4-BB94-F8D4-67B6-8AD443040898}" v="40" dt="2026-09-16T19:24:07.670"/>
-    <p1510:client id="{B56F71EC-F6B7-385C-DEBA-57351A51A5CE}" v="368" dt="2026-09-16T20:16:52.336"/>
+    <p1510:client id="{B56F71EC-F6B7-385C-DEBA-57351A51A5CE}" v="380" dt="2026-09-16T20:19:52.513"/>
     <p1510:client id="{CC656977-A51D-85A4-2C0F-8858A80BAC84}" v="271" dt="2026-09-16T17:16:40.811"/>
   </p1510:revLst>
 </p1510:revInfo>
@@ -590,7 +590,16 @@
                 <a:ea typeface="Calibri"/>
                 <a:cs typeface="Calibri"/>
               </a:rPr>
-              <a:t>For BSOD mention after topology "can't cause crashes"</a:t>
+              <a:t>For BSOD, mention firmware updates</a:t>
+            </a:r>
+          </a:p>
+          <a:p>
+            <a:r>
+              <a:rPr lang="en-US" dirty="0">
+                <a:ea typeface="Calibri"/>
+                <a:cs typeface="Calibri"/>
+              </a:rPr>
+              <a:t>For second IT images, explain question</a:t>
             </a:r>
           </a:p>
         </p:txBody>
@@ -3722,7 +3731,7 @@
         </p:blipFill>
         <p:spPr>
           <a:xfrm>
-            <a:off x="6932083" y="235743"/>
+            <a:off x="6762750" y="852600"/>
             <a:ext cx="5048250" cy="1647825"/>
           </a:xfrm>
           <a:prstGeom prst="rect">
@@ -4166,6 +4175,37 @@
           </p:txBody>
         </p:sp>
       </p:grpSp>
+      <p:pic>
+        <p:nvPicPr>
+          <p:cNvPr id="37" name="Picture 36" descr="A screenshot of a phone&#10;&#10;AI-generated content may be incorrect.">
+            <a:extLst>
+              <a:ext uri="{FF2B5EF4-FFF2-40B4-BE49-F238E27FC236}">
+                <a16:creationId xmlns:a16="http://schemas.microsoft.com/office/drawing/2014/main" id="{95F9C633-000F-3A99-23E8-6254720DA407}"/>
+              </a:ext>
+            </a:extLst>
+          </p:cNvPr>
+          <p:cNvPicPr>
+            <a:picLocks noChangeAspect="1"/>
+          </p:cNvPicPr>
+          <p:nvPr/>
+        </p:nvPicPr>
+        <p:blipFill>
+          <a:blip r:embed="rId4"/>
+          <a:srcRect l="353" t="69853" r="-1534" b="-3800"/>
+          <a:stretch>
+            <a:fillRect/>
+          </a:stretch>
+        </p:blipFill>
+        <p:spPr>
+          <a:xfrm>
+            <a:off x="6816865" y="1965361"/>
+            <a:ext cx="5107845" cy="559396"/>
+          </a:xfrm>
+          <a:prstGeom prst="rect">
+            <a:avLst/>
+          </a:prstGeom>
+        </p:spPr>
+      </p:pic>
     </p:spTree>
     <p:extLst>
       <p:ext uri="{BB962C8B-B14F-4D97-AF65-F5344CB8AC3E}">
@@ -4695,6 +4735,112 @@
                                         <p:strVal val="hidden"/>
                                       </p:to>
                                     </p:set>
+                                  </p:childTnLst>
+                                </p:cTn>
+                              </p:par>
+                            </p:childTnLst>
+                          </p:cTn>
+                        </p:par>
+                      </p:childTnLst>
+                    </p:cTn>
+                  </p:par>
+                  <p:par>
+                    <p:cTn id="43" fill="hold">
+                      <p:stCondLst>
+                        <p:cond delay="indefinite"/>
+                      </p:stCondLst>
+                      <p:childTnLst>
+                        <p:par>
+                          <p:cTn id="44" fill="hold">
+                            <p:stCondLst>
+                              <p:cond delay="0"/>
+                            </p:stCondLst>
+                            <p:childTnLst>
+                              <p:par>
+                                <p:cTn id="45" presetID="10" presetClass="entr" presetSubtype="0" fill="hold" nodeType="clickEffect">
+                                  <p:stCondLst>
+                                    <p:cond delay="0"/>
+                                  </p:stCondLst>
+                                  <p:childTnLst>
+                                    <p:set>
+                                      <p:cBhvr>
+                                        <p:cTn id="46" dur="1" fill="hold">
+                                          <p:stCondLst>
+                                            <p:cond delay="0"/>
+                                          </p:stCondLst>
+                                        </p:cTn>
+                                        <p:tgtEl>
+                                          <p:spTgt spid="9"/>
+                                        </p:tgtEl>
+                                        <p:attrNameLst>
+                                          <p:attrName>style.visibility</p:attrName>
+                                        </p:attrNameLst>
+                                      </p:cBhvr>
+                                      <p:to>
+                                        <p:strVal val="visible"/>
+                                      </p:to>
+                                    </p:set>
+                                    <p:animEffect transition="in" filter="fade">
+                                      <p:cBhvr>
+                                        <p:cTn id="47" dur="500"/>
+                                        <p:tgtEl>
+                                          <p:spTgt spid="9"/>
+                                        </p:tgtEl>
+                                      </p:cBhvr>
+                                    </p:animEffect>
+                                  </p:childTnLst>
+                                </p:cTn>
+                              </p:par>
+                            </p:childTnLst>
+                          </p:cTn>
+                        </p:par>
+                      </p:childTnLst>
+                    </p:cTn>
+                  </p:par>
+                  <p:par>
+                    <p:cTn id="48" fill="hold">
+                      <p:stCondLst>
+                        <p:cond delay="indefinite"/>
+                      </p:stCondLst>
+                      <p:childTnLst>
+                        <p:par>
+                          <p:cTn id="49" fill="hold">
+                            <p:stCondLst>
+                              <p:cond delay="0"/>
+                            </p:stCondLst>
+                            <p:childTnLst>
+                              <p:par>
+                                <p:cTn id="50" presetID="10" presetClass="entr" presetSubtype="0" fill="hold" nodeType="clickEffect">
+                                  <p:stCondLst>
+                                    <p:cond delay="0"/>
+                                  </p:stCondLst>
+                                  <p:childTnLst>
+                                    <p:set>
+                                      <p:cBhvr>
+                                        <p:cTn id="51" dur="1" fill="hold">
+                                          <p:stCondLst>
+                                            <p:cond delay="0"/>
+                                          </p:stCondLst>
+                                        </p:cTn>
+                                        <p:tgtEl>
+                                          <p:spTgt spid="37"/>
+                                        </p:tgtEl>
+                                        <p:attrNameLst>
+                                          <p:attrName>style.visibility</p:attrName>
+                                        </p:attrNameLst>
+                                      </p:cBhvr>
+                                      <p:to>
+                                        <p:strVal val="visible"/>
+                                      </p:to>
+                                    </p:set>
+                                    <p:animEffect transition="in" filter="fade">
+                                      <p:cBhvr>
+                                        <p:cTn id="52" dur="500"/>
+                                        <p:tgtEl>
+                                          <p:spTgt spid="37"/>
+                                        </p:tgtEl>
+                                      </p:cBhvr>
+                                    </p:animEffect>
                                   </p:childTnLst>
                                 </p:cTn>
                               </p:par>

--- a/Current Presentation/Charlie- summer 2026 presentation.pptx
+++ b/Current Presentation/Charlie- summer 2026 presentation.pptx
@@ -120,7 +120,7 @@
 <p1510:revInfo xmlns:a="http://schemas.openxmlformats.org/drawingml/2006/main" xmlns:r="http://schemas.openxmlformats.org/officeDocument/2006/relationships" xmlns:p1510="http://schemas.microsoft.com/office/powerpoint/2015/10/main">
   <p1510:revLst>
     <p1510:client id="{70E034A4-BB94-F8D4-67B6-8AD443040898}" v="40" dt="2026-09-16T19:24:07.670"/>
-    <p1510:client id="{B56F71EC-F6B7-385C-DEBA-57351A51A5CE}" v="380" dt="2026-09-16T20:19:52.513"/>
+    <p1510:client id="{B56F71EC-F6B7-385C-DEBA-57351A51A5CE}" v="557" dt="2026-09-16T20:52:18.869"/>
     <p1510:client id="{CC656977-A51D-85A4-2C0F-8858A80BAC84}" v="271" dt="2026-09-16T17:16:40.811"/>
   </p1510:revLst>
 </p1510:revInfo>
@@ -529,19 +529,17 @@
                 <a:ea typeface="Calibri"/>
                 <a:cs typeface="Calibri"/>
               </a:rPr>
-              <a:t>: "now, one thing about networking, can't cause crashes... insert </a:t>
-            </a:r>
-            <a:r>
-              <a:rPr lang="en-US" dirty="0" err="1">
+              <a:t>: "now, firmware; security vulnerabilities" (insert BSOD)</a:t>
+            </a:r>
+          </a:p>
+          <a:p>
+            <a:r>
+              <a:rPr lang="en-US" dirty="0">
                 <a:ea typeface="Calibri"/>
                 <a:cs typeface="Calibri"/>
               </a:rPr>
-              <a:t>bsod</a:t>
-            </a:r>
-            <a:endParaRPr lang="en-US">
-              <a:ea typeface="Calibri"/>
-              <a:cs typeface="Calibri"/>
-            </a:endParaRPr>
+              <a:t>Fix: in this case, hitting space</a:t>
+            </a:r>
           </a:p>
           <a:p>
             <a:endParaRPr lang="en-US" dirty="0">
@@ -3559,7 +3557,7 @@
         </p:nvSpPr>
         <p:spPr>
           <a:xfrm>
-            <a:off x="2153139" y="234217"/>
+            <a:off x="2153139" y="296676"/>
             <a:ext cx="11507637" cy="1454959"/>
           </a:xfrm>
           <a:prstGeom prst="rect">
@@ -3679,66 +3677,6 @@
           </a:p>
         </p:txBody>
       </p:sp>
-      <p:pic>
-        <p:nvPicPr>
-          <p:cNvPr id="9" name="Picture 8">
-            <a:extLst>
-              <a:ext uri="{FF2B5EF4-FFF2-40B4-BE49-F238E27FC236}">
-                <a16:creationId xmlns:a16="http://schemas.microsoft.com/office/drawing/2014/main" id="{8095E34D-5A22-1B05-EBD5-07CF77C509C9}"/>
-              </a:ext>
-            </a:extLst>
-          </p:cNvPr>
-          <p:cNvPicPr>
-            <a:picLocks noChangeAspect="1"/>
-          </p:cNvPicPr>
-          <p:nvPr/>
-        </p:nvPicPr>
-        <p:blipFill>
-          <a:blip r:embed="rId3"/>
-          <a:stretch>
-            <a:fillRect/>
-          </a:stretch>
-        </p:blipFill>
-        <p:spPr>
-          <a:xfrm>
-            <a:off x="347582" y="234676"/>
-            <a:ext cx="4143376" cy="2001484"/>
-          </a:xfrm>
-          <a:prstGeom prst="rect">
-            <a:avLst/>
-          </a:prstGeom>
-        </p:spPr>
-      </p:pic>
-      <p:pic>
-        <p:nvPicPr>
-          <p:cNvPr id="12" name="Picture 11">
-            <a:extLst>
-              <a:ext uri="{FF2B5EF4-FFF2-40B4-BE49-F238E27FC236}">
-                <a16:creationId xmlns:a16="http://schemas.microsoft.com/office/drawing/2014/main" id="{7BE978A0-5EFC-5E9F-B7DC-134A56DA4E7D}"/>
-              </a:ext>
-            </a:extLst>
-          </p:cNvPr>
-          <p:cNvPicPr>
-            <a:picLocks noChangeAspect="1"/>
-          </p:cNvPicPr>
-          <p:nvPr/>
-        </p:nvPicPr>
-        <p:blipFill>
-          <a:blip r:embed="rId4"/>
-          <a:stretch>
-            <a:fillRect/>
-          </a:stretch>
-        </p:blipFill>
-        <p:spPr>
-          <a:xfrm>
-            <a:off x="6762750" y="852600"/>
-            <a:ext cx="5048250" cy="1647825"/>
-          </a:xfrm>
-          <a:prstGeom prst="rect">
-            <a:avLst/>
-          </a:prstGeom>
-        </p:spPr>
-      </p:pic>
       <p:grpSp>
         <p:nvGrpSpPr>
           <p:cNvPr id="22" name="Group 21">
@@ -3903,7 +3841,7 @@
             <p:nvPr/>
           </p:nvPicPr>
           <p:blipFill>
-            <a:blip r:embed="rId5"/>
+            <a:blip r:embed="rId3"/>
             <a:stretch>
               <a:fillRect/>
             </a:stretch>
@@ -4121,7 +4059,7 @@
             <p:nvPr/>
           </p:nvPicPr>
           <p:blipFill>
-            <a:blip r:embed="rId6"/>
+            <a:blip r:embed="rId4"/>
             <a:stretch>
               <a:fillRect/>
             </a:stretch>
@@ -4175,6 +4113,430 @@
           </p:txBody>
         </p:sp>
       </p:grpSp>
+      <p:grpSp>
+        <p:nvGrpSpPr>
+          <p:cNvPr id="46" name="Group 45">
+            <a:extLst>
+              <a:ext uri="{FF2B5EF4-FFF2-40B4-BE49-F238E27FC236}">
+                <a16:creationId xmlns:a16="http://schemas.microsoft.com/office/drawing/2014/main" id="{ACCBE0B8-10AE-743A-2C34-BC5BAF4C5AF0}"/>
+              </a:ext>
+            </a:extLst>
+          </p:cNvPr>
+          <p:cNvGrpSpPr/>
+          <p:nvPr/>
+        </p:nvGrpSpPr>
+        <p:grpSpPr>
+          <a:xfrm>
+            <a:off x="3044944" y="1032177"/>
+            <a:ext cx="6277390" cy="2352633"/>
+            <a:chOff x="-4956336" y="2681172"/>
+            <a:chExt cx="6162369" cy="2290795"/>
+          </a:xfrm>
+        </p:grpSpPr>
+        <p:sp>
+          <p:nvSpPr>
+            <p:cNvPr id="45" name="Rectangle 44">
+              <a:extLst>
+                <a:ext uri="{FF2B5EF4-FFF2-40B4-BE49-F238E27FC236}">
+                  <a16:creationId xmlns:a16="http://schemas.microsoft.com/office/drawing/2014/main" id="{2CDC12E1-3C17-5AD8-F60F-EAFA68ADE523}"/>
+                </a:ext>
+              </a:extLst>
+            </p:cNvPr>
+            <p:cNvSpPr/>
+            <p:nvPr/>
+          </p:nvSpPr>
+          <p:spPr>
+            <a:xfrm>
+              <a:off x="-4956336" y="2681172"/>
+              <a:ext cx="4551879" cy="2290795"/>
+            </a:xfrm>
+            <a:prstGeom prst="rect">
+              <a:avLst/>
+            </a:prstGeom>
+            <a:solidFill>
+              <a:schemeClr val="tx2">
+                <a:lumMod val="10000"/>
+                <a:lumOff val="90000"/>
+              </a:schemeClr>
+            </a:solidFill>
+            <a:ln>
+              <a:noFill/>
+            </a:ln>
+          </p:spPr>
+          <p:style>
+            <a:lnRef idx="2">
+              <a:schemeClr val="accent1">
+                <a:shade val="15000"/>
+              </a:schemeClr>
+            </a:lnRef>
+            <a:fillRef idx="1">
+              <a:schemeClr val="accent1"/>
+            </a:fillRef>
+            <a:effectRef idx="0">
+              <a:schemeClr val="accent1"/>
+            </a:effectRef>
+            <a:fontRef idx="minor">
+              <a:schemeClr val="lt1"/>
+            </a:fontRef>
+          </p:style>
+          <p:txBody>
+            <a:bodyPr lIns="91440" tIns="45720" rIns="91440" bIns="45720" rtlCol="0" anchor="ctr"/>
+            <a:lstStyle/>
+            <a:p>
+              <a:pPr algn="ctr"/>
+              <a:endParaRPr lang="en-US"/>
+            </a:p>
+          </p:txBody>
+        </p:sp>
+        <p:sp>
+          <p:nvSpPr>
+            <p:cNvPr id="44" name="Rectangle 43">
+              <a:extLst>
+                <a:ext uri="{FF2B5EF4-FFF2-40B4-BE49-F238E27FC236}">
+                  <a16:creationId xmlns:a16="http://schemas.microsoft.com/office/drawing/2014/main" id="{70428956-40B1-AD8A-3B51-95C37DB04D08}"/>
+                </a:ext>
+              </a:extLst>
+            </p:cNvPr>
+            <p:cNvSpPr/>
+            <p:nvPr/>
+          </p:nvSpPr>
+          <p:spPr>
+            <a:xfrm>
+              <a:off x="-564230" y="3820471"/>
+              <a:ext cx="1770263" cy="519755"/>
+            </a:xfrm>
+            <a:prstGeom prst="rect">
+              <a:avLst/>
+            </a:prstGeom>
+            <a:solidFill>
+              <a:schemeClr val="tx2">
+                <a:lumMod val="10000"/>
+                <a:lumOff val="90000"/>
+              </a:schemeClr>
+            </a:solidFill>
+            <a:ln>
+              <a:noFill/>
+            </a:ln>
+          </p:spPr>
+          <p:style>
+            <a:lnRef idx="2">
+              <a:schemeClr val="accent1">
+                <a:shade val="15000"/>
+              </a:schemeClr>
+            </a:lnRef>
+            <a:fillRef idx="1">
+              <a:schemeClr val="accent1"/>
+            </a:fillRef>
+            <a:effectRef idx="0">
+              <a:schemeClr val="accent1"/>
+            </a:effectRef>
+            <a:fontRef idx="minor">
+              <a:schemeClr val="lt1"/>
+            </a:fontRef>
+          </p:style>
+          <p:txBody>
+            <a:bodyPr rtlCol="0" anchor="ctr"/>
+            <a:lstStyle/>
+            <a:p>
+              <a:pPr algn="ctr"/>
+              <a:endParaRPr lang="en-US"/>
+            </a:p>
+          </p:txBody>
+        </p:sp>
+      </p:grpSp>
+      <p:grpSp>
+        <p:nvGrpSpPr>
+          <p:cNvPr id="47" name="Group 46">
+            <a:extLst>
+              <a:ext uri="{FF2B5EF4-FFF2-40B4-BE49-F238E27FC236}">
+                <a16:creationId xmlns:a16="http://schemas.microsoft.com/office/drawing/2014/main" id="{EC0FC127-E5F6-3899-1AC8-3842449C0DB3}"/>
+              </a:ext>
+            </a:extLst>
+          </p:cNvPr>
+          <p:cNvGrpSpPr/>
+          <p:nvPr/>
+        </p:nvGrpSpPr>
+        <p:grpSpPr>
+          <a:xfrm>
+            <a:off x="3183221" y="1234020"/>
+            <a:ext cx="7017585" cy="2001484"/>
+            <a:chOff x="222664" y="559463"/>
+            <a:chExt cx="7017585" cy="2001484"/>
+          </a:xfrm>
+        </p:grpSpPr>
+        <p:pic>
+          <p:nvPicPr>
+            <p:cNvPr id="9" name="Picture 8">
+              <a:extLst>
+                <a:ext uri="{FF2B5EF4-FFF2-40B4-BE49-F238E27FC236}">
+                  <a16:creationId xmlns:a16="http://schemas.microsoft.com/office/drawing/2014/main" id="{8095E34D-5A22-1B05-EBD5-07CF77C509C9}"/>
+                </a:ext>
+              </a:extLst>
+            </p:cNvPr>
+            <p:cNvPicPr>
+              <a:picLocks noChangeAspect="1"/>
+            </p:cNvPicPr>
+            <p:nvPr/>
+          </p:nvPicPr>
+          <p:blipFill>
+            <a:blip r:embed="rId5"/>
+            <a:stretch>
+              <a:fillRect/>
+            </a:stretch>
+          </p:blipFill>
+          <p:spPr>
+            <a:xfrm>
+              <a:off x="222664" y="559463"/>
+              <a:ext cx="4143376" cy="2001484"/>
+            </a:xfrm>
+            <a:prstGeom prst="rect">
+              <a:avLst/>
+            </a:prstGeom>
+          </p:spPr>
+        </p:pic>
+        <p:sp>
+          <p:nvSpPr>
+            <p:cNvPr id="42" name="TextBox 41">
+              <a:extLst>
+                <a:ext uri="{FF2B5EF4-FFF2-40B4-BE49-F238E27FC236}">
+                  <a16:creationId xmlns:a16="http://schemas.microsoft.com/office/drawing/2014/main" id="{A0914651-7A60-266B-5A31-C7A2DF0A6BD8}"/>
+                </a:ext>
+              </a:extLst>
+            </p:cNvPr>
+            <p:cNvSpPr txBox="1"/>
+            <p:nvPr/>
+          </p:nvSpPr>
+          <p:spPr>
+            <a:xfrm>
+              <a:off x="4497049" y="1561475"/>
+              <a:ext cx="2743200" cy="365760"/>
+            </a:xfrm>
+            <a:prstGeom prst="rect">
+              <a:avLst/>
+            </a:prstGeom>
+            <a:noFill/>
+          </p:spPr>
+          <p:txBody>
+            <a:bodyPr rot="0" spcFirstLastPara="0" vertOverflow="overflow" horzOverflow="overflow" vert="horz" wrap="square" lIns="91440" tIns="45720" rIns="91440" bIns="45720" numCol="1" spcCol="0" rtlCol="0" fromWordArt="0" anchor="t" anchorCtr="0" forceAA="0" compatLnSpc="1">
+              <a:prstTxWarp prst="textNoShape">
+                <a:avLst/>
+              </a:prstTxWarp>
+              <a:spAutoFit/>
+            </a:bodyPr>
+            <a:lstStyle/>
+            <a:p>
+              <a:r>
+                <a:rPr lang="en-US" dirty="0"/>
+                <a:t>Network Topology</a:t>
+              </a:r>
+            </a:p>
+          </p:txBody>
+        </p:sp>
+      </p:grpSp>
+      <p:grpSp>
+        <p:nvGrpSpPr>
+          <p:cNvPr id="51" name="Group 50">
+            <a:extLst>
+              <a:ext uri="{FF2B5EF4-FFF2-40B4-BE49-F238E27FC236}">
+                <a16:creationId xmlns:a16="http://schemas.microsoft.com/office/drawing/2014/main" id="{F9766E02-D657-17FB-767A-29AB4B5F611C}"/>
+              </a:ext>
+            </a:extLst>
+          </p:cNvPr>
+          <p:cNvGrpSpPr/>
+          <p:nvPr/>
+        </p:nvGrpSpPr>
+        <p:grpSpPr>
+          <a:xfrm>
+            <a:off x="2847941" y="3670446"/>
+            <a:ext cx="6909982" cy="2315158"/>
+            <a:chOff x="-7187828" y="2681172"/>
+            <a:chExt cx="6783371" cy="2254305"/>
+          </a:xfrm>
+        </p:grpSpPr>
+        <p:sp>
+          <p:nvSpPr>
+            <p:cNvPr id="49" name="Rectangle 48">
+              <a:extLst>
+                <a:ext uri="{FF2B5EF4-FFF2-40B4-BE49-F238E27FC236}">
+                  <a16:creationId xmlns:a16="http://schemas.microsoft.com/office/drawing/2014/main" id="{8DF4D7CD-D290-1A9C-8975-F5BC58F9C474}"/>
+                </a:ext>
+              </a:extLst>
+            </p:cNvPr>
+            <p:cNvSpPr/>
+            <p:nvPr/>
+          </p:nvSpPr>
+          <p:spPr>
+            <a:xfrm>
+              <a:off x="-5643058" y="2681172"/>
+              <a:ext cx="5238601" cy="2254305"/>
+            </a:xfrm>
+            <a:prstGeom prst="rect">
+              <a:avLst/>
+            </a:prstGeom>
+            <a:solidFill>
+              <a:schemeClr val="tx2">
+                <a:lumMod val="10000"/>
+                <a:lumOff val="90000"/>
+              </a:schemeClr>
+            </a:solidFill>
+            <a:ln>
+              <a:noFill/>
+            </a:ln>
+          </p:spPr>
+          <p:style>
+            <a:lnRef idx="2">
+              <a:schemeClr val="accent1">
+                <a:shade val="15000"/>
+              </a:schemeClr>
+            </a:lnRef>
+            <a:fillRef idx="1">
+              <a:schemeClr val="accent1"/>
+            </a:fillRef>
+            <a:effectRef idx="0">
+              <a:schemeClr val="accent1"/>
+            </a:effectRef>
+            <a:fontRef idx="minor">
+              <a:schemeClr val="lt1"/>
+            </a:fontRef>
+          </p:style>
+          <p:txBody>
+            <a:bodyPr lIns="91440" tIns="45720" rIns="91440" bIns="45720" rtlCol="0" anchor="ctr"/>
+            <a:lstStyle/>
+            <a:p>
+              <a:pPr algn="ctr"/>
+              <a:endParaRPr lang="en-US"/>
+            </a:p>
+          </p:txBody>
+        </p:sp>
+        <p:sp>
+          <p:nvSpPr>
+            <p:cNvPr id="50" name="Rectangle 49">
+              <a:extLst>
+                <a:ext uri="{FF2B5EF4-FFF2-40B4-BE49-F238E27FC236}">
+                  <a16:creationId xmlns:a16="http://schemas.microsoft.com/office/drawing/2014/main" id="{D6EC0008-DB99-BAC1-BD54-B8B0D2F6FFE9}"/>
+                </a:ext>
+              </a:extLst>
+            </p:cNvPr>
+            <p:cNvSpPr/>
+            <p:nvPr/>
+          </p:nvSpPr>
+          <p:spPr>
+            <a:xfrm rot="20880000">
+              <a:off x="-7187828" y="3104130"/>
+              <a:ext cx="2285304" cy="471101"/>
+            </a:xfrm>
+            <a:prstGeom prst="rect">
+              <a:avLst/>
+            </a:prstGeom>
+            <a:solidFill>
+              <a:schemeClr val="tx2">
+                <a:lumMod val="10000"/>
+                <a:lumOff val="90000"/>
+              </a:schemeClr>
+            </a:solidFill>
+            <a:ln>
+              <a:noFill/>
+            </a:ln>
+          </p:spPr>
+          <p:style>
+            <a:lnRef idx="2">
+              <a:schemeClr val="accent1">
+                <a:shade val="15000"/>
+              </a:schemeClr>
+            </a:lnRef>
+            <a:fillRef idx="1">
+              <a:schemeClr val="accent1"/>
+            </a:fillRef>
+            <a:effectRef idx="0">
+              <a:schemeClr val="accent1"/>
+            </a:effectRef>
+            <a:fontRef idx="minor">
+              <a:schemeClr val="lt1"/>
+            </a:fontRef>
+          </p:style>
+          <p:txBody>
+            <a:bodyPr rtlCol="0" anchor="ctr"/>
+            <a:lstStyle/>
+            <a:p>
+              <a:pPr algn="ctr"/>
+              <a:endParaRPr lang="en-US"/>
+            </a:p>
+          </p:txBody>
+        </p:sp>
+      </p:grpSp>
+      <p:sp>
+        <p:nvSpPr>
+          <p:cNvPr id="52" name="TextBox 51">
+            <a:extLst>
+              <a:ext uri="{FF2B5EF4-FFF2-40B4-BE49-F238E27FC236}">
+                <a16:creationId xmlns:a16="http://schemas.microsoft.com/office/drawing/2014/main" id="{B9EBC4D3-E05F-AE4A-8EA1-F976B89BE657}"/>
+              </a:ext>
+            </a:extLst>
+          </p:cNvPr>
+          <p:cNvSpPr txBox="1"/>
+          <p:nvPr/>
+        </p:nvSpPr>
+        <p:spPr>
+          <a:xfrm rot="-720000">
+            <a:off x="2835638" y="4072327"/>
+            <a:ext cx="2743200" cy="365760"/>
+          </a:xfrm>
+          <a:prstGeom prst="rect">
+            <a:avLst/>
+          </a:prstGeom>
+          <a:noFill/>
+        </p:spPr>
+        <p:txBody>
+          <a:bodyPr rot="0" spcFirstLastPara="0" vertOverflow="overflow" horzOverflow="overflow" vert="horz" wrap="square" lIns="91440" tIns="45720" rIns="91440" bIns="45720" numCol="1" spcCol="0" rtlCol="0" fromWordArt="0" anchor="t" anchorCtr="0" forceAA="0" compatLnSpc="1">
+            <a:prstTxWarp prst="textNoShape">
+              <a:avLst/>
+            </a:prstTxWarp>
+            <a:spAutoFit/>
+          </a:bodyPr>
+          <a:lstStyle/>
+          <a:p>
+            <a:r>
+              <a:rPr lang="en-US" dirty="0" err="1"/>
+              <a:t>Fimware</a:t>
+            </a:r>
+            <a:r>
+              <a:rPr lang="en-US" dirty="0"/>
+              <a:t> Updates</a:t>
+            </a:r>
+          </a:p>
+        </p:txBody>
+      </p:sp>
+      <p:pic>
+        <p:nvPicPr>
+          <p:cNvPr id="12" name="Picture 11">
+            <a:extLst>
+              <a:ext uri="{FF2B5EF4-FFF2-40B4-BE49-F238E27FC236}">
+                <a16:creationId xmlns:a16="http://schemas.microsoft.com/office/drawing/2014/main" id="{7BE978A0-5EFC-5E9F-B7DC-134A56DA4E7D}"/>
+              </a:ext>
+            </a:extLst>
+          </p:cNvPr>
+          <p:cNvPicPr>
+            <a:picLocks noChangeAspect="1"/>
+          </p:cNvPicPr>
+          <p:nvPr/>
+        </p:nvPicPr>
+        <p:blipFill>
+          <a:blip r:embed="rId6"/>
+          <a:srcRect l="1104" t="14434" b="-2313"/>
+          <a:stretch>
+            <a:fillRect/>
+          </a:stretch>
+        </p:blipFill>
+        <p:spPr>
+          <a:xfrm>
+            <a:off x="4644888" y="4251029"/>
+            <a:ext cx="4992523" cy="1448091"/>
+          </a:xfrm>
+          <a:prstGeom prst="rect">
+            <a:avLst/>
+          </a:prstGeom>
+        </p:spPr>
+      </p:pic>
       <p:pic>
         <p:nvPicPr>
           <p:cNvPr id="37" name="Picture 36" descr="A screenshot of a phone&#10;&#10;AI-generated content may be incorrect.">
@@ -4190,16 +4552,16 @@
           <p:nvPr/>
         </p:nvPicPr>
         <p:blipFill>
-          <a:blip r:embed="rId4"/>
-          <a:srcRect l="353" t="69853" r="-1534" b="-3800"/>
+          <a:blip r:embed="rId6"/>
+          <a:srcRect l="-825" t="75757" r="-1485" b="-4525"/>
           <a:stretch>
             <a:fillRect/>
           </a:stretch>
         </p:blipFill>
         <p:spPr>
           <a:xfrm>
-            <a:off x="6816865" y="1965361"/>
-            <a:ext cx="5107845" cy="559396"/>
+            <a:off x="4589176" y="5225721"/>
+            <a:ext cx="5164840" cy="474053"/>
           </a:xfrm>
           <a:prstGeom prst="rect">
             <a:avLst/>
@@ -4604,7 +4966,7 @@
                                 </p:cTn>
                               </p:par>
                               <p:par>
-                                <p:cTn id="33" presetID="1" presetClass="entr" presetSubtype="0" fill="hold" grpId="0" nodeType="withEffect">
+                                <p:cTn id="33" presetID="1" presetClass="exit" presetSubtype="0" fill="hold" nodeType="withEffect">
                                   <p:stCondLst>
                                     <p:cond delay="0"/>
                                   </p:stCondLst>
@@ -4617,14 +4979,14 @@
                                           </p:stCondLst>
                                         </p:cTn>
                                         <p:tgtEl>
-                                          <p:spTgt spid="5"/>
+                                          <p:spTgt spid="22"/>
                                         </p:tgtEl>
                                         <p:attrNameLst>
                                           <p:attrName>style.visibility</p:attrName>
                                         </p:attrNameLst>
                                       </p:cBhvr>
                                       <p:to>
-                                        <p:strVal val="visible"/>
+                                        <p:strVal val="hidden"/>
                                       </p:to>
                                     </p:set>
                                   </p:childTnLst>
@@ -4644,7 +5006,7 @@
                                           </p:stCondLst>
                                         </p:cTn>
                                         <p:tgtEl>
-                                          <p:spTgt spid="22"/>
+                                          <p:spTgt spid="23"/>
                                         </p:tgtEl>
                                         <p:attrNameLst>
                                           <p:attrName>style.visibility</p:attrName>
@@ -4671,7 +5033,7 @@
                                           </p:stCondLst>
                                         </p:cTn>
                                         <p:tgtEl>
-                                          <p:spTgt spid="23"/>
+                                          <p:spTgt spid="36"/>
                                         </p:tgtEl>
                                         <p:attrNameLst>
                                           <p:attrName>style.visibility</p:attrName>
@@ -4698,7 +5060,7 @@
                                           </p:stCondLst>
                                         </p:cTn>
                                         <p:tgtEl>
-                                          <p:spTgt spid="36"/>
+                                          <p:spTgt spid="35"/>
                                         </p:tgtEl>
                                         <p:attrNameLst>
                                           <p:attrName>style.visibility</p:attrName>
@@ -4712,7 +5074,7 @@
                                 </p:cTn>
                               </p:par>
                               <p:par>
-                                <p:cTn id="41" presetID="1" presetClass="exit" presetSubtype="0" fill="hold" nodeType="withEffect">
+                                <p:cTn id="41" presetID="1" presetClass="entr" presetSubtype="0" fill="hold" grpId="0" nodeType="withEffect">
                                   <p:stCondLst>
                                     <p:cond delay="0"/>
                                   </p:stCondLst>
@@ -4725,14 +5087,14 @@
                                           </p:stCondLst>
                                         </p:cTn>
                                         <p:tgtEl>
-                                          <p:spTgt spid="35"/>
+                                          <p:spTgt spid="5"/>
                                         </p:tgtEl>
                                         <p:attrNameLst>
                                           <p:attrName>style.visibility</p:attrName>
                                         </p:attrNameLst>
                                       </p:cBhvr>
                                       <p:to>
-                                        <p:strVal val="hidden"/>
+                                        <p:strVal val="visible"/>
                                       </p:to>
                                     </p:set>
                                   </p:childTnLst>
@@ -4770,7 +5132,7 @@
                                           </p:stCondLst>
                                         </p:cTn>
                                         <p:tgtEl>
-                                          <p:spTgt spid="9"/>
+                                          <p:spTgt spid="47"/>
                                         </p:tgtEl>
                                         <p:attrNameLst>
                                           <p:attrName>style.visibility</p:attrName>
@@ -4784,7 +5146,42 @@
                                       <p:cBhvr>
                                         <p:cTn id="47" dur="500"/>
                                         <p:tgtEl>
-                                          <p:spTgt spid="9"/>
+                                          <p:spTgt spid="47"/>
+                                        </p:tgtEl>
+                                      </p:cBhvr>
+                                    </p:animEffect>
+                                  </p:childTnLst>
+                                </p:cTn>
+                              </p:par>
+                              <p:par>
+                                <p:cTn id="48" presetID="10" presetClass="entr" presetSubtype="0" fill="hold" nodeType="withEffect">
+                                  <p:stCondLst>
+                                    <p:cond delay="0"/>
+                                  </p:stCondLst>
+                                  <p:childTnLst>
+                                    <p:set>
+                                      <p:cBhvr>
+                                        <p:cTn id="49" dur="1" fill="hold">
+                                          <p:stCondLst>
+                                            <p:cond delay="0"/>
+                                          </p:stCondLst>
+                                        </p:cTn>
+                                        <p:tgtEl>
+                                          <p:spTgt spid="46"/>
+                                        </p:tgtEl>
+                                        <p:attrNameLst>
+                                          <p:attrName>style.visibility</p:attrName>
+                                        </p:attrNameLst>
+                                      </p:cBhvr>
+                                      <p:to>
+                                        <p:strVal val="visible"/>
+                                      </p:to>
+                                    </p:set>
+                                    <p:animEffect transition="in" filter="fade">
+                                      <p:cBhvr>
+                                        <p:cTn id="50" dur="500"/>
+                                        <p:tgtEl>
+                                          <p:spTgt spid="46"/>
                                         </p:tgtEl>
                                       </p:cBhvr>
                                     </p:animEffect>
@@ -4798,26 +5195,26 @@
                     </p:cTn>
                   </p:par>
                   <p:par>
-                    <p:cTn id="48" fill="hold">
+                    <p:cTn id="51" fill="hold">
                       <p:stCondLst>
                         <p:cond delay="indefinite"/>
                       </p:stCondLst>
                       <p:childTnLst>
                         <p:par>
-                          <p:cTn id="49" fill="hold">
+                          <p:cTn id="52" fill="hold">
                             <p:stCondLst>
                               <p:cond delay="0"/>
                             </p:stCondLst>
                             <p:childTnLst>
                               <p:par>
-                                <p:cTn id="50" presetID="10" presetClass="entr" presetSubtype="0" fill="hold" nodeType="clickEffect">
+                                <p:cTn id="53" presetID="22" presetClass="entr" presetSubtype="4" fill="hold" nodeType="clickEffect">
                                   <p:stCondLst>
                                     <p:cond delay="0"/>
                                   </p:stCondLst>
                                   <p:childTnLst>
                                     <p:set>
                                       <p:cBhvr>
-                                        <p:cTn id="51" dur="1" fill="hold">
+                                        <p:cTn id="54" dur="1" fill="hold">
                                           <p:stCondLst>
                                             <p:cond delay="0"/>
                                           </p:stCondLst>
@@ -4833,11 +5230,134 @@
                                         <p:strVal val="visible"/>
                                       </p:to>
                                     </p:set>
+                                    <p:animEffect transition="in" filter="wipe(down)">
+                                      <p:cBhvr>
+                                        <p:cTn id="55" dur="500"/>
+                                        <p:tgtEl>
+                                          <p:spTgt spid="37"/>
+                                        </p:tgtEl>
+                                      </p:cBhvr>
+                                    </p:animEffect>
+                                  </p:childTnLst>
+                                </p:cTn>
+                              </p:par>
+                            </p:childTnLst>
+                          </p:cTn>
+                        </p:par>
+                      </p:childTnLst>
+                    </p:cTn>
+                  </p:par>
+                  <p:par>
+                    <p:cTn id="56" fill="hold">
+                      <p:stCondLst>
+                        <p:cond delay="indefinite"/>
+                      </p:stCondLst>
+                      <p:childTnLst>
+                        <p:par>
+                          <p:cTn id="57" fill="hold">
+                            <p:stCondLst>
+                              <p:cond delay="0"/>
+                            </p:stCondLst>
+                            <p:childTnLst>
+                              <p:par>
+                                <p:cTn id="58" presetID="22" presetClass="entr" presetSubtype="4" fill="hold" nodeType="clickEffect">
+                                  <p:stCondLst>
+                                    <p:cond delay="0"/>
+                                  </p:stCondLst>
+                                  <p:childTnLst>
+                                    <p:set>
+                                      <p:cBhvr>
+                                        <p:cTn id="59" dur="1" fill="hold">
+                                          <p:stCondLst>
+                                            <p:cond delay="0"/>
+                                          </p:stCondLst>
+                                        </p:cTn>
+                                        <p:tgtEl>
+                                          <p:spTgt spid="12"/>
+                                        </p:tgtEl>
+                                        <p:attrNameLst>
+                                          <p:attrName>style.visibility</p:attrName>
+                                        </p:attrNameLst>
+                                      </p:cBhvr>
+                                      <p:to>
+                                        <p:strVal val="visible"/>
+                                      </p:to>
+                                    </p:set>
+                                    <p:animEffect transition="in" filter="wipe(down)">
+                                      <p:cBhvr>
+                                        <p:cTn id="60" dur="1500"/>
+                                        <p:tgtEl>
+                                          <p:spTgt spid="12"/>
+                                        </p:tgtEl>
+                                      </p:cBhvr>
+                                    </p:animEffect>
+                                  </p:childTnLst>
+                                </p:cTn>
+                              </p:par>
+                              <p:par>
+                                <p:cTn id="61" presetID="22" presetClass="entr" presetSubtype="4" fill="hold" grpId="0" nodeType="withEffect">
+                                  <p:stCondLst>
+                                    <p:cond delay="1000"/>
+                                  </p:stCondLst>
+                                  <p:childTnLst>
+                                    <p:set>
+                                      <p:cBhvr>
+                                        <p:cTn id="62" dur="1" fill="hold">
+                                          <p:stCondLst>
+                                            <p:cond delay="0"/>
+                                          </p:stCondLst>
+                                        </p:cTn>
+                                        <p:tgtEl>
+                                          <p:spTgt spid="52"/>
+                                        </p:tgtEl>
+                                        <p:attrNameLst>
+                                          <p:attrName>style.visibility</p:attrName>
+                                        </p:attrNameLst>
+                                      </p:cBhvr>
+                                      <p:to>
+                                        <p:strVal val="visible"/>
+                                      </p:to>
+                                    </p:set>
+                                    <p:animEffect transition="in" filter="wipe(down)">
+                                      <p:cBhvr>
+                                        <p:cTn id="63" dur="500"/>
+                                        <p:tgtEl>
+                                          <p:spTgt spid="52"/>
+                                        </p:tgtEl>
+                                      </p:cBhvr>
+                                    </p:animEffect>
+                                  </p:childTnLst>
+                                </p:cTn>
+                              </p:par>
+                              <p:par>
+                                <p:cTn id="64" presetID="10" presetClass="entr" presetSubtype="0" fill="hold" nodeType="withEffect">
+                                  <p:stCondLst>
+                                    <p:cond delay="0"/>
+                                  </p:stCondLst>
+                                  <p:childTnLst>
+                                    <p:set>
+                                      <p:cBhvr>
+                                        <p:cTn id="65" dur="1" fill="hold">
+                                          <p:stCondLst>
+                                            <p:cond delay="0"/>
+                                          </p:stCondLst>
+                                        </p:cTn>
+                                        <p:tgtEl>
+                                          <p:spTgt spid="51"/>
+                                        </p:tgtEl>
+                                        <p:attrNameLst>
+                                          <p:attrName>style.visibility</p:attrName>
+                                        </p:attrNameLst>
+                                      </p:cBhvr>
+                                      <p:to>
+                                        <p:strVal val="visible"/>
+                                      </p:to>
+                                    </p:set>
                                     <p:animEffect transition="in" filter="fade">
                                       <p:cBhvr>
-                                        <p:cTn id="52" dur="500"/>
+                                        <p:cTn id="66" dur="500"/>
                                         <p:tgtEl>
-                                          <p:spTgt spid="37"/>
+                                          <p:spTgt spid="51"/>
                                         </p:tgtEl>
                                       </p:cBhvr>
                                     </p:animEffect>
@@ -4876,6 +5396,7 @@
       <p:bldP spid="7" grpId="1"/>
       <p:bldP spid="2" grpId="0"/>
       <p:bldP spid="5" grpId="0"/>
+      <p:bldP spid="52" grpId="0"/>
     </p:bldLst>
   </p:timing>
 </p:sld>

--- a/Current Presentation/Charlie- summer 2026 presentation.pptx
+++ b/Current Presentation/Charlie- summer 2026 presentation.pptx
@@ -120,8 +120,9 @@
 <p1510:revInfo xmlns:a="http://schemas.openxmlformats.org/drawingml/2006/main" xmlns:r="http://schemas.openxmlformats.org/officeDocument/2006/relationships" xmlns:p1510="http://schemas.microsoft.com/office/powerpoint/2015/10/main">
   <p1510:revLst>
     <p1510:client id="{70E034A4-BB94-F8D4-67B6-8AD443040898}" v="40" dt="2026-09-16T19:24:07.670"/>
-    <p1510:client id="{B56F71EC-F6B7-385C-DEBA-57351A51A5CE}" v="557" dt="2026-09-16T20:52:18.869"/>
+    <p1510:client id="{B56F71EC-F6B7-385C-DEBA-57351A51A5CE}" v="558" dt="2026-09-16T20:52:48.026"/>
     <p1510:client id="{CC656977-A51D-85A4-2C0F-8858A80BAC84}" v="271" dt="2026-09-16T17:16:40.811"/>
+    <p1510:client id="{DDE4C246-BC71-FBBD-D9E0-D9A53124C3F1}" v="20" dt="2026-09-16T20:56:33.724"/>
   </p1510:revLst>
 </p1510:revInfo>
 </file>
@@ -4568,6 +4569,200 @@
           </a:prstGeom>
         </p:spPr>
       </p:pic>
+      <p:grpSp>
+        <p:nvGrpSpPr>
+          <p:cNvPr id="6" name="Group 5">
+            <a:extLst>
+              <a:ext uri="{FF2B5EF4-FFF2-40B4-BE49-F238E27FC236}">
+                <a16:creationId xmlns:a16="http://schemas.microsoft.com/office/drawing/2014/main" id="{59436EA9-EC03-6977-17B7-15C4F0B4D047}"/>
+              </a:ext>
+            </a:extLst>
+          </p:cNvPr>
+          <p:cNvGrpSpPr/>
+          <p:nvPr/>
+        </p:nvGrpSpPr>
+        <p:grpSpPr>
+          <a:xfrm>
+            <a:off x="0" y="0"/>
+            <a:ext cx="12192000" cy="6858000"/>
+            <a:chOff x="0" y="0"/>
+            <a:chExt cx="12192000" cy="6858000"/>
+          </a:xfrm>
+        </p:grpSpPr>
+        <p:sp>
+          <p:nvSpPr>
+            <p:cNvPr id="3" name="Rectangle 2">
+              <a:extLst>
+                <a:ext uri="{FF2B5EF4-FFF2-40B4-BE49-F238E27FC236}">
+                  <a16:creationId xmlns:a16="http://schemas.microsoft.com/office/drawing/2014/main" id="{3BD51B22-6035-47AA-F096-DF50E1293D3E}"/>
+                </a:ext>
+              </a:extLst>
+            </p:cNvPr>
+            <p:cNvSpPr/>
+            <p:nvPr/>
+          </p:nvSpPr>
+          <p:spPr>
+            <a:xfrm>
+              <a:off x="0" y="0"/>
+              <a:ext cx="12192000" cy="6858000"/>
+            </a:xfrm>
+            <a:prstGeom prst="rect">
+              <a:avLst/>
+            </a:prstGeom>
+            <a:solidFill>
+              <a:srgbClr val="1070AA"/>
+            </a:solidFill>
+          </p:spPr>
+          <p:style>
+            <a:lnRef idx="2">
+              <a:schemeClr val="accent1">
+                <a:shade val="15000"/>
+              </a:schemeClr>
+            </a:lnRef>
+            <a:fillRef idx="1">
+              <a:schemeClr val="accent1"/>
+            </a:fillRef>
+            <a:effectRef idx="0">
+              <a:schemeClr val="accent1"/>
+            </a:effectRef>
+            <a:fontRef idx="minor">
+              <a:schemeClr val="lt1"/>
+            </a:fontRef>
+          </p:style>
+          <p:txBody>
+            <a:bodyPr rtlCol="0" anchor="ctr"/>
+            <a:lstStyle>
+              <a:defPPr>
+                <a:defRPr lang="en-US"/>
+              </a:defPPr>
+              <a:lvl1pPr marL="0" algn="l" defTabSz="914400" rtl="0" eaLnBrk="1" latinLnBrk="0" hangingPunct="1">
+                <a:defRPr sz="1800" kern="1200">
+                  <a:solidFill>
+                    <a:schemeClr val="lt1"/>
+                  </a:solidFill>
+                  <a:latin typeface="+mn-lt"/>
+                  <a:ea typeface="+mn-ea"/>
+                  <a:cs typeface="+mn-cs"/>
+                </a:defRPr>
+              </a:lvl1pPr>
+              <a:lvl2pPr marL="457200" algn="l" defTabSz="914400" rtl="0" eaLnBrk="1" latinLnBrk="0" hangingPunct="1">
+                <a:defRPr sz="1800" kern="1200">
+                  <a:solidFill>
+                    <a:schemeClr val="lt1"/>
+                  </a:solidFill>
+                  <a:latin typeface="+mn-lt"/>
+                  <a:ea typeface="+mn-ea"/>
+                  <a:cs typeface="+mn-cs"/>
+                </a:defRPr>
+              </a:lvl2pPr>
+              <a:lvl3pPr marL="914400" algn="l" defTabSz="914400" rtl="0" eaLnBrk="1" latinLnBrk="0" hangingPunct="1">
+                <a:defRPr sz="1800" kern="1200">
+                  <a:solidFill>
+                    <a:schemeClr val="lt1"/>
+                  </a:solidFill>
+                  <a:latin typeface="+mn-lt"/>
+                  <a:ea typeface="+mn-ea"/>
+                  <a:cs typeface="+mn-cs"/>
+                </a:defRPr>
+              </a:lvl3pPr>
+              <a:lvl4pPr marL="1371600" algn="l" defTabSz="914400" rtl="0" eaLnBrk="1" latinLnBrk="0" hangingPunct="1">
+                <a:defRPr sz="1800" kern="1200">
+                  <a:solidFill>
+                    <a:schemeClr val="lt1"/>
+                  </a:solidFill>
+                  <a:latin typeface="+mn-lt"/>
+                  <a:ea typeface="+mn-ea"/>
+                  <a:cs typeface="+mn-cs"/>
+                </a:defRPr>
+              </a:lvl4pPr>
+              <a:lvl5pPr marL="1828800" algn="l" defTabSz="914400" rtl="0" eaLnBrk="1" latinLnBrk="0" hangingPunct="1">
+                <a:defRPr sz="1800" kern="1200">
+                  <a:solidFill>
+                    <a:schemeClr val="lt1"/>
+                  </a:solidFill>
+                  <a:latin typeface="+mn-lt"/>
+                  <a:ea typeface="+mn-ea"/>
+                  <a:cs typeface="+mn-cs"/>
+                </a:defRPr>
+              </a:lvl5pPr>
+              <a:lvl6pPr marL="2286000" algn="l" defTabSz="914400" rtl="0" eaLnBrk="1" latinLnBrk="0" hangingPunct="1">
+                <a:defRPr sz="1800" kern="1200">
+                  <a:solidFill>
+                    <a:schemeClr val="lt1"/>
+                  </a:solidFill>
+                  <a:latin typeface="+mn-lt"/>
+                  <a:ea typeface="+mn-ea"/>
+                  <a:cs typeface="+mn-cs"/>
+                </a:defRPr>
+              </a:lvl6pPr>
+              <a:lvl7pPr marL="2743200" algn="l" defTabSz="914400" rtl="0" eaLnBrk="1" latinLnBrk="0" hangingPunct="1">
+                <a:defRPr sz="1800" kern="1200">
+                  <a:solidFill>
+                    <a:schemeClr val="lt1"/>
+                  </a:solidFill>
+                  <a:latin typeface="+mn-lt"/>
+                  <a:ea typeface="+mn-ea"/>
+                  <a:cs typeface="+mn-cs"/>
+                </a:defRPr>
+              </a:lvl7pPr>
+              <a:lvl8pPr marL="3200400" algn="l" defTabSz="914400" rtl="0" eaLnBrk="1" latinLnBrk="0" hangingPunct="1">
+                <a:defRPr sz="1800" kern="1200">
+                  <a:solidFill>
+                    <a:schemeClr val="lt1"/>
+                  </a:solidFill>
+                  <a:latin typeface="+mn-lt"/>
+                  <a:ea typeface="+mn-ea"/>
+                  <a:cs typeface="+mn-cs"/>
+                </a:defRPr>
+              </a:lvl8pPr>
+              <a:lvl9pPr marL="3657600" algn="l" defTabSz="914400" rtl="0" eaLnBrk="1" latinLnBrk="0" hangingPunct="1">
+                <a:defRPr sz="1800" kern="1200">
+                  <a:solidFill>
+                    <a:schemeClr val="lt1"/>
+                  </a:solidFill>
+                  <a:latin typeface="+mn-lt"/>
+                  <a:ea typeface="+mn-ea"/>
+                  <a:cs typeface="+mn-cs"/>
+                </a:defRPr>
+              </a:lvl9pPr>
+            </a:lstStyle>
+            <a:p>
+              <a:pPr algn="ctr"/>
+              <a:endParaRPr lang="en-US"/>
+            </a:p>
+          </p:txBody>
+        </p:sp>
+        <p:pic>
+          <p:nvPicPr>
+            <p:cNvPr id="4" name="Picture 3" descr="A blue screen with a qr code&#10;&#10;AI-generated content may be incorrect.">
+              <a:extLst>
+                <a:ext uri="{FF2B5EF4-FFF2-40B4-BE49-F238E27FC236}">
+                  <a16:creationId xmlns:a16="http://schemas.microsoft.com/office/drawing/2014/main" id="{093AC10B-ECC1-A72C-BD4E-BE5469028DD3}"/>
+                </a:ext>
+              </a:extLst>
+            </p:cNvPr>
+            <p:cNvPicPr>
+              <a:picLocks noChangeAspect="1"/>
+            </p:cNvPicPr>
+            <p:nvPr/>
+          </p:nvPicPr>
+          <p:blipFill>
+            <a:blip r:embed="rId7"/>
+            <a:stretch>
+              <a:fillRect/>
+            </a:stretch>
+          </p:blipFill>
+          <p:spPr>
+            <a:xfrm>
+              <a:off x="1593440" y="1298191"/>
+              <a:ext cx="5324442" cy="3670464"/>
+            </a:xfrm>
+            <a:prstGeom prst="rect">
+              <a:avLst/>
+            </a:prstGeom>
+          </p:spPr>
+        </p:pic>
+      </p:grpSp>
     </p:spTree>
     <p:extLst>
       <p:ext uri="{BB962C8B-B14F-4D97-AF65-F5344CB8AC3E}">
@@ -5244,30 +5439,93 @@
                             </p:childTnLst>
                           </p:cTn>
                         </p:par>
-                      </p:childTnLst>
-                    </p:cTn>
-                  </p:par>
-                  <p:par>
-                    <p:cTn id="56" fill="hold">
-                      <p:stCondLst>
-                        <p:cond delay="indefinite"/>
-                      </p:stCondLst>
-                      <p:childTnLst>
                         <p:par>
-                          <p:cTn id="57" fill="hold">
+                          <p:cTn id="56" fill="hold">
                             <p:stCondLst>
-                              <p:cond delay="0"/>
+                              <p:cond delay="500"/>
                             </p:stCondLst>
                             <p:childTnLst>
                               <p:par>
-                                <p:cTn id="58" presetID="22" presetClass="entr" presetSubtype="4" fill="hold" nodeType="clickEffect">
+                                <p:cTn id="57" presetID="1" presetClass="entr" presetSubtype="0" fill="hold" nodeType="afterEffect">
                                   <p:stCondLst>
                                     <p:cond delay="0"/>
                                   </p:stCondLst>
                                   <p:childTnLst>
                                     <p:set>
                                       <p:cBhvr>
-                                        <p:cTn id="59" dur="1" fill="hold">
+                                        <p:cTn id="58" dur="1" fill="hold">
+                                          <p:stCondLst>
+                                            <p:cond delay="0"/>
+                                          </p:stCondLst>
+                                        </p:cTn>
+                                        <p:tgtEl>
+                                          <p:spTgt spid="6"/>
+                                        </p:tgtEl>
+                                        <p:attrNameLst>
+                                          <p:attrName>style.visibility</p:attrName>
+                                        </p:attrNameLst>
+                                      </p:cBhvr>
+                                      <p:to>
+                                        <p:strVal val="visible"/>
+                                      </p:to>
+                                    </p:set>
+                                  </p:childTnLst>
+                                </p:cTn>
+                              </p:par>
+                            </p:childTnLst>
+                          </p:cTn>
+                        </p:par>
+                      </p:childTnLst>
+                    </p:cTn>
+                  </p:par>
+                  <p:par>
+                    <p:cTn id="59" fill="hold">
+                      <p:stCondLst>
+                        <p:cond delay="indefinite"/>
+                      </p:stCondLst>
+                      <p:childTnLst>
+                        <p:par>
+                          <p:cTn id="60" fill="hold">
+                            <p:stCondLst>
+                              <p:cond delay="0"/>
+                            </p:stCondLst>
+                            <p:childTnLst>
+                              <p:par>
+                                <p:cTn id="61" presetID="1" presetClass="exit" presetSubtype="0" fill="hold" nodeType="clickEffect">
+                                  <p:stCondLst>
+                                    <p:cond delay="0"/>
+                                  </p:stCondLst>
+                                  <p:childTnLst>
+                                    <p:set>
+                                      <p:cBhvr>
+                                        <p:cTn id="62" dur="1" fill="hold">
+                                          <p:stCondLst>
+                                            <p:cond delay="0"/>
+                                          </p:stCondLst>
+                                        </p:cTn>
+                                        <p:tgtEl>
+                                          <p:spTgt spid="6"/>
+                                        </p:tgtEl>
+                                        <p:attrNameLst>
+                                          <p:attrName>style.visibility</p:attrName>
+                                        </p:attrNameLst>
+                                      </p:cBhvr>
+                                      <p:to>
+                                        <p:strVal val="hidden"/>
+                                      </p:to>
+                                    </p:set>
+                                  </p:childTnLst>
+                                </p:cTn>
+                              </p:par>
+                              <p:par>
+                                <p:cTn id="63" presetID="22" presetClass="entr" presetSubtype="4" fill="hold" nodeType="withEffect">
+                                  <p:stCondLst>
+                                    <p:cond delay="0"/>
+                                  </p:stCondLst>
+                                  <p:childTnLst>
+                                    <p:set>
+                                      <p:cBhvr>
+                                        <p:cTn id="64" dur="1" fill="hold">
                                           <p:stCondLst>
                                             <p:cond delay="0"/>
                                           </p:stCondLst>
@@ -5285,7 +5543,7 @@
                                     </p:set>
                                     <p:animEffect transition="in" filter="wipe(down)">
                                       <p:cBhvr>
-                                        <p:cTn id="60" dur="1500"/>
+                                        <p:cTn id="65" dur="1500"/>
                                         <p:tgtEl>
                                           <p:spTgt spid="12"/>
                                         </p:tgtEl>
@@ -5295,14 +5553,14 @@
                                 </p:cTn>
                               </p:par>
                               <p:par>
-                                <p:cTn id="61" presetID="22" presetClass="entr" presetSubtype="4" fill="hold" grpId="0" nodeType="withEffect">
+                                <p:cTn id="66" presetID="22" presetClass="entr" presetSubtype="4" fill="hold" grpId="0" nodeType="withEffect">
                                   <p:stCondLst>
                                     <p:cond delay="1000"/>
                                   </p:stCondLst>
                                   <p:childTnLst>
                                     <p:set>
                                       <p:cBhvr>
-                                        <p:cTn id="62" dur="1" fill="hold">
+                                        <p:cTn id="67" dur="1" fill="hold">
                                           <p:stCondLst>
                                             <p:cond delay="0"/>
                                           </p:stCondLst>
@@ -5320,7 +5578,7 @@
                                     </p:set>
                                     <p:animEffect transition="in" filter="wipe(down)">
                                       <p:cBhvr>
-                                        <p:cTn id="63" dur="500"/>
+                                        <p:cTn id="68" dur="500"/>
                                         <p:tgtEl>
                                           <p:spTgt spid="52"/>
                                         </p:tgtEl>
@@ -5330,14 +5588,14 @@
                                 </p:cTn>
                               </p:par>
                               <p:par>
-                                <p:cTn id="64" presetID="10" presetClass="entr" presetSubtype="0" fill="hold" nodeType="withEffect">
+                                <p:cTn id="69" presetID="10" presetClass="entr" presetSubtype="0" fill="hold" nodeType="withEffect">
                                   <p:stCondLst>
                                     <p:cond delay="0"/>
                                   </p:stCondLst>
                                   <p:childTnLst>
                                     <p:set>
                                       <p:cBhvr>
-                                        <p:cTn id="65" dur="1" fill="hold">
+                                        <p:cTn id="70" dur="1" fill="hold">
                                           <p:stCondLst>
                                             <p:cond delay="0"/>
                                           </p:stCondLst>
@@ -5355,7 +5613,7 @@
                                     </p:set>
                                     <p:animEffect transition="in" filter="fade">
                                       <p:cBhvr>
-                                        <p:cTn id="66" dur="500"/>
+                                        <p:cTn id="71" dur="500"/>
                                         <p:tgtEl>
                                           <p:spTgt spid="51"/>
                                         </p:tgtEl>
@@ -6404,200 +6662,6 @@
           <a:chExt cx="0" cy="0"/>
         </a:xfrm>
       </p:grpSpPr>
-      <p:grpSp>
-        <p:nvGrpSpPr>
-          <p:cNvPr id="8" name="Group 7">
-            <a:extLst>
-              <a:ext uri="{FF2B5EF4-FFF2-40B4-BE49-F238E27FC236}">
-                <a16:creationId xmlns:a16="http://schemas.microsoft.com/office/drawing/2014/main" id="{40E79D08-6933-85CA-D750-3A34B3FBC381}"/>
-              </a:ext>
-            </a:extLst>
-          </p:cNvPr>
-          <p:cNvGrpSpPr/>
-          <p:nvPr/>
-        </p:nvGrpSpPr>
-        <p:grpSpPr>
-          <a:xfrm>
-            <a:off x="0" y="0"/>
-            <a:ext cx="12192000" cy="6858000"/>
-            <a:chOff x="0" y="0"/>
-            <a:chExt cx="12192000" cy="6858000"/>
-          </a:xfrm>
-        </p:grpSpPr>
-        <p:sp>
-          <p:nvSpPr>
-            <p:cNvPr id="9" name="Rectangle 8">
-              <a:extLst>
-                <a:ext uri="{FF2B5EF4-FFF2-40B4-BE49-F238E27FC236}">
-                  <a16:creationId xmlns:a16="http://schemas.microsoft.com/office/drawing/2014/main" id="{EF9A5C66-D130-5D59-F688-0290BD303654}"/>
-                </a:ext>
-              </a:extLst>
-            </p:cNvPr>
-            <p:cNvSpPr/>
-            <p:nvPr/>
-          </p:nvSpPr>
-          <p:spPr>
-            <a:xfrm>
-              <a:off x="0" y="0"/>
-              <a:ext cx="12192000" cy="6858000"/>
-            </a:xfrm>
-            <a:prstGeom prst="rect">
-              <a:avLst/>
-            </a:prstGeom>
-            <a:solidFill>
-              <a:srgbClr val="1070AA"/>
-            </a:solidFill>
-          </p:spPr>
-          <p:style>
-            <a:lnRef idx="2">
-              <a:schemeClr val="accent1">
-                <a:shade val="15000"/>
-              </a:schemeClr>
-            </a:lnRef>
-            <a:fillRef idx="1">
-              <a:schemeClr val="accent1"/>
-            </a:fillRef>
-            <a:effectRef idx="0">
-              <a:schemeClr val="accent1"/>
-            </a:effectRef>
-            <a:fontRef idx="minor">
-              <a:schemeClr val="lt1"/>
-            </a:fontRef>
-          </p:style>
-          <p:txBody>
-            <a:bodyPr rtlCol="0" anchor="ctr"/>
-            <a:lstStyle>
-              <a:defPPr>
-                <a:defRPr lang="en-US"/>
-              </a:defPPr>
-              <a:lvl1pPr marL="0" algn="l" defTabSz="914400" rtl="0" eaLnBrk="1" latinLnBrk="0" hangingPunct="1">
-                <a:defRPr sz="1800" kern="1200">
-                  <a:solidFill>
-                    <a:schemeClr val="lt1"/>
-                  </a:solidFill>
-                  <a:latin typeface="+mn-lt"/>
-                  <a:ea typeface="+mn-ea"/>
-                  <a:cs typeface="+mn-cs"/>
-                </a:defRPr>
-              </a:lvl1pPr>
-              <a:lvl2pPr marL="457200" algn="l" defTabSz="914400" rtl="0" eaLnBrk="1" latinLnBrk="0" hangingPunct="1">
-                <a:defRPr sz="1800" kern="1200">
-                  <a:solidFill>
-                    <a:schemeClr val="lt1"/>
-                  </a:solidFill>
-                  <a:latin typeface="+mn-lt"/>
-                  <a:ea typeface="+mn-ea"/>
-                  <a:cs typeface="+mn-cs"/>
-                </a:defRPr>
-              </a:lvl2pPr>
-              <a:lvl3pPr marL="914400" algn="l" defTabSz="914400" rtl="0" eaLnBrk="1" latinLnBrk="0" hangingPunct="1">
-                <a:defRPr sz="1800" kern="1200">
-                  <a:solidFill>
-                    <a:schemeClr val="lt1"/>
-                  </a:solidFill>
-                  <a:latin typeface="+mn-lt"/>
-                  <a:ea typeface="+mn-ea"/>
-                  <a:cs typeface="+mn-cs"/>
-                </a:defRPr>
-              </a:lvl3pPr>
-              <a:lvl4pPr marL="1371600" algn="l" defTabSz="914400" rtl="0" eaLnBrk="1" latinLnBrk="0" hangingPunct="1">
-                <a:defRPr sz="1800" kern="1200">
-                  <a:solidFill>
-                    <a:schemeClr val="lt1"/>
-                  </a:solidFill>
-                  <a:latin typeface="+mn-lt"/>
-                  <a:ea typeface="+mn-ea"/>
-                  <a:cs typeface="+mn-cs"/>
-                </a:defRPr>
-              </a:lvl4pPr>
-              <a:lvl5pPr marL="1828800" algn="l" defTabSz="914400" rtl="0" eaLnBrk="1" latinLnBrk="0" hangingPunct="1">
-                <a:defRPr sz="1800" kern="1200">
-                  <a:solidFill>
-                    <a:schemeClr val="lt1"/>
-                  </a:solidFill>
-                  <a:latin typeface="+mn-lt"/>
-                  <a:ea typeface="+mn-ea"/>
-                  <a:cs typeface="+mn-cs"/>
-                </a:defRPr>
-              </a:lvl5pPr>
-              <a:lvl6pPr marL="2286000" algn="l" defTabSz="914400" rtl="0" eaLnBrk="1" latinLnBrk="0" hangingPunct="1">
-                <a:defRPr sz="1800" kern="1200">
-                  <a:solidFill>
-                    <a:schemeClr val="lt1"/>
-                  </a:solidFill>
-                  <a:latin typeface="+mn-lt"/>
-                  <a:ea typeface="+mn-ea"/>
-                  <a:cs typeface="+mn-cs"/>
-                </a:defRPr>
-              </a:lvl6pPr>
-              <a:lvl7pPr marL="2743200" algn="l" defTabSz="914400" rtl="0" eaLnBrk="1" latinLnBrk="0" hangingPunct="1">
-                <a:defRPr sz="1800" kern="1200">
-                  <a:solidFill>
-                    <a:schemeClr val="lt1"/>
-                  </a:solidFill>
-                  <a:latin typeface="+mn-lt"/>
-                  <a:ea typeface="+mn-ea"/>
-                  <a:cs typeface="+mn-cs"/>
-                </a:defRPr>
-              </a:lvl7pPr>
-              <a:lvl8pPr marL="3200400" algn="l" defTabSz="914400" rtl="0" eaLnBrk="1" latinLnBrk="0" hangingPunct="1">
-                <a:defRPr sz="1800" kern="1200">
-                  <a:solidFill>
-                    <a:schemeClr val="lt1"/>
-                  </a:solidFill>
-                  <a:latin typeface="+mn-lt"/>
-                  <a:ea typeface="+mn-ea"/>
-                  <a:cs typeface="+mn-cs"/>
-                </a:defRPr>
-              </a:lvl8pPr>
-              <a:lvl9pPr marL="3657600" algn="l" defTabSz="914400" rtl="0" eaLnBrk="1" latinLnBrk="0" hangingPunct="1">
-                <a:defRPr sz="1800" kern="1200">
-                  <a:solidFill>
-                    <a:schemeClr val="lt1"/>
-                  </a:solidFill>
-                  <a:latin typeface="+mn-lt"/>
-                  <a:ea typeface="+mn-ea"/>
-                  <a:cs typeface="+mn-cs"/>
-                </a:defRPr>
-              </a:lvl9pPr>
-            </a:lstStyle>
-            <a:p>
-              <a:pPr algn="ctr"/>
-              <a:endParaRPr lang="en-US"/>
-            </a:p>
-          </p:txBody>
-        </p:sp>
-        <p:pic>
-          <p:nvPicPr>
-            <p:cNvPr id="10" name="Picture 9" descr="A blue screen with a qr code&#10;&#10;AI-generated content may be incorrect.">
-              <a:extLst>
-                <a:ext uri="{FF2B5EF4-FFF2-40B4-BE49-F238E27FC236}">
-                  <a16:creationId xmlns:a16="http://schemas.microsoft.com/office/drawing/2014/main" id="{43204064-87A6-92BE-55E2-FCD9052D16A4}"/>
-                </a:ext>
-              </a:extLst>
-            </p:cNvPr>
-            <p:cNvPicPr>
-              <a:picLocks noChangeAspect="1"/>
-            </p:cNvPicPr>
-            <p:nvPr/>
-          </p:nvPicPr>
-          <p:blipFill>
-            <a:blip r:embed="rId2"/>
-            <a:stretch>
-              <a:fillRect/>
-            </a:stretch>
-          </p:blipFill>
-          <p:spPr>
-            <a:xfrm>
-              <a:off x="1593440" y="1298191"/>
-              <a:ext cx="5324442" cy="3670464"/>
-            </a:xfrm>
-            <a:prstGeom prst="rect">
-              <a:avLst/>
-            </a:prstGeom>
-          </p:spPr>
-        </p:pic>
-      </p:grpSp>
     </p:spTree>
     <p:extLst>
       <p:ext uri="{BB962C8B-B14F-4D97-AF65-F5344CB8AC3E}">

--- a/Current Presentation/Charlie- summer 2026 presentation.pptx
+++ b/Current Presentation/Charlie- summer 2026 presentation.pptx
@@ -3489,7 +3489,10 @@
           <a:bodyPr/>
           <a:lstStyle/>
           <a:p>
-            <a:endParaRPr lang="en-US"/>
+            <a:r>
+              <a:rPr lang="en-US" dirty="0"/>
+              <a:t>Charlies Summer End of Term Presentation</a:t>
+            </a:r>
           </a:p>
         </p:txBody>
       </p:sp>
@@ -3508,7 +3511,22 @@
           <a:bodyPr/>
           <a:lstStyle/>
           <a:p>
-            <a:endParaRPr lang="en-US"/>
+            <a:r>
+              <a:rPr lang="en-US" dirty="0"/>
+              <a:t>Author: Charlie</a:t>
+            </a:r>
+          </a:p>
+          <a:p>
+            <a:r>
+              <a:rPr lang="en-US" dirty="0"/>
+              <a:t>Director: n/a</a:t>
+            </a:r>
+          </a:p>
+          <a:p>
+            <a:r>
+              <a:rPr lang="en-US" dirty="0"/>
+              <a:t>Presenter: Charlie</a:t>
+            </a:r>
           </a:p>
         </p:txBody>
       </p:sp>
@@ -3522,6 +3540,366 @@
   <p:clrMapOvr>
     <a:masterClrMapping/>
   </p:clrMapOvr>
+  <p:timing>
+    <p:tnLst>
+      <p:par>
+        <p:cTn id="1" dur="indefinite" restart="never" nodeType="tmRoot">
+          <p:childTnLst>
+            <p:seq concurrent="1" nextAc="seek">
+              <p:cTn id="2" dur="indefinite" nodeType="mainSeq">
+                <p:childTnLst>
+                  <p:par>
+                    <p:cTn id="3" fill="hold">
+                      <p:stCondLst>
+                        <p:cond delay="indefinite"/>
+                      </p:stCondLst>
+                      <p:childTnLst>
+                        <p:par>
+                          <p:cTn id="4" fill="hold">
+                            <p:stCondLst>
+                              <p:cond delay="0"/>
+                            </p:stCondLst>
+                            <p:childTnLst>
+                              <p:par>
+                                <p:cTn id="5" presetID="45" presetClass="entr" presetSubtype="0" fill="hold" grpId="0" nodeType="clickEffect">
+                                  <p:stCondLst>
+                                    <p:cond delay="0"/>
+                                  </p:stCondLst>
+                                  <p:childTnLst>
+                                    <p:set>
+                                      <p:cBhvr>
+                                        <p:cTn id="6" dur="1" fill="hold">
+                                          <p:stCondLst>
+                                            <p:cond delay="0"/>
+                                          </p:stCondLst>
+                                        </p:cTn>
+                                        <p:tgtEl>
+                                          <p:spTgt spid="3">
+                                            <p:txEl>
+                                              <p:pRg st="0" end="0"/>
+                                            </p:txEl>
+                                          </p:spTgt>
+                                        </p:tgtEl>
+                                        <p:attrNameLst>
+                                          <p:attrName>style.visibility</p:attrName>
+                                        </p:attrNameLst>
+                                      </p:cBhvr>
+                                      <p:to>
+                                        <p:strVal val="visible"/>
+                                      </p:to>
+                                    </p:set>
+                                    <p:animEffect transition="in" filter="fade">
+                                      <p:cBhvr>
+                                        <p:cTn id="7" dur="2000"/>
+                                        <p:tgtEl>
+                                          <p:spTgt spid="3">
+                                            <p:txEl>
+                                              <p:pRg st="0" end="0"/>
+                                            </p:txEl>
+                                          </p:spTgt>
+                                        </p:tgtEl>
+                                      </p:cBhvr>
+                                    </p:animEffect>
+                                    <p:anim calcmode="lin" valueType="num">
+                                      <p:cBhvr>
+                                        <p:cTn id="8" dur="2000" fill="hold"/>
+                                        <p:tgtEl>
+                                          <p:spTgt spid="3">
+                                            <p:txEl>
+                                              <p:pRg st="0" end="0"/>
+                                            </p:txEl>
+                                          </p:spTgt>
+                                        </p:tgtEl>
+                                        <p:attrNameLst>
+                                          <p:attrName>ppt_w</p:attrName>
+                                        </p:attrNameLst>
+                                      </p:cBhvr>
+                                      <p:tavLst>
+                                        <p:tav tm="0" fmla="#ppt_w*sin(2.5*pi*$)">
+                                          <p:val>
+                                            <p:fltVal val="0"/>
+                                          </p:val>
+                                        </p:tav>
+                                        <p:tav tm="100000">
+                                          <p:val>
+                                            <p:fltVal val="1"/>
+                                          </p:val>
+                                        </p:tav>
+                                      </p:tavLst>
+                                    </p:anim>
+                                    <p:anim calcmode="lin" valueType="num">
+                                      <p:cBhvr>
+                                        <p:cTn id="9" dur="2000" fill="hold"/>
+                                        <p:tgtEl>
+                                          <p:spTgt spid="3">
+                                            <p:txEl>
+                                              <p:pRg st="0" end="0"/>
+                                            </p:txEl>
+                                          </p:spTgt>
+                                        </p:tgtEl>
+                                        <p:attrNameLst>
+                                          <p:attrName>ppt_h</p:attrName>
+                                        </p:attrNameLst>
+                                      </p:cBhvr>
+                                      <p:tavLst>
+                                        <p:tav tm="0">
+                                          <p:val>
+                                            <p:strVal val="#ppt_h"/>
+                                          </p:val>
+                                        </p:tav>
+                                        <p:tav tm="100000">
+                                          <p:val>
+                                            <p:strVal val="#ppt_h"/>
+                                          </p:val>
+                                        </p:tav>
+                                      </p:tavLst>
+                                    </p:anim>
+                                  </p:childTnLst>
+                                </p:cTn>
+                              </p:par>
+                            </p:childTnLst>
+                          </p:cTn>
+                        </p:par>
+                        <p:par>
+                          <p:cTn id="10" fill="hold">
+                            <p:stCondLst>
+                              <p:cond delay="2000"/>
+                            </p:stCondLst>
+                            <p:childTnLst>
+                              <p:par>
+                                <p:cTn id="11" presetID="45" presetClass="entr" presetSubtype="0" fill="hold" grpId="0" nodeType="afterEffect">
+                                  <p:stCondLst>
+                                    <p:cond delay="0"/>
+                                  </p:stCondLst>
+                                  <p:childTnLst>
+                                    <p:set>
+                                      <p:cBhvr>
+                                        <p:cTn id="12" dur="1" fill="hold">
+                                          <p:stCondLst>
+                                            <p:cond delay="0"/>
+                                          </p:stCondLst>
+                                        </p:cTn>
+                                        <p:tgtEl>
+                                          <p:spTgt spid="3">
+                                            <p:txEl>
+                                              <p:pRg st="1" end="1"/>
+                                            </p:txEl>
+                                          </p:spTgt>
+                                        </p:tgtEl>
+                                        <p:attrNameLst>
+                                          <p:attrName>style.visibility</p:attrName>
+                                        </p:attrNameLst>
+                                      </p:cBhvr>
+                                      <p:to>
+                                        <p:strVal val="visible"/>
+                                      </p:to>
+                                    </p:set>
+                                    <p:animEffect transition="in" filter="fade">
+                                      <p:cBhvr>
+                                        <p:cTn id="13" dur="2000"/>
+                                        <p:tgtEl>
+                                          <p:spTgt spid="3">
+                                            <p:txEl>
+                                              <p:pRg st="1" end="1"/>
+                                            </p:txEl>
+                                          </p:spTgt>
+                                        </p:tgtEl>
+                                      </p:cBhvr>
+                                    </p:animEffect>
+                                    <p:anim calcmode="lin" valueType="num">
+                                      <p:cBhvr>
+                                        <p:cTn id="14" dur="2000" fill="hold"/>
+                                        <p:tgtEl>
+                                          <p:spTgt spid="3">
+                                            <p:txEl>
+                                              <p:pRg st="1" end="1"/>
+                                            </p:txEl>
+                                          </p:spTgt>
+                                        </p:tgtEl>
+                                        <p:attrNameLst>
+                                          <p:attrName>ppt_w</p:attrName>
+                                        </p:attrNameLst>
+                                      </p:cBhvr>
+                                      <p:tavLst>
+                                        <p:tav tm="0" fmla="#ppt_w*sin(2.5*pi*$)">
+                                          <p:val>
+                                            <p:fltVal val="0"/>
+                                          </p:val>
+                                        </p:tav>
+                                        <p:tav tm="100000">
+                                          <p:val>
+                                            <p:fltVal val="1"/>
+                                          </p:val>
+                                        </p:tav>
+                                      </p:tavLst>
+                                    </p:anim>
+                                    <p:anim calcmode="lin" valueType="num">
+                                      <p:cBhvr>
+                                        <p:cTn id="15" dur="2000" fill="hold"/>
+                                        <p:tgtEl>
+                                          <p:spTgt spid="3">
+                                            <p:txEl>
+                                              <p:pRg st="1" end="1"/>
+                                            </p:txEl>
+                                          </p:spTgt>
+                                        </p:tgtEl>
+                                        <p:attrNameLst>
+                                          <p:attrName>ppt_h</p:attrName>
+                                        </p:attrNameLst>
+                                      </p:cBhvr>
+                                      <p:tavLst>
+                                        <p:tav tm="0">
+                                          <p:val>
+                                            <p:strVal val="#ppt_h"/>
+                                          </p:val>
+                                        </p:tav>
+                                        <p:tav tm="100000">
+                                          <p:val>
+                                            <p:strVal val="#ppt_h"/>
+                                          </p:val>
+                                        </p:tav>
+                                      </p:tavLst>
+                                    </p:anim>
+                                  </p:childTnLst>
+                                </p:cTn>
+                              </p:par>
+                            </p:childTnLst>
+                          </p:cTn>
+                        </p:par>
+                        <p:par>
+                          <p:cTn id="16" fill="hold">
+                            <p:stCondLst>
+                              <p:cond delay="4000"/>
+                            </p:stCondLst>
+                            <p:childTnLst>
+                              <p:par>
+                                <p:cTn id="17" presetID="45" presetClass="entr" presetSubtype="0" fill="hold" grpId="0" nodeType="afterEffect">
+                                  <p:stCondLst>
+                                    <p:cond delay="0"/>
+                                  </p:stCondLst>
+                                  <p:childTnLst>
+                                    <p:set>
+                                      <p:cBhvr>
+                                        <p:cTn id="18" dur="1" fill="hold">
+                                          <p:stCondLst>
+                                            <p:cond delay="0"/>
+                                          </p:stCondLst>
+                                        </p:cTn>
+                                        <p:tgtEl>
+                                          <p:spTgt spid="3">
+                                            <p:txEl>
+                                              <p:pRg st="2" end="2"/>
+                                            </p:txEl>
+                                          </p:spTgt>
+                                        </p:tgtEl>
+                                        <p:attrNameLst>
+                                          <p:attrName>style.visibility</p:attrName>
+                                        </p:attrNameLst>
+                                      </p:cBhvr>
+                                      <p:to>
+                                        <p:strVal val="visible"/>
+                                      </p:to>
+                                    </p:set>
+                                    <p:animEffect transition="in" filter="fade">
+                                      <p:cBhvr>
+                                        <p:cTn id="19" dur="2000"/>
+                                        <p:tgtEl>
+                                          <p:spTgt spid="3">
+                                            <p:txEl>
+                                              <p:pRg st="2" end="2"/>
+                                            </p:txEl>
+                                          </p:spTgt>
+                                        </p:tgtEl>
+                                      </p:cBhvr>
+                                    </p:animEffect>
+                                    <p:anim calcmode="lin" valueType="num">
+                                      <p:cBhvr>
+                                        <p:cTn id="20" dur="2000" fill="hold"/>
+                                        <p:tgtEl>
+                                          <p:spTgt spid="3">
+                                            <p:txEl>
+                                              <p:pRg st="2" end="2"/>
+                                            </p:txEl>
+                                          </p:spTgt>
+                                        </p:tgtEl>
+                                        <p:attrNameLst>
+                                          <p:attrName>ppt_w</p:attrName>
+                                        </p:attrNameLst>
+                                      </p:cBhvr>
+                                      <p:tavLst>
+                                        <p:tav tm="0" fmla="#ppt_w*sin(2.5*pi*$)">
+                                          <p:val>
+                                            <p:fltVal val="0"/>
+                                          </p:val>
+                                        </p:tav>
+                                        <p:tav tm="100000">
+                                          <p:val>
+                                            <p:fltVal val="1"/>
+                                          </p:val>
+                                        </p:tav>
+                                      </p:tavLst>
+                                    </p:anim>
+                                    <p:anim calcmode="lin" valueType="num">
+                                      <p:cBhvr>
+                                        <p:cTn id="21" dur="2000" fill="hold"/>
+                                        <p:tgtEl>
+                                          <p:spTgt spid="3">
+                                            <p:txEl>
+                                              <p:pRg st="2" end="2"/>
+                                            </p:txEl>
+                                          </p:spTgt>
+                                        </p:tgtEl>
+                                        <p:attrNameLst>
+                                          <p:attrName>ppt_h</p:attrName>
+                                        </p:attrNameLst>
+                                      </p:cBhvr>
+                                      <p:tavLst>
+                                        <p:tav tm="0">
+                                          <p:val>
+                                            <p:strVal val="#ppt_h"/>
+                                          </p:val>
+                                        </p:tav>
+                                        <p:tav tm="100000">
+                                          <p:val>
+                                            <p:strVal val="#ppt_h"/>
+                                          </p:val>
+                                        </p:tav>
+                                      </p:tavLst>
+                                    </p:anim>
+                                  </p:childTnLst>
+                                </p:cTn>
+                              </p:par>
+                            </p:childTnLst>
+                          </p:cTn>
+                        </p:par>
+                      </p:childTnLst>
+                    </p:cTn>
+                  </p:par>
+                </p:childTnLst>
+              </p:cTn>
+              <p:prevCondLst>
+                <p:cond evt="onPrev" delay="0">
+                  <p:tgtEl>
+                    <p:sldTgt/>
+                  </p:tgtEl>
+                </p:cond>
+              </p:prevCondLst>
+              <p:nextCondLst>
+                <p:cond evt="onNext" delay="0">
+                  <p:tgtEl>
+                    <p:sldTgt/>
+                  </p:tgtEl>
+                </p:cond>
+              </p:nextCondLst>
+            </p:seq>
+          </p:childTnLst>
+        </p:cTn>
+      </p:par>
+    </p:tnLst>
+    <p:bldLst>
+      <p:bldP spid="3" grpId="0" uiExpand="1" build="p"/>
+    </p:bldLst>
+  </p:timing>
 </p:sld>
 </file>
 

--- a/Current Presentation/Charlie- summer 2026 presentation.pptx
+++ b/Current Presentation/Charlie- summer 2026 presentation.pptx
@@ -5172,10 +5172,13 @@
                             </p:stCondLst>
                             <p:childTnLst>
                               <p:par>
-                                <p:cTn id="5" presetID="2" presetClass="entr" presetSubtype="4" fill="hold" grpId="0" nodeType="clickEffect">
+                                <p:cTn id="5" presetID="1" presetClass="entr" presetSubtype="0" fill="hold" grpId="0" nodeType="clickEffect">
                                   <p:stCondLst>
                                     <p:cond delay="0"/>
                                   </p:stCondLst>
+                                  <p:iterate type="lt">
+                                    <p:tmAbs val="500"/>
+                                  </p:iterate>
                                   <p:childTnLst>
                                     <p:set>
                                       <p:cBhvr>
@@ -5195,64 +5198,30 @@
                                         <p:strVal val="visible"/>
                                       </p:to>
                                     </p:set>
-                                    <p:anim calcmode="lin" valueType="num">
-                                      <p:cBhvr additive="base">
-                                        <p:cTn id="7" dur="500" fill="hold"/>
-                                        <p:tgtEl>
-                                          <p:spTgt spid="2"/>
-                                        </p:tgtEl>
-                                        <p:attrNameLst>
-                                          <p:attrName>ppt_x</p:attrName>
-                                        </p:attrNameLst>
-                                      </p:cBhvr>
-                                      <p:tavLst>
-                                        <p:tav tm="0">
-                                          <p:val>
-                                            <p:strVal val="#ppt_x"/>
-                                          </p:val>
-                                        </p:tav>
-                                        <p:tav tm="100000">
-                                          <p:val>
-                                            <p:strVal val="#ppt_x"/>
-                                          </p:val>
-                                        </p:tav>
-                                      </p:tavLst>
-                                    </p:anim>
-                                    <p:anim calcmode="lin" valueType="num">
-                                      <p:cBhvr additive="base">
-                                        <p:cTn id="8" dur="500" fill="hold"/>
-                                        <p:tgtEl>
-                                          <p:spTgt spid="2"/>
-                                        </p:tgtEl>
-                                        <p:attrNameLst>
-                                          <p:attrName>ppt_y</p:attrName>
-                                        </p:attrNameLst>
-                                      </p:cBhvr>
-                                      <p:tavLst>
-                                        <p:tav tm="0">
-                                          <p:val>
-                                            <p:strVal val="1+#ppt_h/2"/>
-                                          </p:val>
-                                        </p:tav>
-                                        <p:tav tm="100000">
-                                          <p:val>
-                                            <p:strVal val="#ppt_y"/>
-                                          </p:val>
-                                        </p:tav>
-                                      </p:tavLst>
-                                    </p:anim>
                                   </p:childTnLst>
                                 </p:cTn>
                               </p:par>
+                            </p:childTnLst>
+                          </p:cTn>
+                        </p:par>
+                        <p:par>
+                          <p:cTn id="7" fill="hold">
+                            <p:stCondLst>
+                              <p:cond delay="2001"/>
+                            </p:stCondLst>
+                            <p:childTnLst>
                               <p:par>
-                                <p:cTn id="9" presetID="2" presetClass="entr" presetSubtype="4" fill="hold" grpId="0" nodeType="withEffect">
+                                <p:cTn id="8" presetID="1" presetClass="entr" presetSubtype="0" fill="hold" grpId="0" nodeType="afterEffect">
                                   <p:stCondLst>
                                     <p:cond delay="0"/>
                                   </p:stCondLst>
+                                  <p:iterate type="lt">
+                                    <p:tmAbs val="500"/>
+                                  </p:iterate>
                                   <p:childTnLst>
                                     <p:set>
                                       <p:cBhvr>
-                                        <p:cTn id="10" dur="1" fill="hold">
+                                        <p:cTn id="9" dur="1" fill="hold">
                                           <p:stCondLst>
                                             <p:cond delay="0"/>
                                           </p:stCondLst>
@@ -5268,52 +5237,6 @@
                                         <p:strVal val="visible"/>
                                       </p:to>
                                     </p:set>
-                                    <p:anim calcmode="lin" valueType="num">
-                                      <p:cBhvr additive="base">
-                                        <p:cTn id="11" dur="500" fill="hold"/>
-                                        <p:tgtEl>
-                                          <p:spTgt spid="7"/>
-                                        </p:tgtEl>
-                                        <p:attrNameLst>
-                                          <p:attrName>ppt_x</p:attrName>
-                                        </p:attrNameLst>
-                                      </p:cBhvr>
-                                      <p:tavLst>
-                                        <p:tav tm="0">
-                                          <p:val>
-                                            <p:strVal val="#ppt_x"/>
-                                          </p:val>
-                                        </p:tav>
-                                        <p:tav tm="100000">
-                                          <p:val>
-                                            <p:strVal val="#ppt_x"/>
-                                          </p:val>
-                                        </p:tav>
-                                      </p:tavLst>
-                                    </p:anim>
-                                    <p:anim calcmode="lin" valueType="num">
-                                      <p:cBhvr additive="base">
-                                        <p:cTn id="12" dur="500" fill="hold"/>
-                                        <p:tgtEl>
-                                          <p:spTgt spid="7"/>
-                                        </p:tgtEl>
-                                        <p:attrNameLst>
-                                          <p:attrName>ppt_y</p:attrName>
-                                        </p:attrNameLst>
-                                      </p:cBhvr>
-                                      <p:tavLst>
-                                        <p:tav tm="0">
-                                          <p:val>
-                                            <p:strVal val="1+#ppt_h/2"/>
-                                          </p:val>
-                                        </p:tav>
-                                        <p:tav tm="100000">
-                                          <p:val>
-                                            <p:strVal val="#ppt_y"/>
-                                          </p:val>
-                                        </p:tav>
-                                      </p:tavLst>
-                                    </p:anim>
                                   </p:childTnLst>
                                 </p:cTn>
                               </p:par>
@@ -5324,26 +5247,26 @@
                     </p:cTn>
                   </p:par>
                   <p:par>
-                    <p:cTn id="13" fill="hold">
+                    <p:cTn id="10" fill="hold">
                       <p:stCondLst>
                         <p:cond delay="indefinite"/>
                       </p:stCondLst>
                       <p:childTnLst>
                         <p:par>
-                          <p:cTn id="14" fill="hold">
+                          <p:cTn id="11" fill="hold">
                             <p:stCondLst>
                               <p:cond delay="0"/>
                             </p:stCondLst>
                             <p:childTnLst>
                               <p:par>
-                                <p:cTn id="15" presetID="10" presetClass="entr" presetSubtype="0" fill="hold" nodeType="clickEffect">
+                                <p:cTn id="12" presetID="10" presetClass="entr" presetSubtype="0" fill="hold" nodeType="clickEffect">
                                   <p:stCondLst>
                                     <p:cond delay="0"/>
                                   </p:stCondLst>
                                   <p:childTnLst>
                                     <p:set>
                                       <p:cBhvr>
-                                        <p:cTn id="16" dur="1" fill="hold">
+                                        <p:cTn id="13" dur="1" fill="hold">
                                           <p:stCondLst>
                                             <p:cond delay="0"/>
                                           </p:stCondLst>
@@ -5361,7 +5284,7 @@
                                     </p:set>
                                     <p:animEffect transition="in" filter="fade">
                                       <p:cBhvr>
-                                        <p:cTn id="17" dur="500"/>
+                                        <p:cTn id="14" dur="500"/>
                                         <p:tgtEl>
                                           <p:spTgt spid="22"/>
                                         </p:tgtEl>
@@ -5371,14 +5294,14 @@
                                 </p:cTn>
                               </p:par>
                               <p:par>
-                                <p:cTn id="18" presetID="10" presetClass="entr" presetSubtype="0" fill="hold" nodeType="withEffect">
+                                <p:cTn id="15" presetID="10" presetClass="entr" presetSubtype="0" fill="hold" nodeType="withEffect">
                                   <p:stCondLst>
                                     <p:cond delay="0"/>
                                   </p:stCondLst>
                                   <p:childTnLst>
                                     <p:set>
                                       <p:cBhvr>
-                                        <p:cTn id="19" dur="1" fill="hold">
+                                        <p:cTn id="16" dur="1" fill="hold">
                                           <p:stCondLst>
                                             <p:cond delay="0"/>
                                           </p:stCondLst>
@@ -5396,7 +5319,7 @@
                                     </p:set>
                                     <p:animEffect transition="in" filter="fade">
                                       <p:cBhvr>
-                                        <p:cTn id="20" dur="500"/>
+                                        <p:cTn id="17" dur="500"/>
                                         <p:tgtEl>
                                           <p:spTgt spid="23"/>
                                         </p:tgtEl>
@@ -5412,26 +5335,26 @@
                     </p:cTn>
                   </p:par>
                   <p:par>
-                    <p:cTn id="21" fill="hold">
+                    <p:cTn id="18" fill="hold">
                       <p:stCondLst>
                         <p:cond delay="indefinite"/>
                       </p:stCondLst>
                       <p:childTnLst>
                         <p:par>
-                          <p:cTn id="22" fill="hold">
+                          <p:cTn id="19" fill="hold">
                             <p:stCondLst>
                               <p:cond delay="0"/>
                             </p:stCondLst>
                             <p:childTnLst>
                               <p:par>
-                                <p:cTn id="23" presetID="10" presetClass="entr" presetSubtype="0" fill="hold" nodeType="clickEffect">
+                                <p:cTn id="20" presetID="10" presetClass="entr" presetSubtype="0" fill="hold" nodeType="clickEffect">
                                   <p:stCondLst>
                                     <p:cond delay="0"/>
                                   </p:stCondLst>
                                   <p:childTnLst>
                                     <p:set>
                                       <p:cBhvr>
-                                        <p:cTn id="24" dur="1" fill="hold">
+                                        <p:cTn id="21" dur="1" fill="hold">
                                           <p:stCondLst>
                                             <p:cond delay="0"/>
                                           </p:stCondLst>
@@ -5449,7 +5372,7 @@
                                     </p:set>
                                     <p:animEffect transition="in" filter="fade">
                                       <p:cBhvr>
-                                        <p:cTn id="25" dur="500"/>
+                                        <p:cTn id="22" dur="500"/>
                                         <p:tgtEl>
                                           <p:spTgt spid="36"/>
                                         </p:tgtEl>
@@ -5459,14 +5382,14 @@
                                 </p:cTn>
                               </p:par>
                               <p:par>
-                                <p:cTn id="26" presetID="10" presetClass="entr" presetSubtype="0" fill="hold" nodeType="withEffect">
+                                <p:cTn id="23" presetID="10" presetClass="entr" presetSubtype="0" fill="hold" nodeType="withEffect">
                                   <p:stCondLst>
                                     <p:cond delay="0"/>
                                   </p:stCondLst>
                                   <p:childTnLst>
                                     <p:set>
                                       <p:cBhvr>
-                                        <p:cTn id="27" dur="1" fill="hold">
+                                        <p:cTn id="24" dur="1" fill="hold">
                                           <p:stCondLst>
                                             <p:cond delay="0"/>
                                           </p:stCondLst>
@@ -5484,7 +5407,7 @@
                                     </p:set>
                                     <p:animEffect transition="in" filter="fade">
                                       <p:cBhvr>
-                                        <p:cTn id="28" dur="500"/>
+                                        <p:cTn id="25" dur="500"/>
                                         <p:tgtEl>
                                           <p:spTgt spid="35"/>
                                         </p:tgtEl>
@@ -5500,26 +5423,29 @@
                     </p:cTn>
                   </p:par>
                   <p:par>
-                    <p:cTn id="29" fill="hold">
+                    <p:cTn id="26" fill="hold">
                       <p:stCondLst>
                         <p:cond delay="indefinite"/>
                       </p:stCondLst>
                       <p:childTnLst>
                         <p:par>
-                          <p:cTn id="30" fill="hold">
+                          <p:cTn id="27" fill="hold">
                             <p:stCondLst>
                               <p:cond delay="0"/>
                             </p:stCondLst>
                             <p:childTnLst>
                               <p:par>
-                                <p:cTn id="31" presetID="1" presetClass="exit" presetSubtype="0" fill="hold" grpId="1" nodeType="clickEffect">
+                                <p:cTn id="28" presetID="1" presetClass="exit" presetSubtype="0" fill="hold" grpId="1" nodeType="clickEffect">
                                   <p:stCondLst>
                                     <p:cond delay="0"/>
                                   </p:stCondLst>
+                                  <p:iterate type="lt">
+                                    <p:tmAbs val="500"/>
+                                  </p:iterate>
                                   <p:childTnLst>
                                     <p:set>
                                       <p:cBhvr>
-                                        <p:cTn id="32" dur="1" fill="hold">
+                                        <p:cTn id="29" dur="1" fill="hold">
                                           <p:stCondLst>
                                             <p:cond delay="0"/>
                                           </p:stCondLst>
@@ -5539,14 +5465,14 @@
                                 </p:cTn>
                               </p:par>
                               <p:par>
-                                <p:cTn id="33" presetID="1" presetClass="exit" presetSubtype="0" fill="hold" nodeType="withEffect">
+                                <p:cTn id="30" presetID="1" presetClass="exit" presetSubtype="0" fill="hold" nodeType="withEffect">
                                   <p:stCondLst>
                                     <p:cond delay="0"/>
                                   </p:stCondLst>
                                   <p:childTnLst>
                                     <p:set>
                                       <p:cBhvr>
-                                        <p:cTn id="34" dur="1" fill="hold">
+                                        <p:cTn id="31" dur="1" fill="hold">
                                           <p:stCondLst>
                                             <p:cond delay="0"/>
                                           </p:stCondLst>
@@ -5566,14 +5492,14 @@
                                 </p:cTn>
                               </p:par>
                               <p:par>
-                                <p:cTn id="35" presetID="1" presetClass="exit" presetSubtype="0" fill="hold" nodeType="withEffect">
+                                <p:cTn id="32" presetID="1" presetClass="exit" presetSubtype="0" fill="hold" nodeType="withEffect">
                                   <p:stCondLst>
                                     <p:cond delay="0"/>
                                   </p:stCondLst>
                                   <p:childTnLst>
                                     <p:set>
                                       <p:cBhvr>
-                                        <p:cTn id="36" dur="1" fill="hold">
+                                        <p:cTn id="33" dur="1" fill="hold">
                                           <p:stCondLst>
                                             <p:cond delay="0"/>
                                           </p:stCondLst>
@@ -5593,14 +5519,14 @@
                                 </p:cTn>
                               </p:par>
                               <p:par>
-                                <p:cTn id="37" presetID="1" presetClass="exit" presetSubtype="0" fill="hold" nodeType="withEffect">
+                                <p:cTn id="34" presetID="1" presetClass="exit" presetSubtype="0" fill="hold" nodeType="withEffect">
                                   <p:stCondLst>
                                     <p:cond delay="0"/>
                                   </p:stCondLst>
                                   <p:childTnLst>
                                     <p:set>
                                       <p:cBhvr>
-                                        <p:cTn id="38" dur="1" fill="hold">
+                                        <p:cTn id="35" dur="1" fill="hold">
                                           <p:stCondLst>
                                             <p:cond delay="0"/>
                                           </p:stCondLst>
@@ -5620,14 +5546,14 @@
                                 </p:cTn>
                               </p:par>
                               <p:par>
-                                <p:cTn id="39" presetID="1" presetClass="exit" presetSubtype="0" fill="hold" nodeType="withEffect">
+                                <p:cTn id="36" presetID="1" presetClass="exit" presetSubtype="0" fill="hold" nodeType="withEffect">
                                   <p:stCondLst>
                                     <p:cond delay="0"/>
                                   </p:stCondLst>
                                   <p:childTnLst>
                                     <p:set>
                                       <p:cBhvr>
-                                        <p:cTn id="40" dur="1" fill="hold">
+                                        <p:cTn id="37" dur="1" fill="hold">
                                           <p:stCondLst>
                                             <p:cond delay="0"/>
                                           </p:stCondLst>
@@ -5647,14 +5573,17 @@
                                 </p:cTn>
                               </p:par>
                               <p:par>
-                                <p:cTn id="41" presetID="1" presetClass="entr" presetSubtype="0" fill="hold" grpId="0" nodeType="withEffect">
+                                <p:cTn id="38" presetID="1" presetClass="entr" presetSubtype="0" fill="hold" grpId="0" nodeType="withEffect">
                                   <p:stCondLst>
-                                    <p:cond delay="0"/>
+                                    <p:cond delay="5500"/>
                                   </p:stCondLst>
+                                  <p:iterate type="lt">
+                                    <p:tmAbs val="500"/>
+                                  </p:iterate>
                                   <p:childTnLst>
                                     <p:set>
                                       <p:cBhvr>
-                                        <p:cTn id="42" dur="1" fill="hold">
+                                        <p:cTn id="39" dur="1" fill="hold">
                                           <p:stCondLst>
                                             <p:cond delay="0"/>
                                           </p:stCondLst>
@@ -5680,26 +5609,26 @@
                     </p:cTn>
                   </p:par>
                   <p:par>
-                    <p:cTn id="43" fill="hold">
+                    <p:cTn id="40" fill="hold">
                       <p:stCondLst>
                         <p:cond delay="indefinite"/>
                       </p:stCondLst>
                       <p:childTnLst>
                         <p:par>
-                          <p:cTn id="44" fill="hold">
+                          <p:cTn id="41" fill="hold">
                             <p:stCondLst>
                               <p:cond delay="0"/>
                             </p:stCondLst>
                             <p:childTnLst>
                               <p:par>
-                                <p:cTn id="45" presetID="10" presetClass="entr" presetSubtype="0" fill="hold" nodeType="clickEffect">
+                                <p:cTn id="42" presetID="10" presetClass="entr" presetSubtype="0" fill="hold" nodeType="clickEffect">
                                   <p:stCondLst>
                                     <p:cond delay="0"/>
                                   </p:stCondLst>
                                   <p:childTnLst>
                                     <p:set>
                                       <p:cBhvr>
-                                        <p:cTn id="46" dur="1" fill="hold">
+                                        <p:cTn id="43" dur="1" fill="hold">
                                           <p:stCondLst>
                                             <p:cond delay="0"/>
                                           </p:stCondLst>
@@ -5717,7 +5646,7 @@
                                     </p:set>
                                     <p:animEffect transition="in" filter="fade">
                                       <p:cBhvr>
-                                        <p:cTn id="47" dur="500"/>
+                                        <p:cTn id="44" dur="500"/>
                                         <p:tgtEl>
                                           <p:spTgt spid="47"/>
                                         </p:tgtEl>
@@ -5727,14 +5656,14 @@
                                 </p:cTn>
                               </p:par>
                               <p:par>
-                                <p:cTn id="48" presetID="10" presetClass="entr" presetSubtype="0" fill="hold" nodeType="withEffect">
+                                <p:cTn id="45" presetID="10" presetClass="entr" presetSubtype="0" fill="hold" nodeType="withEffect">
                                   <p:stCondLst>
                                     <p:cond delay="0"/>
                                   </p:stCondLst>
                                   <p:childTnLst>
                                     <p:set>
                                       <p:cBhvr>
-                                        <p:cTn id="49" dur="1" fill="hold">
+                                        <p:cTn id="46" dur="1" fill="hold">
                                           <p:stCondLst>
                                             <p:cond delay="0"/>
                                           </p:stCondLst>
@@ -5752,7 +5681,7 @@
                                     </p:set>
                                     <p:animEffect transition="in" filter="fade">
                                       <p:cBhvr>
-                                        <p:cTn id="50" dur="500"/>
+                                        <p:cTn id="47" dur="500"/>
                                         <p:tgtEl>
                                           <p:spTgt spid="46"/>
                                         </p:tgtEl>
@@ -5768,26 +5697,26 @@
                     </p:cTn>
                   </p:par>
                   <p:par>
-                    <p:cTn id="51" fill="hold">
+                    <p:cTn id="48" fill="hold">
                       <p:stCondLst>
                         <p:cond delay="indefinite"/>
                       </p:stCondLst>
                       <p:childTnLst>
                         <p:par>
-                          <p:cTn id="52" fill="hold">
+                          <p:cTn id="49" fill="hold">
                             <p:stCondLst>
                               <p:cond delay="0"/>
                             </p:stCondLst>
                             <p:childTnLst>
                               <p:par>
-                                <p:cTn id="53" presetID="22" presetClass="entr" presetSubtype="4" fill="hold" nodeType="clickEffect">
+                                <p:cTn id="50" presetID="22" presetClass="entr" presetSubtype="4" fill="hold" nodeType="clickEffect">
                                   <p:stCondLst>
                                     <p:cond delay="0"/>
                                   </p:stCondLst>
                                   <p:childTnLst>
                                     <p:set>
                                       <p:cBhvr>
-                                        <p:cTn id="54" dur="1" fill="hold">
+                                        <p:cTn id="51" dur="1" fill="hold">
                                           <p:stCondLst>
                                             <p:cond delay="0"/>
                                           </p:stCondLst>
@@ -5805,7 +5734,7 @@
                                     </p:set>
                                     <p:animEffect transition="in" filter="wipe(down)">
                                       <p:cBhvr>
-                                        <p:cTn id="55" dur="500"/>
+                                        <p:cTn id="52" dur="500"/>
                                         <p:tgtEl>
                                           <p:spTgt spid="37"/>
                                         </p:tgtEl>
@@ -5818,20 +5747,20 @@
                           </p:cTn>
                         </p:par>
                         <p:par>
-                          <p:cTn id="56" fill="hold">
+                          <p:cTn id="53" fill="hold">
                             <p:stCondLst>
                               <p:cond delay="500"/>
                             </p:stCondLst>
                             <p:childTnLst>
                               <p:par>
-                                <p:cTn id="57" presetID="1" presetClass="entr" presetSubtype="0" fill="hold" nodeType="afterEffect">
+                                <p:cTn id="54" presetID="1" presetClass="entr" presetSubtype="0" fill="hold" nodeType="afterEffect">
                                   <p:stCondLst>
                                     <p:cond delay="0"/>
                                   </p:stCondLst>
                                   <p:childTnLst>
                                     <p:set>
                                       <p:cBhvr>
-                                        <p:cTn id="58" dur="1" fill="hold">
+                                        <p:cTn id="55" dur="1" fill="hold">
                                           <p:stCondLst>
                                             <p:cond delay="0"/>
                                           </p:stCondLst>
@@ -5857,26 +5786,26 @@
                     </p:cTn>
                   </p:par>
                   <p:par>
-                    <p:cTn id="59" fill="hold">
+                    <p:cTn id="56" fill="hold">
                       <p:stCondLst>
                         <p:cond delay="indefinite"/>
                       </p:stCondLst>
                       <p:childTnLst>
                         <p:par>
-                          <p:cTn id="60" fill="hold">
+                          <p:cTn id="57" fill="hold">
                             <p:stCondLst>
                               <p:cond delay="0"/>
                             </p:stCondLst>
                             <p:childTnLst>
                               <p:par>
-                                <p:cTn id="61" presetID="1" presetClass="exit" presetSubtype="0" fill="hold" nodeType="clickEffect">
+                                <p:cTn id="58" presetID="1" presetClass="exit" presetSubtype="0" fill="hold" nodeType="clickEffect">
                                   <p:stCondLst>
                                     <p:cond delay="0"/>
                                   </p:stCondLst>
                                   <p:childTnLst>
                                     <p:set>
                                       <p:cBhvr>
-                                        <p:cTn id="62" dur="1" fill="hold">
+                                        <p:cTn id="59" dur="1" fill="hold">
                                           <p:stCondLst>
                                             <p:cond delay="0"/>
                                           </p:stCondLst>
@@ -5896,14 +5825,14 @@
                                 </p:cTn>
                               </p:par>
                               <p:par>
-                                <p:cTn id="63" presetID="22" presetClass="entr" presetSubtype="4" fill="hold" nodeType="withEffect">
+                                <p:cTn id="60" presetID="22" presetClass="entr" presetSubtype="4" fill="hold" nodeType="withEffect">
                                   <p:stCondLst>
                                     <p:cond delay="0"/>
                                   </p:stCondLst>
                                   <p:childTnLst>
                                     <p:set>
                                       <p:cBhvr>
-                                        <p:cTn id="64" dur="1" fill="hold">
+                                        <p:cTn id="61" dur="1" fill="hold">
                                           <p:stCondLst>
                                             <p:cond delay="0"/>
                                           </p:stCondLst>
@@ -5921,7 +5850,7 @@
                                     </p:set>
                                     <p:animEffect transition="in" filter="wipe(down)">
                                       <p:cBhvr>
-                                        <p:cTn id="65" dur="1500"/>
+                                        <p:cTn id="62" dur="1500"/>
                                         <p:tgtEl>
                                           <p:spTgt spid="12"/>
                                         </p:tgtEl>
@@ -5931,14 +5860,14 @@
                                 </p:cTn>
                               </p:par>
                               <p:par>
-                                <p:cTn id="66" presetID="22" presetClass="entr" presetSubtype="4" fill="hold" grpId="0" nodeType="withEffect">
+                                <p:cTn id="63" presetID="22" presetClass="entr" presetSubtype="4" fill="hold" grpId="0" nodeType="withEffect">
                                   <p:stCondLst>
                                     <p:cond delay="1000"/>
                                   </p:stCondLst>
                                   <p:childTnLst>
                                     <p:set>
                                       <p:cBhvr>
-                                        <p:cTn id="67" dur="1" fill="hold">
+                                        <p:cTn id="64" dur="1" fill="hold">
                                           <p:stCondLst>
                                             <p:cond delay="0"/>
                                           </p:stCondLst>
@@ -5956,7 +5885,7 @@
                                     </p:set>
                                     <p:animEffect transition="in" filter="wipe(down)">
                                       <p:cBhvr>
-                                        <p:cTn id="68" dur="500"/>
+                                        <p:cTn id="65" dur="500"/>
                                         <p:tgtEl>
                                           <p:spTgt spid="52"/>
                                         </p:tgtEl>
@@ -5966,14 +5895,14 @@
                                 </p:cTn>
                               </p:par>
                               <p:par>
-                                <p:cTn id="69" presetID="10" presetClass="entr" presetSubtype="0" fill="hold" nodeType="withEffect">
+                                <p:cTn id="66" presetID="10" presetClass="entr" presetSubtype="0" fill="hold" nodeType="withEffect">
                                   <p:stCondLst>
                                     <p:cond delay="0"/>
                                   </p:stCondLst>
                                   <p:childTnLst>
                                     <p:set>
                                       <p:cBhvr>
-                                        <p:cTn id="70" dur="1" fill="hold">
+                                        <p:cTn id="67" dur="1" fill="hold">
                                           <p:stCondLst>
                                             <p:cond delay="0"/>
                                           </p:stCondLst>
@@ -5991,7 +5920,7 @@
                                     </p:set>
                                     <p:animEffect transition="in" filter="fade">
                                       <p:cBhvr>
-                                        <p:cTn id="71" dur="500"/>
+                                        <p:cTn id="68" dur="500"/>
                                         <p:tgtEl>
                                           <p:spTgt spid="51"/>
                                         </p:tgtEl>

--- a/Current Presentation/Charlie- summer 2026 presentation.pptx
+++ b/Current Presentation/Charlie- summer 2026 presentation.pptx
@@ -5,16 +5,14 @@
     <p:sldMasterId id="2147483660" r:id="rId1"/>
   </p:sldMasterIdLst>
   <p:notesMasterIdLst>
-    <p:notesMasterId r:id="rId9"/>
+    <p:notesMasterId r:id="rId7"/>
   </p:notesMasterIdLst>
   <p:sldIdLst>
     <p:sldId id="256" r:id="rId2"/>
     <p:sldId id="257" r:id="rId3"/>
     <p:sldId id="258" r:id="rId4"/>
-    <p:sldId id="259" r:id="rId5"/>
-    <p:sldId id="260" r:id="rId6"/>
-    <p:sldId id="261" r:id="rId7"/>
-    <p:sldId id="265" r:id="rId8"/>
+    <p:sldId id="260" r:id="rId5"/>
+    <p:sldId id="261" r:id="rId6"/>
   </p:sldIdLst>
   <p:sldSz cx="12192000" cy="6858000"/>
   <p:notesSz cx="6858000" cy="9144000"/>
@@ -5172,13 +5170,10 @@
                             </p:stCondLst>
                             <p:childTnLst>
                               <p:par>
-                                <p:cTn id="5" presetID="1" presetClass="entr" presetSubtype="0" fill="hold" grpId="0" nodeType="clickEffect">
+                                <p:cTn id="5" presetID="2" presetClass="entr" presetSubtype="4" fill="hold" grpId="0" nodeType="clickEffect">
                                   <p:stCondLst>
                                     <p:cond delay="0"/>
                                   </p:stCondLst>
-                                  <p:iterate type="lt">
-                                    <p:tmAbs val="500"/>
-                                  </p:iterate>
                                   <p:childTnLst>
                                     <p:set>
                                       <p:cBhvr>
@@ -5198,30 +5193,67 @@
                                         <p:strVal val="visible"/>
                                       </p:to>
                                     </p:set>
+                                    <p:anim calcmode="lin" valueType="num">
+                                      <p:cBhvr additive="base">
+                                        <p:cTn id="7" dur="500" fill="hold"/>
+                                        <p:tgtEl>
+                                          <p:spTgt spid="2"/>
+                                        </p:tgtEl>
+                                        <p:attrNameLst>
+                                          <p:attrName>ppt_x</p:attrName>
+                                        </p:attrNameLst>
+                                      </p:cBhvr>
+                                      <p:tavLst>
+                                        <p:tav tm="0">
+                                          <p:val>
+                                            <p:strVal val="#ppt_x"/>
+                                          </p:val>
+                                        </p:tav>
+                                        <p:tav tm="100000">
+                                          <p:val>
+                                            <p:strVal val="#ppt_x"/>
+                                          </p:val>
+                                        </p:tav>
+                                      </p:tavLst>
+                                    </p:anim>
+                                    <p:anim calcmode="lin" valueType="num">
+                                      <p:cBhvr additive="base">
+                                        <p:cTn id="8" dur="500" fill="hold"/>
+                                        <p:tgtEl>
+                                          <p:spTgt spid="2"/>
+                                        </p:tgtEl>
+                                        <p:attrNameLst>
+                                          <p:attrName>ppt_y</p:attrName>
+                                        </p:attrNameLst>
+                                      </p:cBhvr>
+                                      <p:tavLst>
+                                        <p:tav tm="0">
+                                          <p:val>
+                                            <p:strVal val="1+#ppt_h/2"/>
+                                          </p:val>
+                                        </p:tav>
+                                        <p:tav tm="100000">
+                                          <p:val>
+                                            <p:strVal val="#ppt_y"/>
+                                          </p:val>
+                                        </p:tav>
+                                      </p:tavLst>
+                                    </p:anim>
                                   </p:childTnLst>
                                 </p:cTn>
                               </p:par>
-                            </p:childTnLst>
-                          </p:cTn>
-                        </p:par>
-                        <p:par>
-                          <p:cTn id="7" fill="hold">
-                            <p:stCondLst>
-                              <p:cond delay="2001"/>
-                            </p:stCondLst>
-                            <p:childTnLst>
                               <p:par>
-                                <p:cTn id="8" presetID="1" presetClass="entr" presetSubtype="0" fill="hold" grpId="0" nodeType="afterEffect">
+                                <p:cTn id="9" presetID="2" presetClass="entr" presetSubtype="4" fill="hold" grpId="0" nodeType="withEffect">
                                   <p:stCondLst>
                                     <p:cond delay="0"/>
                                   </p:stCondLst>
                                   <p:iterate type="lt">
-                                    <p:tmAbs val="500"/>
+                                    <p:tmPct val="0"/>
                                   </p:iterate>
                                   <p:childTnLst>
                                     <p:set>
                                       <p:cBhvr>
-                                        <p:cTn id="9" dur="1" fill="hold">
+                                        <p:cTn id="10" dur="1" fill="hold">
                                           <p:stCondLst>
                                             <p:cond delay="0"/>
                                           </p:stCondLst>
@@ -5237,6 +5269,52 @@
                                         <p:strVal val="visible"/>
                                       </p:to>
                                     </p:set>
+                                    <p:anim calcmode="lin" valueType="num">
+                                      <p:cBhvr additive="base">
+                                        <p:cTn id="11" dur="500" fill="hold"/>
+                                        <p:tgtEl>
+                                          <p:spTgt spid="7"/>
+                                        </p:tgtEl>
+                                        <p:attrNameLst>
+                                          <p:attrName>ppt_x</p:attrName>
+                                        </p:attrNameLst>
+                                      </p:cBhvr>
+                                      <p:tavLst>
+                                        <p:tav tm="0">
+                                          <p:val>
+                                            <p:strVal val="#ppt_x"/>
+                                          </p:val>
+                                        </p:tav>
+                                        <p:tav tm="100000">
+                                          <p:val>
+                                            <p:strVal val="#ppt_x"/>
+                                          </p:val>
+                                        </p:tav>
+                                      </p:tavLst>
+                                    </p:anim>
+                                    <p:anim calcmode="lin" valueType="num">
+                                      <p:cBhvr additive="base">
+                                        <p:cTn id="12" dur="500" fill="hold"/>
+                                        <p:tgtEl>
+                                          <p:spTgt spid="7"/>
+                                        </p:tgtEl>
+                                        <p:attrNameLst>
+                                          <p:attrName>ppt_y</p:attrName>
+                                        </p:attrNameLst>
+                                      </p:cBhvr>
+                                      <p:tavLst>
+                                        <p:tav tm="0">
+                                          <p:val>
+                                            <p:strVal val="1+#ppt_h/2"/>
+                                          </p:val>
+                                        </p:tav>
+                                        <p:tav tm="100000">
+                                          <p:val>
+                                            <p:strVal val="#ppt_y"/>
+                                          </p:val>
+                                        </p:tav>
+                                      </p:tavLst>
+                                    </p:anim>
                                   </p:childTnLst>
                                 </p:cTn>
                               </p:par>
@@ -5247,26 +5325,26 @@
                     </p:cTn>
                   </p:par>
                   <p:par>
-                    <p:cTn id="10" fill="hold">
+                    <p:cTn id="13" fill="hold">
                       <p:stCondLst>
                         <p:cond delay="indefinite"/>
                       </p:stCondLst>
                       <p:childTnLst>
                         <p:par>
-                          <p:cTn id="11" fill="hold">
+                          <p:cTn id="14" fill="hold">
                             <p:stCondLst>
                               <p:cond delay="0"/>
                             </p:stCondLst>
                             <p:childTnLst>
                               <p:par>
-                                <p:cTn id="12" presetID="10" presetClass="entr" presetSubtype="0" fill="hold" nodeType="clickEffect">
+                                <p:cTn id="15" presetID="10" presetClass="entr" presetSubtype="0" fill="hold" nodeType="clickEffect">
                                   <p:stCondLst>
                                     <p:cond delay="0"/>
                                   </p:stCondLst>
                                   <p:childTnLst>
                                     <p:set>
                                       <p:cBhvr>
-                                        <p:cTn id="13" dur="1" fill="hold">
+                                        <p:cTn id="16" dur="1" fill="hold">
                                           <p:stCondLst>
                                             <p:cond delay="0"/>
                                           </p:stCondLst>
@@ -5284,7 +5362,7 @@
                                     </p:set>
                                     <p:animEffect transition="in" filter="fade">
                                       <p:cBhvr>
-                                        <p:cTn id="14" dur="500"/>
+                                        <p:cTn id="17" dur="500"/>
                                         <p:tgtEl>
                                           <p:spTgt spid="22"/>
                                         </p:tgtEl>
@@ -5294,14 +5372,14 @@
                                 </p:cTn>
                               </p:par>
                               <p:par>
-                                <p:cTn id="15" presetID="10" presetClass="entr" presetSubtype="0" fill="hold" nodeType="withEffect">
+                                <p:cTn id="18" presetID="10" presetClass="entr" presetSubtype="0" fill="hold" nodeType="withEffect">
                                   <p:stCondLst>
                                     <p:cond delay="0"/>
                                   </p:stCondLst>
                                   <p:childTnLst>
                                     <p:set>
                                       <p:cBhvr>
-                                        <p:cTn id="16" dur="1" fill="hold">
+                                        <p:cTn id="19" dur="1" fill="hold">
                                           <p:stCondLst>
                                             <p:cond delay="0"/>
                                           </p:stCondLst>
@@ -5319,7 +5397,7 @@
                                     </p:set>
                                     <p:animEffect transition="in" filter="fade">
                                       <p:cBhvr>
-                                        <p:cTn id="17" dur="500"/>
+                                        <p:cTn id="20" dur="500"/>
                                         <p:tgtEl>
                                           <p:spTgt spid="23"/>
                                         </p:tgtEl>
@@ -5335,26 +5413,26 @@
                     </p:cTn>
                   </p:par>
                   <p:par>
-                    <p:cTn id="18" fill="hold">
+                    <p:cTn id="21" fill="hold">
                       <p:stCondLst>
                         <p:cond delay="indefinite"/>
                       </p:stCondLst>
                       <p:childTnLst>
                         <p:par>
-                          <p:cTn id="19" fill="hold">
+                          <p:cTn id="22" fill="hold">
                             <p:stCondLst>
                               <p:cond delay="0"/>
                             </p:stCondLst>
                             <p:childTnLst>
                               <p:par>
-                                <p:cTn id="20" presetID="10" presetClass="entr" presetSubtype="0" fill="hold" nodeType="clickEffect">
+                                <p:cTn id="23" presetID="10" presetClass="entr" presetSubtype="0" fill="hold" nodeType="clickEffect">
                                   <p:stCondLst>
                                     <p:cond delay="0"/>
                                   </p:stCondLst>
                                   <p:childTnLst>
                                     <p:set>
                                       <p:cBhvr>
-                                        <p:cTn id="21" dur="1" fill="hold">
+                                        <p:cTn id="24" dur="1" fill="hold">
                                           <p:stCondLst>
                                             <p:cond delay="0"/>
                                           </p:stCondLst>
@@ -5372,7 +5450,7 @@
                                     </p:set>
                                     <p:animEffect transition="in" filter="fade">
                                       <p:cBhvr>
-                                        <p:cTn id="22" dur="500"/>
+                                        <p:cTn id="25" dur="500"/>
                                         <p:tgtEl>
                                           <p:spTgt spid="36"/>
                                         </p:tgtEl>
@@ -5382,14 +5460,14 @@
                                 </p:cTn>
                               </p:par>
                               <p:par>
-                                <p:cTn id="23" presetID="10" presetClass="entr" presetSubtype="0" fill="hold" nodeType="withEffect">
+                                <p:cTn id="26" presetID="10" presetClass="entr" presetSubtype="0" fill="hold" nodeType="withEffect">
                                   <p:stCondLst>
                                     <p:cond delay="0"/>
                                   </p:stCondLst>
                                   <p:childTnLst>
                                     <p:set>
                                       <p:cBhvr>
-                                        <p:cTn id="24" dur="1" fill="hold">
+                                        <p:cTn id="27" dur="1" fill="hold">
                                           <p:stCondLst>
                                             <p:cond delay="0"/>
                                           </p:stCondLst>
@@ -5407,7 +5485,7 @@
                                     </p:set>
                                     <p:animEffect transition="in" filter="fade">
                                       <p:cBhvr>
-                                        <p:cTn id="25" dur="500"/>
+                                        <p:cTn id="28" dur="500"/>
                                         <p:tgtEl>
                                           <p:spTgt spid="35"/>
                                         </p:tgtEl>
@@ -5423,19 +5501,19 @@
                     </p:cTn>
                   </p:par>
                   <p:par>
-                    <p:cTn id="26" fill="hold">
+                    <p:cTn id="29" fill="hold">
                       <p:stCondLst>
                         <p:cond delay="indefinite"/>
                       </p:stCondLst>
                       <p:childTnLst>
                         <p:par>
-                          <p:cTn id="27" fill="hold">
+                          <p:cTn id="30" fill="hold">
                             <p:stCondLst>
                               <p:cond delay="0"/>
                             </p:stCondLst>
                             <p:childTnLst>
                               <p:par>
-                                <p:cTn id="28" presetID="1" presetClass="exit" presetSubtype="0" fill="hold" grpId="1" nodeType="clickEffect">
+                                <p:cTn id="31" presetID="1" presetClass="exit" presetSubtype="0" fill="hold" grpId="1" nodeType="clickEffect">
                                   <p:stCondLst>
                                     <p:cond delay="0"/>
                                   </p:stCondLst>
@@ -5445,7 +5523,7 @@
                                   <p:childTnLst>
                                     <p:set>
                                       <p:cBhvr>
-                                        <p:cTn id="29" dur="1" fill="hold">
+                                        <p:cTn id="32" dur="1" fill="hold">
                                           <p:stCondLst>
                                             <p:cond delay="0"/>
                                           </p:stCondLst>
@@ -5465,14 +5543,14 @@
                                 </p:cTn>
                               </p:par>
                               <p:par>
-                                <p:cTn id="30" presetID="1" presetClass="exit" presetSubtype="0" fill="hold" nodeType="withEffect">
+                                <p:cTn id="33" presetID="1" presetClass="exit" presetSubtype="0" fill="hold" nodeType="withEffect">
                                   <p:stCondLst>
                                     <p:cond delay="0"/>
                                   </p:stCondLst>
                                   <p:childTnLst>
                                     <p:set>
                                       <p:cBhvr>
-                                        <p:cTn id="31" dur="1" fill="hold">
+                                        <p:cTn id="34" dur="1" fill="hold">
                                           <p:stCondLst>
                                             <p:cond delay="0"/>
                                           </p:stCondLst>
@@ -5492,14 +5570,14 @@
                                 </p:cTn>
                               </p:par>
                               <p:par>
-                                <p:cTn id="32" presetID="1" presetClass="exit" presetSubtype="0" fill="hold" nodeType="withEffect">
+                                <p:cTn id="35" presetID="1" presetClass="exit" presetSubtype="0" fill="hold" nodeType="withEffect">
                                   <p:stCondLst>
                                     <p:cond delay="0"/>
                                   </p:stCondLst>
                                   <p:childTnLst>
                                     <p:set>
                                       <p:cBhvr>
-                                        <p:cTn id="33" dur="1" fill="hold">
+                                        <p:cTn id="36" dur="1" fill="hold">
                                           <p:stCondLst>
                                             <p:cond delay="0"/>
                                           </p:stCondLst>
@@ -5519,14 +5597,14 @@
                                 </p:cTn>
                               </p:par>
                               <p:par>
-                                <p:cTn id="34" presetID="1" presetClass="exit" presetSubtype="0" fill="hold" nodeType="withEffect">
+                                <p:cTn id="37" presetID="1" presetClass="exit" presetSubtype="0" fill="hold" nodeType="withEffect">
                                   <p:stCondLst>
                                     <p:cond delay="0"/>
                                   </p:stCondLst>
                                   <p:childTnLst>
                                     <p:set>
                                       <p:cBhvr>
-                                        <p:cTn id="35" dur="1" fill="hold">
+                                        <p:cTn id="38" dur="1" fill="hold">
                                           <p:stCondLst>
                                             <p:cond delay="0"/>
                                           </p:stCondLst>
@@ -5546,14 +5624,14 @@
                                 </p:cTn>
                               </p:par>
                               <p:par>
-                                <p:cTn id="36" presetID="1" presetClass="exit" presetSubtype="0" fill="hold" nodeType="withEffect">
+                                <p:cTn id="39" presetID="1" presetClass="exit" presetSubtype="0" fill="hold" nodeType="withEffect">
                                   <p:stCondLst>
                                     <p:cond delay="0"/>
                                   </p:stCondLst>
                                   <p:childTnLst>
                                     <p:set>
                                       <p:cBhvr>
-                                        <p:cTn id="37" dur="1" fill="hold">
+                                        <p:cTn id="40" dur="1" fill="hold">
                                           <p:stCondLst>
                                             <p:cond delay="0"/>
                                           </p:stCondLst>
@@ -5573,7 +5651,7 @@
                                 </p:cTn>
                               </p:par>
                               <p:par>
-                                <p:cTn id="38" presetID="1" presetClass="entr" presetSubtype="0" fill="hold" grpId="0" nodeType="withEffect">
+                                <p:cTn id="41" presetID="1" presetClass="entr" presetSubtype="0" fill="hold" grpId="0" nodeType="withEffect">
                                   <p:stCondLst>
                                     <p:cond delay="5500"/>
                                   </p:stCondLst>
@@ -5583,7 +5661,7 @@
                                   <p:childTnLst>
                                     <p:set>
                                       <p:cBhvr>
-                                        <p:cTn id="39" dur="1" fill="hold">
+                                        <p:cTn id="42" dur="1" fill="hold">
                                           <p:stCondLst>
                                             <p:cond delay="0"/>
                                           </p:stCondLst>
@@ -5609,26 +5687,26 @@
                     </p:cTn>
                   </p:par>
                   <p:par>
-                    <p:cTn id="40" fill="hold">
+                    <p:cTn id="43" fill="hold">
                       <p:stCondLst>
                         <p:cond delay="indefinite"/>
                       </p:stCondLst>
                       <p:childTnLst>
                         <p:par>
-                          <p:cTn id="41" fill="hold">
+                          <p:cTn id="44" fill="hold">
                             <p:stCondLst>
                               <p:cond delay="0"/>
                             </p:stCondLst>
                             <p:childTnLst>
                               <p:par>
-                                <p:cTn id="42" presetID="10" presetClass="entr" presetSubtype="0" fill="hold" nodeType="clickEffect">
+                                <p:cTn id="45" presetID="10" presetClass="entr" presetSubtype="0" fill="hold" nodeType="clickEffect">
                                   <p:stCondLst>
                                     <p:cond delay="0"/>
                                   </p:stCondLst>
                                   <p:childTnLst>
                                     <p:set>
                                       <p:cBhvr>
-                                        <p:cTn id="43" dur="1" fill="hold">
+                                        <p:cTn id="46" dur="1" fill="hold">
                                           <p:stCondLst>
                                             <p:cond delay="0"/>
                                           </p:stCondLst>
@@ -5646,7 +5724,7 @@
                                     </p:set>
                                     <p:animEffect transition="in" filter="fade">
                                       <p:cBhvr>
-                                        <p:cTn id="44" dur="500"/>
+                                        <p:cTn id="47" dur="500"/>
                                         <p:tgtEl>
                                           <p:spTgt spid="47"/>
                                         </p:tgtEl>
@@ -5656,14 +5734,14 @@
                                 </p:cTn>
                               </p:par>
                               <p:par>
-                                <p:cTn id="45" presetID="10" presetClass="entr" presetSubtype="0" fill="hold" nodeType="withEffect">
+                                <p:cTn id="48" presetID="10" presetClass="entr" presetSubtype="0" fill="hold" nodeType="withEffect">
                                   <p:stCondLst>
                                     <p:cond delay="0"/>
                                   </p:stCondLst>
                                   <p:childTnLst>
                                     <p:set>
                                       <p:cBhvr>
-                                        <p:cTn id="46" dur="1" fill="hold">
+                                        <p:cTn id="49" dur="1" fill="hold">
                                           <p:stCondLst>
                                             <p:cond delay="0"/>
                                           </p:stCondLst>
@@ -5681,7 +5759,7 @@
                                     </p:set>
                                     <p:animEffect transition="in" filter="fade">
                                       <p:cBhvr>
-                                        <p:cTn id="47" dur="500"/>
+                                        <p:cTn id="50" dur="500"/>
                                         <p:tgtEl>
                                           <p:spTgt spid="46"/>
                                         </p:tgtEl>
@@ -5697,26 +5775,26 @@
                     </p:cTn>
                   </p:par>
                   <p:par>
-                    <p:cTn id="48" fill="hold">
+                    <p:cTn id="51" fill="hold">
                       <p:stCondLst>
                         <p:cond delay="indefinite"/>
                       </p:stCondLst>
                       <p:childTnLst>
                         <p:par>
-                          <p:cTn id="49" fill="hold">
+                          <p:cTn id="52" fill="hold">
                             <p:stCondLst>
                               <p:cond delay="0"/>
                             </p:stCondLst>
                             <p:childTnLst>
                               <p:par>
-                                <p:cTn id="50" presetID="22" presetClass="entr" presetSubtype="4" fill="hold" nodeType="clickEffect">
+                                <p:cTn id="53" presetID="22" presetClass="entr" presetSubtype="4" fill="hold" nodeType="clickEffect">
                                   <p:stCondLst>
                                     <p:cond delay="0"/>
                                   </p:stCondLst>
                                   <p:childTnLst>
                                     <p:set>
                                       <p:cBhvr>
-                                        <p:cTn id="51" dur="1" fill="hold">
+                                        <p:cTn id="54" dur="1" fill="hold">
                                           <p:stCondLst>
                                             <p:cond delay="0"/>
                                           </p:stCondLst>
@@ -5734,7 +5812,7 @@
                                     </p:set>
                                     <p:animEffect transition="in" filter="wipe(down)">
                                       <p:cBhvr>
-                                        <p:cTn id="52" dur="500"/>
+                                        <p:cTn id="55" dur="500"/>
                                         <p:tgtEl>
                                           <p:spTgt spid="37"/>
                                         </p:tgtEl>
@@ -5747,20 +5825,20 @@
                           </p:cTn>
                         </p:par>
                         <p:par>
-                          <p:cTn id="53" fill="hold">
+                          <p:cTn id="56" fill="hold">
                             <p:stCondLst>
                               <p:cond delay="500"/>
                             </p:stCondLst>
                             <p:childTnLst>
                               <p:par>
-                                <p:cTn id="54" presetID="1" presetClass="entr" presetSubtype="0" fill="hold" nodeType="afterEffect">
+                                <p:cTn id="57" presetID="1" presetClass="entr" presetSubtype="0" fill="hold" nodeType="afterEffect">
                                   <p:stCondLst>
                                     <p:cond delay="0"/>
                                   </p:stCondLst>
                                   <p:childTnLst>
                                     <p:set>
                                       <p:cBhvr>
-                                        <p:cTn id="55" dur="1" fill="hold">
+                                        <p:cTn id="58" dur="1" fill="hold">
                                           <p:stCondLst>
                                             <p:cond delay="0"/>
                                           </p:stCondLst>
@@ -5786,26 +5864,26 @@
                     </p:cTn>
                   </p:par>
                   <p:par>
-                    <p:cTn id="56" fill="hold">
+                    <p:cTn id="59" fill="hold">
                       <p:stCondLst>
                         <p:cond delay="indefinite"/>
                       </p:stCondLst>
                       <p:childTnLst>
                         <p:par>
-                          <p:cTn id="57" fill="hold">
+                          <p:cTn id="60" fill="hold">
                             <p:stCondLst>
                               <p:cond delay="0"/>
                             </p:stCondLst>
                             <p:childTnLst>
                               <p:par>
-                                <p:cTn id="58" presetID="1" presetClass="exit" presetSubtype="0" fill="hold" nodeType="clickEffect">
+                                <p:cTn id="61" presetID="1" presetClass="exit" presetSubtype="0" fill="hold" nodeType="clickEffect">
                                   <p:stCondLst>
                                     <p:cond delay="0"/>
                                   </p:stCondLst>
                                   <p:childTnLst>
                                     <p:set>
                                       <p:cBhvr>
-                                        <p:cTn id="59" dur="1" fill="hold">
+                                        <p:cTn id="62" dur="1" fill="hold">
                                           <p:stCondLst>
                                             <p:cond delay="0"/>
                                           </p:stCondLst>
@@ -5825,14 +5903,14 @@
                                 </p:cTn>
                               </p:par>
                               <p:par>
-                                <p:cTn id="60" presetID="22" presetClass="entr" presetSubtype="4" fill="hold" nodeType="withEffect">
+                                <p:cTn id="63" presetID="22" presetClass="entr" presetSubtype="4" fill="hold" nodeType="withEffect">
                                   <p:stCondLst>
                                     <p:cond delay="0"/>
                                   </p:stCondLst>
                                   <p:childTnLst>
                                     <p:set>
                                       <p:cBhvr>
-                                        <p:cTn id="61" dur="1" fill="hold">
+                                        <p:cTn id="64" dur="1" fill="hold">
                                           <p:stCondLst>
                                             <p:cond delay="0"/>
                                           </p:stCondLst>
@@ -5850,7 +5928,7 @@
                                     </p:set>
                                     <p:animEffect transition="in" filter="wipe(down)">
                                       <p:cBhvr>
-                                        <p:cTn id="62" dur="1500"/>
+                                        <p:cTn id="65" dur="1500"/>
                                         <p:tgtEl>
                                           <p:spTgt spid="12"/>
                                         </p:tgtEl>
@@ -5860,14 +5938,14 @@
                                 </p:cTn>
                               </p:par>
                               <p:par>
-                                <p:cTn id="63" presetID="22" presetClass="entr" presetSubtype="4" fill="hold" grpId="0" nodeType="withEffect">
+                                <p:cTn id="66" presetID="22" presetClass="entr" presetSubtype="4" fill="hold" grpId="0" nodeType="withEffect">
                                   <p:stCondLst>
                                     <p:cond delay="1000"/>
                                   </p:stCondLst>
                                   <p:childTnLst>
                                     <p:set>
                                       <p:cBhvr>
-                                        <p:cTn id="64" dur="1" fill="hold">
+                                        <p:cTn id="67" dur="1" fill="hold">
                                           <p:stCondLst>
                                             <p:cond delay="0"/>
                                           </p:stCondLst>
@@ -5885,7 +5963,7 @@
                                     </p:set>
                                     <p:animEffect transition="in" filter="wipe(down)">
                                       <p:cBhvr>
-                                        <p:cTn id="65" dur="500"/>
+                                        <p:cTn id="68" dur="500"/>
                                         <p:tgtEl>
                                           <p:spTgt spid="52"/>
                                         </p:tgtEl>
@@ -5895,14 +5973,14 @@
                                 </p:cTn>
                               </p:par>
                               <p:par>
-                                <p:cTn id="66" presetID="10" presetClass="entr" presetSubtype="0" fill="hold" nodeType="withEffect">
+                                <p:cTn id="69" presetID="10" presetClass="entr" presetSubtype="0" fill="hold" nodeType="withEffect">
                                   <p:stCondLst>
                                     <p:cond delay="0"/>
                                   </p:stCondLst>
                                   <p:childTnLst>
                                     <p:set>
                                       <p:cBhvr>
-                                        <p:cTn id="67" dur="1" fill="hold">
+                                        <p:cTn id="70" dur="1" fill="hold">
                                           <p:stCondLst>
                                             <p:cond delay="0"/>
                                           </p:stCondLst>
@@ -5920,7 +5998,7 @@
                                     </p:set>
                                     <p:animEffect transition="in" filter="fade">
                                       <p:cBhvr>
-                                        <p:cTn id="68" dur="500"/>
+                                        <p:cTn id="71" dur="500"/>
                                         <p:tgtEl>
                                           <p:spTgt spid="51"/>
                                         </p:tgtEl>
@@ -6078,8 +6156,36 @@
           <a:lstStyle/>
           <a:p>
             <a:r>
-              <a:rPr lang="en-US"/>
-              <a:t>So, I learned a good amount in self-management</a:t>
+              <a:rPr lang="en-US" dirty="0"/>
+              <a:t>Different “blockers” for motivation (it’s got some good concepts, don’t get me started on the ma… </a:t>
+            </a:r>
+          </a:p>
+          <a:p>
+            <a:r>
+              <a:rPr lang="en-US" dirty="0" err="1"/>
+              <a:t>Hygein</a:t>
+            </a:r>
+            <a:r>
+              <a:rPr lang="en-US" dirty="0"/>
+              <a:t> (fun fact; research shows 100% of people who are unhygienic have poor hygiene)</a:t>
+            </a:r>
+          </a:p>
+          <a:p>
+            <a:r>
+              <a:rPr lang="en-US" dirty="0"/>
+              <a:t>The whole concept of “emotional intelligence”</a:t>
+            </a:r>
+          </a:p>
+          <a:p>
+            <a:endParaRPr lang="en-US" dirty="0"/>
+          </a:p>
+          <a:p>
+            <a:pPr marL="0" indent="0">
+              <a:buNone/>
+            </a:pPr>
+            <a:r>
+              <a:rPr lang="en-US" dirty="0"/>
+              <a:t>Those last 2 where more review, but still useful!</a:t>
             </a:r>
           </a:p>
         </p:txBody>
@@ -6343,7 +6449,7 @@
           <p:cNvPr id="2" name="Title 1">
             <a:extLst>
               <a:ext uri="{FF2B5EF4-FFF2-40B4-BE49-F238E27FC236}">
-                <a16:creationId xmlns:a16="http://schemas.microsoft.com/office/drawing/2014/main" id="{DEE7004E-EF71-9197-6B85-D0142E571033}"/>
+                <a16:creationId xmlns:a16="http://schemas.microsoft.com/office/drawing/2014/main" id="{5A37F828-651A-BB3F-72A1-CB1C42CEA444}"/>
               </a:ext>
             </a:extLst>
           </p:cNvPr>
@@ -6360,8 +6466,16 @@
           <a:lstStyle/>
           <a:p>
             <a:r>
-              <a:rPr lang="en-US"/>
-              <a:t>Favorite Memory</a:t>
+              <a:rPr lang="en-US" dirty="0"/>
+              <a:t>Club: </a:t>
+            </a:r>
+            <a:r>
+              <a:rPr lang="en-US" dirty="0" err="1"/>
+              <a:t>Startrek</a:t>
+            </a:r>
+            <a:r>
+              <a:rPr lang="en-US" dirty="0"/>
+              <a:t> Club</a:t>
             </a:r>
           </a:p>
         </p:txBody>
@@ -6371,7 +6485,7 @@
           <p:cNvPr id="3" name="Content Placeholder 2">
             <a:extLst>
               <a:ext uri="{FF2B5EF4-FFF2-40B4-BE49-F238E27FC236}">
-                <a16:creationId xmlns:a16="http://schemas.microsoft.com/office/drawing/2014/main" id="{39AB66EF-0CE6-6948-73F2-46E646BCEE15}"/>
+                <a16:creationId xmlns:a16="http://schemas.microsoft.com/office/drawing/2014/main" id="{2BC341DC-59B2-2461-01F2-51AAC0A6D9C3}"/>
               </a:ext>
             </a:extLst>
           </p:cNvPr>
@@ -6387,46 +6501,66 @@
           <a:bodyPr/>
           <a:lstStyle/>
           <a:p>
-            <a:endParaRPr lang="en-US"/>
-          </a:p>
-        </p:txBody>
-      </p:sp>
-    </p:spTree>
-    <p:extLst>
-      <p:ext uri="{BB962C8B-B14F-4D97-AF65-F5344CB8AC3E}">
-        <p14:creationId xmlns:p14="http://schemas.microsoft.com/office/powerpoint/2010/main" val="3249708286"/>
-      </p:ext>
-    </p:extLst>
-  </p:cSld>
-  <p:clrMapOvr>
-    <a:masterClrMapping/>
-  </p:clrMapOvr>
-</p:sld>
-</file>
-
-<file path=ppt/slides/slide5.xml><?xml version="1.0" encoding="utf-8"?>
-<p:sld xmlns:a="http://schemas.openxmlformats.org/drawingml/2006/main" xmlns:r="http://schemas.openxmlformats.org/officeDocument/2006/relationships" xmlns:p="http://schemas.openxmlformats.org/presentationml/2006/main">
-  <p:cSld>
-    <p:spTree>
-      <p:nvGrpSpPr>
-        <p:cNvPr id="1" name=""/>
-        <p:cNvGrpSpPr/>
-        <p:nvPr/>
-      </p:nvGrpSpPr>
-      <p:grpSpPr>
-        <a:xfrm>
-          <a:off x="0" y="0"/>
-          <a:ext cx="0" cy="0"/>
-          <a:chOff x="0" y="0"/>
-          <a:chExt cx="0" cy="0"/>
-        </a:xfrm>
-      </p:grpSpPr>
-      <p:sp>
-        <p:nvSpPr>
-          <p:cNvPr id="7" name="Title 1">
+            <a:pPr marL="0" indent="0">
+              <a:buNone/>
+            </a:pPr>
+            <a:r>
+              <a:rPr lang="en-US" dirty="0"/>
+              <a:t>This term I had </a:t>
+            </a:r>
+            <a:r>
+              <a:rPr lang="en-US" dirty="0" err="1"/>
+              <a:t>startrek</a:t>
+            </a:r>
+            <a:r>
+              <a:rPr lang="en-US" dirty="0"/>
+              <a:t> club, which was, well, okay; </a:t>
+            </a:r>
+            <a:r>
+              <a:rPr lang="en-US" dirty="0" err="1"/>
+              <a:t>Startrek</a:t>
+            </a:r>
+            <a:r>
+              <a:rPr lang="en-US" dirty="0"/>
+              <a:t> and Cohen. Need I expand </a:t>
+            </a:r>
+            <a:r>
+              <a:rPr lang="en-US"/>
+              <a:t>on that (:</a:t>
+            </a:r>
+            <a:endParaRPr lang="en-US" dirty="0"/>
+          </a:p>
+          <a:p>
+            <a:pPr marL="0" indent="0">
+              <a:buNone/>
+            </a:pPr>
+            <a:endParaRPr lang="en-US" dirty="0"/>
+          </a:p>
+          <a:p>
+            <a:pPr marL="0" indent="0">
+              <a:buNone/>
+            </a:pPr>
+            <a:r>
+              <a:rPr lang="en-US" dirty="0"/>
+              <a:t>You may have noticed the lack of “favorite memory”, that’s because it’s here: it would have to be watching </a:t>
+            </a:r>
+            <a:r>
+              <a:rPr lang="en-US" dirty="0" err="1"/>
+              <a:t>Startrek</a:t>
+            </a:r>
+            <a:r>
+              <a:rPr lang="en-US" dirty="0"/>
+              <a:t> IV: The Voyage Home (or as we like to call it “the whale one”). Basically, they have to go back in time to rescue whales…</a:t>
+            </a:r>
+          </a:p>
+        </p:txBody>
+      </p:sp>
+      <p:sp>
+        <p:nvSpPr>
+          <p:cNvPr id="4" name="Title 1">
             <a:extLst>
               <a:ext uri="{FF2B5EF4-FFF2-40B4-BE49-F238E27FC236}">
-                <a16:creationId xmlns:a16="http://schemas.microsoft.com/office/drawing/2014/main" id="{45B7BE17-E49E-766F-92F2-A8A7AC40165D}"/>
+                <a16:creationId xmlns:a16="http://schemas.microsoft.com/office/drawing/2014/main" id="{88024DAB-534E-8485-AB12-6418A07A6930}"/>
               </a:ext>
             </a:extLst>
           </p:cNvPr>
@@ -6437,7 +6571,7 @@
         </p:nvSpPr>
         <p:spPr>
           <a:xfrm>
-            <a:off x="2133600" y="379942"/>
+            <a:off x="838200" y="365124"/>
             <a:ext cx="10515600" cy="1325563"/>
           </a:xfrm>
           <a:prstGeom prst="rect">
@@ -6469,115 +6603,16 @@
           </a:lstStyle>
           <a:p>
             <a:r>
-              <a:rPr lang="en-US"/>
-              <a:t>Art Through The Ages</a:t>
-            </a:r>
-          </a:p>
-        </p:txBody>
-      </p:sp>
-      <p:sp>
-        <p:nvSpPr>
-          <p:cNvPr id="2" name="Title 1">
-            <a:extLst>
-              <a:ext uri="{FF2B5EF4-FFF2-40B4-BE49-F238E27FC236}">
-                <a16:creationId xmlns:a16="http://schemas.microsoft.com/office/drawing/2014/main" id="{5A37F828-651A-BB3F-72A1-CB1C42CEA444}"/>
-              </a:ext>
-            </a:extLst>
-          </p:cNvPr>
-          <p:cNvSpPr>
-            <a:spLocks noGrp="1"/>
-          </p:cNvSpPr>
-          <p:nvPr>
-            <p:ph type="title"/>
-          </p:nvPr>
-        </p:nvSpPr>
-        <p:spPr/>
-        <p:txBody>
-          <a:bodyPr/>
-          <a:lstStyle/>
-          <a:p>
-            <a:r>
-              <a:rPr lang="en-US"/>
-              <a:t>Club:</a:t>
-            </a:r>
-          </a:p>
-        </p:txBody>
-      </p:sp>
-      <p:sp>
-        <p:nvSpPr>
-          <p:cNvPr id="3" name="Content Placeholder 2">
-            <a:extLst>
-              <a:ext uri="{FF2B5EF4-FFF2-40B4-BE49-F238E27FC236}">
-                <a16:creationId xmlns:a16="http://schemas.microsoft.com/office/drawing/2014/main" id="{2BC341DC-59B2-2461-01F2-51AAC0A6D9C3}"/>
-              </a:ext>
-            </a:extLst>
-          </p:cNvPr>
-          <p:cNvSpPr>
-            <a:spLocks noGrp="1"/>
-          </p:cNvSpPr>
-          <p:nvPr>
-            <p:ph idx="1"/>
-          </p:nvPr>
-        </p:nvSpPr>
-        <p:spPr/>
-        <p:txBody>
-          <a:bodyPr/>
-          <a:lstStyle/>
-          <a:p>
-            <a:endParaRPr lang="en-US"/>
-          </a:p>
-        </p:txBody>
-      </p:sp>
-      <p:sp>
-        <p:nvSpPr>
-          <p:cNvPr id="5" name="Title 1">
-            <a:extLst>
-              <a:ext uri="{FF2B5EF4-FFF2-40B4-BE49-F238E27FC236}">
-                <a16:creationId xmlns:a16="http://schemas.microsoft.com/office/drawing/2014/main" id="{30939E82-4970-022D-9999-07C6BB1F0FBB}"/>
-              </a:ext>
-            </a:extLst>
-          </p:cNvPr>
-          <p:cNvSpPr txBox="1">
-            <a:spLocks/>
-          </p:cNvSpPr>
-          <p:nvPr/>
-        </p:nvSpPr>
-        <p:spPr>
-          <a:xfrm>
-            <a:off x="2133600" y="379942"/>
-            <a:ext cx="10515600" cy="1325563"/>
-          </a:xfrm>
-          <a:prstGeom prst="rect">
-            <a:avLst/>
-          </a:prstGeom>
-        </p:spPr>
-        <p:txBody>
-          <a:bodyPr vert="horz" lIns="91440" tIns="45720" rIns="91440" bIns="45720" rtlCol="0" anchor="ctr">
-            <a:normAutofit/>
-          </a:bodyPr>
-          <a:lstStyle>
-            <a:lvl1pPr algn="l" defTabSz="914400" rtl="0" eaLnBrk="1" latinLnBrk="0" hangingPunct="1">
-              <a:lnSpc>
-                <a:spcPct val="90000"/>
-              </a:lnSpc>
-              <a:spcBef>
-                <a:spcPct val="0"/>
-              </a:spcBef>
-              <a:buNone/>
-              <a:defRPr sz="4400" kern="1200">
-                <a:solidFill>
-                  <a:schemeClr val="tx1"/>
-                </a:solidFill>
-                <a:latin typeface="+mj-lt"/>
-                <a:ea typeface="+mj-ea"/>
-                <a:cs typeface="+mj-cs"/>
-              </a:defRPr>
-            </a:lvl1pPr>
-          </a:lstStyle>
-          <a:p>
-            <a:r>
-              <a:rPr lang="en-US"/>
-              <a:t>Star Trek Club</a:t>
+              <a:rPr lang="en-US" dirty="0"/>
+              <a:t>Club: </a:t>
+            </a:r>
+            <a:r>
+              <a:rPr lang="en-US" dirty="0" err="1"/>
+              <a:t>Startrek</a:t>
+            </a:r>
+            <a:r>
+              <a:rPr lang="en-US" dirty="0"/>
+              <a:t> Club</a:t>
             </a:r>
           </a:p>
         </p:txBody>
@@ -6685,21 +6720,39 @@
                                   </p:childTnLst>
                                 </p:cTn>
                               </p:par>
+                            </p:childTnLst>
+                          </p:cTn>
+                        </p:par>
+                      </p:childTnLst>
+                    </p:cTn>
+                  </p:par>
+                  <p:par>
+                    <p:cTn id="9" fill="hold">
+                      <p:stCondLst>
+                        <p:cond delay="indefinite"/>
+                      </p:stCondLst>
+                      <p:childTnLst>
+                        <p:par>
+                          <p:cTn id="10" fill="hold">
+                            <p:stCondLst>
+                              <p:cond delay="0"/>
+                            </p:stCondLst>
+                            <p:childTnLst>
                               <p:par>
-                                <p:cTn id="9" presetID="2" presetClass="entr" presetSubtype="4" fill="hold" grpId="0" nodeType="withEffect">
+                                <p:cTn id="11" presetID="2" presetClass="entr" presetSubtype="4" fill="hold" grpId="0" nodeType="clickEffect">
                                   <p:stCondLst>
                                     <p:cond delay="0"/>
                                   </p:stCondLst>
                                   <p:childTnLst>
                                     <p:set>
                                       <p:cBhvr>
-                                        <p:cTn id="10" dur="1" fill="hold">
+                                        <p:cTn id="12" dur="1" fill="hold">
                                           <p:stCondLst>
                                             <p:cond delay="0"/>
                                           </p:stCondLst>
                                         </p:cTn>
                                         <p:tgtEl>
-                                          <p:spTgt spid="5"/>
+                                          <p:spTgt spid="4"/>
                                         </p:tgtEl>
                                         <p:attrNameLst>
                                           <p:attrName>style.visibility</p:attrName>
@@ -6711,9 +6764,9 @@
                                     </p:set>
                                     <p:anim calcmode="lin" valueType="num">
                                       <p:cBhvr additive="base">
-                                        <p:cTn id="11" dur="500" fill="hold"/>
+                                        <p:cTn id="13" dur="500" fill="hold"/>
                                         <p:tgtEl>
-                                          <p:spTgt spid="5"/>
+                                          <p:spTgt spid="4"/>
                                         </p:tgtEl>
                                         <p:attrNameLst>
                                           <p:attrName>ppt_x</p:attrName>
@@ -6734,9 +6787,9 @@
                                     </p:anim>
                                     <p:anim calcmode="lin" valueType="num">
                                       <p:cBhvr additive="base">
-                                        <p:cTn id="12" dur="500" fill="hold"/>
+                                        <p:cTn id="14" dur="500" fill="hold"/>
                                         <p:tgtEl>
-                                          <p:spTgt spid="5"/>
+                                          <p:spTgt spid="4"/>
                                         </p:tgtEl>
                                         <p:attrNameLst>
                                           <p:attrName>ppt_y</p:attrName>
@@ -6755,78 +6808,6 @@
                                         </p:tav>
                                       </p:tavLst>
                                     </p:anim>
-                                  </p:childTnLst>
-                                </p:cTn>
-                              </p:par>
-                            </p:childTnLst>
-                          </p:cTn>
-                        </p:par>
-                      </p:childTnLst>
-                    </p:cTn>
-                  </p:par>
-                  <p:par>
-                    <p:cTn id="13" fill="hold">
-                      <p:stCondLst>
-                        <p:cond delay="indefinite"/>
-                      </p:stCondLst>
-                      <p:childTnLst>
-                        <p:par>
-                          <p:cTn id="14" fill="hold">
-                            <p:stCondLst>
-                              <p:cond delay="0"/>
-                            </p:stCondLst>
-                            <p:childTnLst>
-                              <p:par>
-                                <p:cTn id="15" presetID="1" presetClass="entr" presetSubtype="0" fill="hold" grpId="0" nodeType="clickEffect">
-                                  <p:stCondLst>
-                                    <p:cond delay="0"/>
-                                  </p:stCondLst>
-                                  <p:childTnLst>
-                                    <p:set>
-                                      <p:cBhvr>
-                                        <p:cTn id="16" dur="1" fill="hold">
-                                          <p:stCondLst>
-                                            <p:cond delay="0"/>
-                                          </p:stCondLst>
-                                        </p:cTn>
-                                        <p:tgtEl>
-                                          <p:spTgt spid="7"/>
-                                        </p:tgtEl>
-                                        <p:attrNameLst>
-                                          <p:attrName>style.visibility</p:attrName>
-                                        </p:attrNameLst>
-                                      </p:cBhvr>
-                                      <p:to>
-                                        <p:strVal val="visible"/>
-                                      </p:to>
-                                    </p:set>
-                                  </p:childTnLst>
-                                </p:cTn>
-                              </p:par>
-                              <p:par>
-                                <p:cTn id="17" presetID="1" presetClass="exit" presetSubtype="0" fill="hold" grpId="1" nodeType="withEffect">
-                                  <p:stCondLst>
-                                    <p:cond delay="0"/>
-                                  </p:stCondLst>
-                                  <p:childTnLst>
-                                    <p:set>
-                                      <p:cBhvr>
-                                        <p:cTn id="18" dur="1" fill="hold">
-                                          <p:stCondLst>
-                                            <p:cond delay="0"/>
-                                          </p:stCondLst>
-                                        </p:cTn>
-                                        <p:tgtEl>
-                                          <p:spTgt spid="5"/>
-                                        </p:tgtEl>
-                                        <p:attrNameLst>
-                                          <p:attrName>style.visibility</p:attrName>
-                                        </p:attrNameLst>
-                                      </p:cBhvr>
-                                      <p:to>
-                                        <p:strVal val="hidden"/>
-                                      </p:to>
-                                    </p:set>
                                   </p:childTnLst>
                                 </p:cTn>
                               </p:par>
@@ -6858,16 +6839,14 @@
       </p:par>
     </p:tnLst>
     <p:bldLst>
-      <p:bldP spid="7" grpId="0"/>
       <p:bldP spid="2" grpId="0"/>
-      <p:bldP spid="5" grpId="0"/>
-      <p:bldP spid="5" grpId="1"/>
+      <p:bldP spid="4" grpId="0"/>
     </p:bldLst>
   </p:timing>
 </p:sld>
 </file>
 
-<file path=ppt/slides/slide6.xml><?xml version="1.0" encoding="utf-8"?>
+<file path=ppt/slides/slide5.xml><?xml version="1.0" encoding="utf-8"?>
 <p:sld xmlns:a="http://schemas.openxmlformats.org/drawingml/2006/main" xmlns:r="http://schemas.openxmlformats.org/officeDocument/2006/relationships" xmlns:p="http://schemas.openxmlformats.org/presentationml/2006/main">
   <p:cSld>
     <p:spTree>
@@ -6905,7 +6884,10 @@
           <a:bodyPr/>
           <a:lstStyle/>
           <a:p>
-            <a:endParaRPr lang="en-US"/>
+            <a:r>
+              <a:rPr lang="en-US" dirty="0"/>
+              <a:t>And now;</a:t>
+            </a:r>
           </a:p>
         </p:txBody>
       </p:sp>
@@ -6932,9 +6914,36 @@
           </a:bodyPr>
           <a:lstStyle/>
           <a:p>
-            <a:r>
-              <a:rPr lang="en-US"/>
-              <a:t>Of course,   </a:t>
+            <a:pPr marL="0" indent="0">
+              <a:buNone/>
+            </a:pPr>
+            <a:r>
+              <a:rPr lang="en-US" dirty="0"/>
+              <a:t>The moment you’ve been waiting for:</a:t>
+            </a:r>
+          </a:p>
+          <a:p>
+            <a:pPr marL="0" indent="0">
+              <a:buNone/>
+            </a:pPr>
+            <a:r>
+              <a:rPr lang="en-US" dirty="0"/>
+              <a:t>THE END (fade to black)</a:t>
+            </a:r>
+          </a:p>
+          <a:p>
+            <a:pPr marL="0" indent="0">
+              <a:buNone/>
+            </a:pPr>
+            <a:endParaRPr lang="en-US" dirty="0"/>
+          </a:p>
+          <a:p>
+            <a:pPr marL="0" indent="0">
+              <a:buNone/>
+            </a:pPr>
+            <a:r>
+              <a:rPr lang="en-US" dirty="0"/>
+              <a:t>Uh… one sec… THE END</a:t>
             </a:r>
           </a:p>
         </p:txBody>
@@ -6949,37 +6958,6 @@
   <p:clrMapOvr>
     <a:masterClrMapping/>
   </p:clrMapOvr>
-</p:sld>
-</file>
-
-<file path=ppt/slides/slide7.xml><?xml version="1.0" encoding="utf-8"?>
-<p:sld xmlns:a="http://schemas.openxmlformats.org/drawingml/2006/main" xmlns:r="http://schemas.openxmlformats.org/officeDocument/2006/relationships" xmlns:p="http://schemas.openxmlformats.org/presentationml/2006/main">
-  <p:cSld>
-    <p:spTree>
-      <p:nvGrpSpPr>
-        <p:cNvPr id="1" name=""/>
-        <p:cNvGrpSpPr/>
-        <p:nvPr/>
-      </p:nvGrpSpPr>
-      <p:grpSpPr>
-        <a:xfrm>
-          <a:off x="0" y="0"/>
-          <a:ext cx="0" cy="0"/>
-          <a:chOff x="0" y="0"/>
-          <a:chExt cx="0" cy="0"/>
-        </a:xfrm>
-      </p:grpSpPr>
-    </p:spTree>
-    <p:extLst>
-      <p:ext uri="{BB962C8B-B14F-4D97-AF65-F5344CB8AC3E}">
-        <p14:creationId xmlns:p14="http://schemas.microsoft.com/office/powerpoint/2010/main" val="3833004409"/>
-      </p:ext>
-    </p:extLst>
-  </p:cSld>
-  <p:clrMapOvr>
-    <a:masterClrMapping/>
-  </p:clrMapOvr>
-  <p:transition advClick="0"/>
 </p:sld>
 </file>
 

--- a/Current Presentation/Charlie- summer 2026 presentation.pptx
+++ b/Current Presentation/Charlie- summer 2026 presentation.pptx
@@ -111,14 +111,21 @@
       </a:defRPr>
     </a:lvl9pPr>
   </p:defaultTextStyle>
+  <p:extLst>
+    <p:ext uri="{EFAFB233-063F-42B5-8137-9DF3F51BA10A}">
+      <p15:sldGuideLst xmlns:p15="http://schemas.microsoft.com/office/powerpoint/2012/main"/>
+    </p:ext>
+  </p:extLst>
 </p:presentation>
 </file>
 
 <file path=ppt/revisionInfo.xml><?xml version="1.0" encoding="utf-8"?>
 <p1510:revInfo xmlns:a="http://schemas.openxmlformats.org/drawingml/2006/main" xmlns:r="http://schemas.openxmlformats.org/officeDocument/2006/relationships" xmlns:p1510="http://schemas.microsoft.com/office/powerpoint/2015/10/main">
   <p1510:revLst>
+    <p1510:client id="{00000000-0000-0000-0000-000000000000}" v="18" dt="2026-09-17T14:34:19.028"/>
     <p1510:client id="{70E034A4-BB94-F8D4-67B6-8AD443040898}" v="40" dt="2026-09-16T19:24:07.670"/>
     <p1510:client id="{B56F71EC-F6B7-385C-DEBA-57351A51A5CE}" v="558" dt="2026-09-16T20:52:48.026"/>
+    <p1510:client id="{C709CF2C-F93C-4076-C238-099E9E74D31B}" v="26" dt="2026-09-17T15:11:54.164"/>
     <p1510:client id="{CC656977-A51D-85A4-2C0F-8858A80BAC84}" v="271" dt="2026-09-16T17:16:40.811"/>
     <p1510:client id="{DDE4C246-BC71-FBBD-D9E0-D9A53124C3F1}" v="20" dt="2026-09-16T20:56:33.724"/>
   </p1510:revLst>
@@ -206,7 +213,7 @@
           </a:lstStyle>
           <a:p>
             <a:fld id="{934B69B3-698B-4882-A570-9DB574FA6439}" type="datetimeFigureOut">
-              <a:t>9/16/2026</a:t>
+              <a:t>9/17/2026</a:t>
             </a:fld>
             <a:endParaRPr lang="en-US"/>
           </a:p>
@@ -636,6 +643,93 @@
 </p:notes>
 </file>
 
+<file path=ppt/notesSlides/notesSlide2.xml><?xml version="1.0" encoding="utf-8"?>
+<p:notes xmlns:a="http://schemas.openxmlformats.org/drawingml/2006/main" xmlns:r="http://schemas.openxmlformats.org/officeDocument/2006/relationships" xmlns:p="http://schemas.openxmlformats.org/presentationml/2006/main">
+  <p:cSld>
+    <p:spTree>
+      <p:nvGrpSpPr>
+        <p:cNvPr id="1" name=""/>
+        <p:cNvGrpSpPr/>
+        <p:nvPr/>
+      </p:nvGrpSpPr>
+      <p:grpSpPr>
+        <a:xfrm>
+          <a:off x="0" y="0"/>
+          <a:ext cx="0" cy="0"/>
+          <a:chOff x="0" y="0"/>
+          <a:chExt cx="0" cy="0"/>
+        </a:xfrm>
+      </p:grpSpPr>
+      <p:sp>
+        <p:nvSpPr>
+          <p:cNvPr id="2" name="Slide Image Placeholder 1"/>
+          <p:cNvSpPr>
+            <a:spLocks noGrp="1" noRot="1" noChangeAspect="1"/>
+          </p:cNvSpPr>
+          <p:nvPr>
+            <p:ph type="sldImg"/>
+          </p:nvPr>
+        </p:nvSpPr>
+        <p:spPr/>
+      </p:sp>
+      <p:sp>
+        <p:nvSpPr>
+          <p:cNvPr id="3" name="Notes Placeholder 2"/>
+          <p:cNvSpPr>
+            <a:spLocks noGrp="1"/>
+          </p:cNvSpPr>
+          <p:nvPr>
+            <p:ph type="body" idx="1"/>
+          </p:nvPr>
+        </p:nvSpPr>
+        <p:spPr/>
+        <p:txBody>
+          <a:bodyPr/>
+          <a:lstStyle/>
+          <a:p>
+            <a:endParaRPr lang="en-US" dirty="0">
+              <a:ea typeface="Calibri" panose="020F0502020204030204"/>
+              <a:cs typeface="Calibri" panose="020F0502020204030204"/>
+            </a:endParaRPr>
+          </a:p>
+        </p:txBody>
+      </p:sp>
+      <p:sp>
+        <p:nvSpPr>
+          <p:cNvPr id="4" name="Slide Number Placeholder 3"/>
+          <p:cNvSpPr>
+            <a:spLocks noGrp="1"/>
+          </p:cNvSpPr>
+          <p:nvPr>
+            <p:ph type="sldNum" sz="quarter" idx="5"/>
+          </p:nvPr>
+        </p:nvSpPr>
+        <p:spPr/>
+        <p:txBody>
+          <a:bodyPr/>
+          <a:lstStyle/>
+          <a:p>
+            <a:fld id="{9D746EA8-CCA3-4787-BBCF-88E4FAE9F3D0}" type="slidenum">
+              <a:rPr lang="en-US"/>
+              <a:t>4</a:t>
+            </a:fld>
+            <a:endParaRPr lang="en-US"/>
+          </a:p>
+        </p:txBody>
+      </p:sp>
+    </p:spTree>
+    <p:extLst>
+      <p:ext uri="{BB962C8B-B14F-4D97-AF65-F5344CB8AC3E}">
+        <p14:creationId xmlns:p14="http://schemas.microsoft.com/office/powerpoint/2010/main" val="3513790979"/>
+      </p:ext>
+    </p:extLst>
+  </p:cSld>
+  <p:clrMapOvr>
+    <a:masterClrMapping/>
+  </p:clrMapOvr>
+</p:notes>
+</file>
+
 <file path=ppt/slideLayouts/slideLayout1.xml><?xml version="1.0" encoding="utf-8"?>
 <p:sldLayout xmlns:a="http://schemas.openxmlformats.org/drawingml/2006/main" xmlns:r="http://schemas.openxmlformats.org/officeDocument/2006/relationships" xmlns:p="http://schemas.openxmlformats.org/presentationml/2006/main" type="title" preserve="1">
   <p:cSld name="Title Slide">
@@ -765,7 +859,7 @@
           <a:p>
             <a:fld id="{846CE7D5-CF57-46EF-B807-FDD0502418D4}" type="datetimeFigureOut">
               <a:rPr lang="en-US" smtClean="0"/>
-              <a:t>9/16/2026</a:t>
+              <a:t>9/17/2026</a:t>
             </a:fld>
             <a:endParaRPr lang="en-US"/>
           </a:p>
@@ -933,7 +1027,7 @@
           <a:p>
             <a:fld id="{846CE7D5-CF57-46EF-B807-FDD0502418D4}" type="datetimeFigureOut">
               <a:rPr lang="en-US" smtClean="0"/>
-              <a:t>9/16/2026</a:t>
+              <a:t>9/17/2026</a:t>
             </a:fld>
             <a:endParaRPr lang="en-US"/>
           </a:p>
@@ -1111,7 +1205,7 @@
           <a:p>
             <a:fld id="{846CE7D5-CF57-46EF-B807-FDD0502418D4}" type="datetimeFigureOut">
               <a:rPr lang="en-US" smtClean="0"/>
-              <a:t>9/16/2026</a:t>
+              <a:t>9/17/2026</a:t>
             </a:fld>
             <a:endParaRPr lang="en-US"/>
           </a:p>
@@ -1279,7 +1373,7 @@
           <a:p>
             <a:fld id="{846CE7D5-CF57-46EF-B807-FDD0502418D4}" type="datetimeFigureOut">
               <a:rPr lang="en-US" smtClean="0"/>
-              <a:t>9/16/2026</a:t>
+              <a:t>9/17/2026</a:t>
             </a:fld>
             <a:endParaRPr lang="en-US"/>
           </a:p>
@@ -1524,7 +1618,7 @@
           <a:p>
             <a:fld id="{846CE7D5-CF57-46EF-B807-FDD0502418D4}" type="datetimeFigureOut">
               <a:rPr lang="en-US" smtClean="0"/>
-              <a:t>9/16/2026</a:t>
+              <a:t>9/17/2026</a:t>
             </a:fld>
             <a:endParaRPr lang="en-US"/>
           </a:p>
@@ -1753,7 +1847,7 @@
           <a:p>
             <a:fld id="{846CE7D5-CF57-46EF-B807-FDD0502418D4}" type="datetimeFigureOut">
               <a:rPr lang="en-US" smtClean="0"/>
-              <a:t>9/16/2026</a:t>
+              <a:t>9/17/2026</a:t>
             </a:fld>
             <a:endParaRPr lang="en-US"/>
           </a:p>
@@ -2117,7 +2211,7 @@
           <a:p>
             <a:fld id="{846CE7D5-CF57-46EF-B807-FDD0502418D4}" type="datetimeFigureOut">
               <a:rPr lang="en-US" smtClean="0"/>
-              <a:t>9/16/2026</a:t>
+              <a:t>9/17/2026</a:t>
             </a:fld>
             <a:endParaRPr lang="en-US"/>
           </a:p>
@@ -2234,7 +2328,7 @@
           <a:p>
             <a:fld id="{846CE7D5-CF57-46EF-B807-FDD0502418D4}" type="datetimeFigureOut">
               <a:rPr lang="en-US" smtClean="0"/>
-              <a:t>9/16/2026</a:t>
+              <a:t>9/17/2026</a:t>
             </a:fld>
             <a:endParaRPr lang="en-US"/>
           </a:p>
@@ -2329,7 +2423,7 @@
           <a:p>
             <a:fld id="{846CE7D5-CF57-46EF-B807-FDD0502418D4}" type="datetimeFigureOut">
               <a:rPr lang="en-US" smtClean="0"/>
-              <a:t>9/16/2026</a:t>
+              <a:t>9/17/2026</a:t>
             </a:fld>
             <a:endParaRPr lang="en-US"/>
           </a:p>
@@ -2604,7 +2698,7 @@
           <a:p>
             <a:fld id="{846CE7D5-CF57-46EF-B807-FDD0502418D4}" type="datetimeFigureOut">
               <a:rPr lang="en-US" smtClean="0"/>
-              <a:t>9/16/2026</a:t>
+              <a:t>9/17/2026</a:t>
             </a:fld>
             <a:endParaRPr lang="en-US"/>
           </a:p>
@@ -2856,7 +2950,7 @@
           <a:p>
             <a:fld id="{846CE7D5-CF57-46EF-B807-FDD0502418D4}" type="datetimeFigureOut">
               <a:rPr lang="en-US" smtClean="0"/>
-              <a:t>9/16/2026</a:t>
+              <a:t>9/17/2026</a:t>
             </a:fld>
             <a:endParaRPr lang="en-US"/>
           </a:p>
@@ -3067,7 +3161,7 @@
           <a:p>
             <a:fld id="{846CE7D5-CF57-46EF-B807-FDD0502418D4}" type="datetimeFigureOut">
               <a:rPr lang="en-US" smtClean="0"/>
-              <a:t>9/16/2026</a:t>
+              <a:t>9/17/2026</a:t>
             </a:fld>
             <a:endParaRPr lang="en-US"/>
           </a:p>
@@ -3506,7 +3600,9 @@
         </p:nvSpPr>
         <p:spPr/>
         <p:txBody>
-          <a:bodyPr/>
+          <a:bodyPr vert="horz" lIns="91440" tIns="45720" rIns="91440" bIns="45720" rtlCol="0" anchor="t">
+            <a:normAutofit/>
+          </a:bodyPr>
           <a:lstStyle/>
           <a:p>
             <a:r>
@@ -3658,21 +3754,30 @@
                             </p:childTnLst>
                           </p:cTn>
                         </p:par>
+                      </p:childTnLst>
+                    </p:cTn>
+                  </p:par>
+                  <p:par>
+                    <p:cTn id="10" fill="hold">
+                      <p:stCondLst>
+                        <p:cond delay="indefinite"/>
+                      </p:stCondLst>
+                      <p:childTnLst>
                         <p:par>
-                          <p:cTn id="10" fill="hold">
+                          <p:cTn id="11" fill="hold">
                             <p:stCondLst>
-                              <p:cond delay="2000"/>
+                              <p:cond delay="0"/>
                             </p:stCondLst>
                             <p:childTnLst>
                               <p:par>
-                                <p:cTn id="11" presetID="45" presetClass="entr" presetSubtype="0" fill="hold" grpId="0" nodeType="afterEffect">
+                                <p:cTn id="12" presetID="45" presetClass="entr" presetSubtype="0" fill="hold" grpId="0" nodeType="clickEffect">
                                   <p:stCondLst>
                                     <p:cond delay="0"/>
                                   </p:stCondLst>
                                   <p:childTnLst>
                                     <p:set>
                                       <p:cBhvr>
-                                        <p:cTn id="12" dur="1" fill="hold">
+                                        <p:cTn id="13" dur="1" fill="hold">
                                           <p:stCondLst>
                                             <p:cond delay="0"/>
                                           </p:stCondLst>
@@ -3694,7 +3799,7 @@
                                     </p:set>
                                     <p:animEffect transition="in" filter="fade">
                                       <p:cBhvr>
-                                        <p:cTn id="13" dur="2000"/>
+                                        <p:cTn id="14" dur="2000"/>
                                         <p:tgtEl>
                                           <p:spTgt spid="3">
                                             <p:txEl>
@@ -3706,7 +3811,7 @@
                                     </p:animEffect>
                                     <p:anim calcmode="lin" valueType="num">
                                       <p:cBhvr>
-                                        <p:cTn id="14" dur="2000" fill="hold"/>
+                                        <p:cTn id="15" dur="2000" fill="hold"/>
                                         <p:tgtEl>
                                           <p:spTgt spid="3">
                                             <p:txEl>
@@ -3733,7 +3838,7 @@
                                     </p:anim>
                                     <p:anim calcmode="lin" valueType="num">
                                       <p:cBhvr>
-                                        <p:cTn id="15" dur="2000" fill="hold"/>
+                                        <p:cTn id="16" dur="2000" fill="hold"/>
                                         <p:tgtEl>
                                           <p:spTgt spid="3">
                                             <p:txEl>
@@ -3765,20 +3870,20 @@
                           </p:cTn>
                         </p:par>
                         <p:par>
-                          <p:cTn id="16" fill="hold">
+                          <p:cTn id="17" fill="hold">
                             <p:stCondLst>
-                              <p:cond delay="4000"/>
+                              <p:cond delay="2000"/>
                             </p:stCondLst>
                             <p:childTnLst>
                               <p:par>
-                                <p:cTn id="17" presetID="45" presetClass="entr" presetSubtype="0" fill="hold" grpId="0" nodeType="afterEffect">
+                                <p:cTn id="18" presetID="45" presetClass="entr" presetSubtype="0" fill="hold" grpId="0" nodeType="afterEffect">
                                   <p:stCondLst>
                                     <p:cond delay="0"/>
                                   </p:stCondLst>
                                   <p:childTnLst>
                                     <p:set>
                                       <p:cBhvr>
-                                        <p:cTn id="18" dur="1" fill="hold">
+                                        <p:cTn id="19" dur="1" fill="hold">
                                           <p:stCondLst>
                                             <p:cond delay="0"/>
                                           </p:stCondLst>
@@ -3800,7 +3905,7 @@
                                     </p:set>
                                     <p:animEffect transition="in" filter="fade">
                                       <p:cBhvr>
-                                        <p:cTn id="19" dur="2000"/>
+                                        <p:cTn id="20" dur="2000"/>
                                         <p:tgtEl>
                                           <p:spTgt spid="3">
                                             <p:txEl>
@@ -3812,7 +3917,7 @@
                                     </p:animEffect>
                                     <p:anim calcmode="lin" valueType="num">
                                       <p:cBhvr>
-                                        <p:cTn id="20" dur="2000" fill="hold"/>
+                                        <p:cTn id="21" dur="2000" fill="hold"/>
                                         <p:tgtEl>
                                           <p:spTgt spid="3">
                                             <p:txEl>
@@ -3839,7 +3944,7 @@
                                     </p:anim>
                                     <p:anim calcmode="lin" valueType="num">
                                       <p:cBhvr>
-                                        <p:cTn id="21" dur="2000" fill="hold"/>
+                                        <p:cTn id="22" dur="2000" fill="hold"/>
                                         <p:tgtEl>
                                           <p:spTgt spid="3">
                                             <p:txEl>
@@ -5833,7 +5938,7 @@
                               <p:par>
                                 <p:cTn id="57" presetID="1" presetClass="entr" presetSubtype="0" fill="hold" nodeType="afterEffect">
                                   <p:stCondLst>
-                                    <p:cond delay="0"/>
+                                    <p:cond delay="1000"/>
                                   </p:stCondLst>
                                   <p:childTnLst>
                                     <p:set>
@@ -6613,6 +6718,44 @@
             <a:r>
               <a:rPr lang="en-US" dirty="0"/>
               <a:t> Club</a:t>
+            </a:r>
+          </a:p>
+        </p:txBody>
+      </p:sp>
+      <p:sp>
+        <p:nvSpPr>
+          <p:cNvPr id="5" name="TextBox 4">
+            <a:extLst>
+              <a:ext uri="{FF2B5EF4-FFF2-40B4-BE49-F238E27FC236}">
+                <a16:creationId xmlns:a16="http://schemas.microsoft.com/office/drawing/2014/main" id="{77D0035D-BAAA-9B2D-91A0-848DD25989F0}"/>
+              </a:ext>
+            </a:extLst>
+          </p:cNvPr>
+          <p:cNvSpPr txBox="1"/>
+          <p:nvPr/>
+        </p:nvSpPr>
+        <p:spPr>
+          <a:xfrm>
+            <a:off x="1534438" y="240082"/>
+            <a:ext cx="2098109" cy="646331"/>
+          </a:xfrm>
+          <a:prstGeom prst="rect">
+            <a:avLst/>
+          </a:prstGeom>
+          <a:noFill/>
+        </p:spPr>
+        <p:txBody>
+          <a:bodyPr rot="0" spcFirstLastPara="0" vertOverflow="overflow" horzOverflow="overflow" vert="horz" wrap="square" lIns="91440" tIns="45720" rIns="91440" bIns="45720" numCol="1" spcCol="0" rtlCol="0" fromWordArt="0" anchor="t" anchorCtr="0" forceAA="0" compatLnSpc="1">
+            <a:prstTxWarp prst="textNoShape">
+              <a:avLst/>
+            </a:prstTxWarp>
+            <a:spAutoFit/>
+          </a:bodyPr>
+          <a:lstStyle/>
+          <a:p>
+            <a:r>
+              <a:rPr lang="en-US" dirty="0"/>
+              <a:t>One is my name, one isn't</a:t>
             </a:r>
           </a:p>
         </p:txBody>
